--- a/public/the_lyceum/chinese-history/powerpoints/14 The Ming Empire in China.pptx
+++ b/public/the_lyceum/chinese-history/powerpoints/14 The Ming Empire in China.pptx
@@ -5,7 +5,7 @@
     <p:sldMasterId id="2147483741" r:id="rId1"/>
   </p:sldMasterIdLst>
   <p:notesMasterIdLst>
-    <p:notesMasterId r:id="rId43"/>
+    <p:notesMasterId r:id="rId48"/>
   </p:notesMasterIdLst>
   <p:sldIdLst>
     <p:sldId id="256" r:id="rId2"/>
@@ -35,20 +35,25 @@
     <p:sldId id="269" r:id="rId26"/>
     <p:sldId id="270" r:id="rId27"/>
     <p:sldId id="271" r:id="rId28"/>
-    <p:sldId id="282" r:id="rId29"/>
-    <p:sldId id="272" r:id="rId30"/>
-    <p:sldId id="283" r:id="rId31"/>
-    <p:sldId id="286" r:id="rId32"/>
-    <p:sldId id="273" r:id="rId33"/>
-    <p:sldId id="274" r:id="rId34"/>
-    <p:sldId id="278" r:id="rId35"/>
-    <p:sldId id="284" r:id="rId36"/>
-    <p:sldId id="288" r:id="rId37"/>
-    <p:sldId id="277" r:id="rId38"/>
-    <p:sldId id="275" r:id="rId39"/>
-    <p:sldId id="276" r:id="rId40"/>
-    <p:sldId id="279" r:id="rId41"/>
-    <p:sldId id="280" r:id="rId42"/>
+    <p:sldId id="302" r:id="rId29"/>
+    <p:sldId id="303" r:id="rId30"/>
+    <p:sldId id="304" r:id="rId31"/>
+    <p:sldId id="305" r:id="rId32"/>
+    <p:sldId id="306" r:id="rId33"/>
+    <p:sldId id="282" r:id="rId34"/>
+    <p:sldId id="272" r:id="rId35"/>
+    <p:sldId id="283" r:id="rId36"/>
+    <p:sldId id="286" r:id="rId37"/>
+    <p:sldId id="273" r:id="rId38"/>
+    <p:sldId id="274" r:id="rId39"/>
+    <p:sldId id="278" r:id="rId40"/>
+    <p:sldId id="284" r:id="rId41"/>
+    <p:sldId id="288" r:id="rId42"/>
+    <p:sldId id="277" r:id="rId43"/>
+    <p:sldId id="275" r:id="rId44"/>
+    <p:sldId id="276" r:id="rId45"/>
+    <p:sldId id="279" r:id="rId46"/>
+    <p:sldId id="280" r:id="rId47"/>
   </p:sldIdLst>
   <p:sldSz cx="12192000" cy="6858000"/>
   <p:notesSz cx="6858000" cy="9144000"/>
@@ -172,1371 +177,6 @@
 </p:cmAuthorLst>
 </file>
 
-<file path=ppt/changesInfos/changesInfo1.xml><?xml version="1.0" encoding="utf-8"?>
-<pc:chgInfo xmlns:a="http://schemas.openxmlformats.org/drawingml/2006/main" xmlns:r="http://schemas.openxmlformats.org/officeDocument/2006/relationships" xmlns:ac="http://schemas.microsoft.com/office/drawing/2013/main/command" xmlns:pc="http://schemas.microsoft.com/office/powerpoint/2013/main/command">
-  <pc:docChgLst>
-    <pc:chgData userId="9a24253a5e4fde46" providerId="LiveId" clId="{C0A7ED71-9872-40E9-8CCC-A5734F98C157}"/>
-    <pc:docChg chg="custSel addSld delSld modSld sldOrd modMainMaster">
-      <pc:chgData name="" userId="9a24253a5e4fde46" providerId="LiveId" clId="{C0A7ED71-9872-40E9-8CCC-A5734F98C157}" dt="2024-10-24T17:25:31.274" v="368" actId="20577"/>
-      <pc:docMkLst>
-        <pc:docMk/>
-      </pc:docMkLst>
-      <pc:sldChg chg="modSp">
-        <pc:chgData name="" userId="9a24253a5e4fde46" providerId="LiveId" clId="{C0A7ED71-9872-40E9-8CCC-A5734F98C157}" dt="2024-10-24T16:50:03.709" v="59" actId="20577"/>
-        <pc:sldMkLst>
-          <pc:docMk/>
-          <pc:sldMk cId="0" sldId="261"/>
-        </pc:sldMkLst>
-        <pc:spChg chg="mod">
-          <ac:chgData name="" userId="9a24253a5e4fde46" providerId="LiveId" clId="{C0A7ED71-9872-40E9-8CCC-A5734F98C157}" dt="2024-10-24T16:50:03.709" v="59" actId="20577"/>
-          <ac:spMkLst>
-            <pc:docMk/>
-            <pc:sldMk cId="0" sldId="261"/>
-            <ac:spMk id="38915" creationId="{00000000-0000-0000-0000-000000000000}"/>
-          </ac:spMkLst>
-        </pc:spChg>
-      </pc:sldChg>
-      <pc:sldChg chg="modSp del">
-        <pc:chgData name="" userId="9a24253a5e4fde46" providerId="LiveId" clId="{C0A7ED71-9872-40E9-8CCC-A5734F98C157}" dt="2024-10-24T17:00:54.119" v="214" actId="2696"/>
-        <pc:sldMkLst>
-          <pc:docMk/>
-          <pc:sldMk cId="0" sldId="262"/>
-        </pc:sldMkLst>
-        <pc:spChg chg="mod">
-          <ac:chgData name="" userId="9a24253a5e4fde46" providerId="LiveId" clId="{C0A7ED71-9872-40E9-8CCC-A5734F98C157}" dt="2024-10-24T16:55:04.783" v="212" actId="20577"/>
-          <ac:spMkLst>
-            <pc:docMk/>
-            <pc:sldMk cId="0" sldId="262"/>
-            <ac:spMk id="39938" creationId="{00000000-0000-0000-0000-000000000000}"/>
-          </ac:spMkLst>
-        </pc:spChg>
-        <pc:spChg chg="mod">
-          <ac:chgData name="" userId="9a24253a5e4fde46" providerId="LiveId" clId="{C0A7ED71-9872-40E9-8CCC-A5734F98C157}" dt="2024-10-24T16:54:24.945" v="170" actId="6549"/>
-          <ac:spMkLst>
-            <pc:docMk/>
-            <pc:sldMk cId="0" sldId="262"/>
-            <ac:spMk id="39939" creationId="{00000000-0000-0000-0000-000000000000}"/>
-          </ac:spMkLst>
-        </pc:spChg>
-      </pc:sldChg>
-      <pc:sldChg chg="modSp">
-        <pc:chgData name="" userId="9a24253a5e4fde46" providerId="LiveId" clId="{C0A7ED71-9872-40E9-8CCC-A5734F98C157}" dt="2024-10-24T17:03:38.575" v="255" actId="1076"/>
-        <pc:sldMkLst>
-          <pc:docMk/>
-          <pc:sldMk cId="0" sldId="263"/>
-        </pc:sldMkLst>
-        <pc:spChg chg="mod">
-          <ac:chgData name="" userId="9a24253a5e4fde46" providerId="LiveId" clId="{C0A7ED71-9872-40E9-8CCC-A5734F98C157}" dt="2024-10-24T17:03:38.575" v="255" actId="1076"/>
-          <ac:spMkLst>
-            <pc:docMk/>
-            <pc:sldMk cId="0" sldId="263"/>
-            <ac:spMk id="40963" creationId="{00000000-0000-0000-0000-000000000000}"/>
-          </ac:spMkLst>
-        </pc:spChg>
-      </pc:sldChg>
-      <pc:sldChg chg="del">
-        <pc:chgData name="" userId="9a24253a5e4fde46" providerId="LiveId" clId="{C0A7ED71-9872-40E9-8CCC-A5734F98C157}" dt="2024-10-24T17:15:29.375" v="332" actId="2696"/>
-        <pc:sldMkLst>
-          <pc:docMk/>
-          <pc:sldMk cId="0" sldId="264"/>
-        </pc:sldMkLst>
-      </pc:sldChg>
-      <pc:sldChg chg="modSp">
-        <pc:chgData name="" userId="9a24253a5e4fde46" providerId="LiveId" clId="{C0A7ED71-9872-40E9-8CCC-A5734F98C157}" dt="2024-10-24T16:23:05.918" v="2" actId="27636"/>
-        <pc:sldMkLst>
-          <pc:docMk/>
-          <pc:sldMk cId="0" sldId="265"/>
-        </pc:sldMkLst>
-        <pc:spChg chg="mod">
-          <ac:chgData name="" userId="9a24253a5e4fde46" providerId="LiveId" clId="{C0A7ED71-9872-40E9-8CCC-A5734F98C157}" dt="2024-10-24T16:23:05.918" v="2" actId="27636"/>
-          <ac:spMkLst>
-            <pc:docMk/>
-            <pc:sldMk cId="0" sldId="265"/>
-            <ac:spMk id="43011" creationId="{00000000-0000-0000-0000-000000000000}"/>
-          </ac:spMkLst>
-        </pc:spChg>
-      </pc:sldChg>
-      <pc:sldChg chg="modSp ord">
-        <pc:chgData name="" userId="9a24253a5e4fde46" providerId="LiveId" clId="{C0A7ED71-9872-40E9-8CCC-A5734F98C157}" dt="2024-10-24T17:15:46.827" v="333"/>
-        <pc:sldMkLst>
-          <pc:docMk/>
-          <pc:sldMk cId="0" sldId="266"/>
-        </pc:sldMkLst>
-        <pc:spChg chg="mod">
-          <ac:chgData name="" userId="9a24253a5e4fde46" providerId="LiveId" clId="{C0A7ED71-9872-40E9-8CCC-A5734F98C157}" dt="2024-10-24T16:23:05.661" v="0"/>
-          <ac:spMkLst>
-            <pc:docMk/>
-            <pc:sldMk cId="0" sldId="266"/>
-            <ac:spMk id="44035" creationId="{00000000-0000-0000-0000-000000000000}"/>
-          </ac:spMkLst>
-        </pc:spChg>
-      </pc:sldChg>
-      <pc:sldChg chg="modSp">
-        <pc:chgData name="" userId="9a24253a5e4fde46" providerId="LiveId" clId="{C0A7ED71-9872-40E9-8CCC-A5734F98C157}" dt="2024-10-24T16:23:05.928" v="3" actId="27636"/>
-        <pc:sldMkLst>
-          <pc:docMk/>
-          <pc:sldMk cId="0" sldId="267"/>
-        </pc:sldMkLst>
-        <pc:spChg chg="mod">
-          <ac:chgData name="" userId="9a24253a5e4fde46" providerId="LiveId" clId="{C0A7ED71-9872-40E9-8CCC-A5734F98C157}" dt="2024-10-24T16:23:05.928" v="3" actId="27636"/>
-          <ac:spMkLst>
-            <pc:docMk/>
-            <pc:sldMk cId="0" sldId="267"/>
-            <ac:spMk id="45059" creationId="{00000000-0000-0000-0000-000000000000}"/>
-          </ac:spMkLst>
-        </pc:spChg>
-      </pc:sldChg>
-      <pc:sldChg chg="modSp">
-        <pc:chgData name="" userId="9a24253a5e4fde46" providerId="LiveId" clId="{C0A7ED71-9872-40E9-8CCC-A5734F98C157}" dt="2024-10-24T16:23:05.661" v="0"/>
-        <pc:sldMkLst>
-          <pc:docMk/>
-          <pc:sldMk cId="0" sldId="268"/>
-        </pc:sldMkLst>
-        <pc:picChg chg="mod">
-          <ac:chgData name="" userId="9a24253a5e4fde46" providerId="LiveId" clId="{C0A7ED71-9872-40E9-8CCC-A5734F98C157}" dt="2024-10-24T16:23:05.661" v="0"/>
-          <ac:picMkLst>
-            <pc:docMk/>
-            <pc:sldMk cId="0" sldId="268"/>
-            <ac:picMk id="46085" creationId="{00000000-0000-0000-0000-000000000000}"/>
-          </ac:picMkLst>
-        </pc:picChg>
-      </pc:sldChg>
-      <pc:sldChg chg="modSp">
-        <pc:chgData name="" userId="9a24253a5e4fde46" providerId="LiveId" clId="{C0A7ED71-9872-40E9-8CCC-A5734F98C157}" dt="2024-10-24T16:23:05.661" v="0"/>
-        <pc:sldMkLst>
-          <pc:docMk/>
-          <pc:sldMk cId="0" sldId="269"/>
-        </pc:sldMkLst>
-        <pc:spChg chg="mod">
-          <ac:chgData name="" userId="9a24253a5e4fde46" providerId="LiveId" clId="{C0A7ED71-9872-40E9-8CCC-A5734F98C157}" dt="2024-10-24T16:23:05.661" v="0"/>
-          <ac:spMkLst>
-            <pc:docMk/>
-            <pc:sldMk cId="0" sldId="269"/>
-            <ac:spMk id="48131" creationId="{00000000-0000-0000-0000-000000000000}"/>
-          </ac:spMkLst>
-        </pc:spChg>
-        <pc:picChg chg="mod">
-          <ac:chgData name="" userId="9a24253a5e4fde46" providerId="LiveId" clId="{C0A7ED71-9872-40E9-8CCC-A5734F98C157}" dt="2024-10-24T16:23:05.661" v="0"/>
-          <ac:picMkLst>
-            <pc:docMk/>
-            <pc:sldMk cId="0" sldId="269"/>
-            <ac:picMk id="48133" creationId="{00000000-0000-0000-0000-000000000000}"/>
-          </ac:picMkLst>
-        </pc:picChg>
-      </pc:sldChg>
-      <pc:sldChg chg="modSp">
-        <pc:chgData name="" userId="9a24253a5e4fde46" providerId="LiveId" clId="{C0A7ED71-9872-40E9-8CCC-A5734F98C157}" dt="2024-10-24T16:23:05.661" v="0"/>
-        <pc:sldMkLst>
-          <pc:docMk/>
-          <pc:sldMk cId="0" sldId="270"/>
-        </pc:sldMkLst>
-        <pc:spChg chg="mod">
-          <ac:chgData name="" userId="9a24253a5e4fde46" providerId="LiveId" clId="{C0A7ED71-9872-40E9-8CCC-A5734F98C157}" dt="2024-10-24T16:23:05.661" v="0"/>
-          <ac:spMkLst>
-            <pc:docMk/>
-            <pc:sldMk cId="0" sldId="270"/>
-            <ac:spMk id="52227" creationId="{00000000-0000-0000-0000-000000000000}"/>
-          </ac:spMkLst>
-        </pc:spChg>
-      </pc:sldChg>
-      <pc:sldChg chg="modSp">
-        <pc:chgData name="" userId="9a24253a5e4fde46" providerId="LiveId" clId="{C0A7ED71-9872-40E9-8CCC-A5734F98C157}" dt="2024-10-24T16:23:05.941" v="4" actId="27636"/>
-        <pc:sldMkLst>
-          <pc:docMk/>
-          <pc:sldMk cId="0" sldId="271"/>
-        </pc:sldMkLst>
-        <pc:spChg chg="mod">
-          <ac:chgData name="" userId="9a24253a5e4fde46" providerId="LiveId" clId="{C0A7ED71-9872-40E9-8CCC-A5734F98C157}" dt="2024-10-24T16:23:05.941" v="4" actId="27636"/>
-          <ac:spMkLst>
-            <pc:docMk/>
-            <pc:sldMk cId="0" sldId="271"/>
-            <ac:spMk id="53251" creationId="{00000000-0000-0000-0000-000000000000}"/>
-          </ac:spMkLst>
-        </pc:spChg>
-      </pc:sldChg>
-      <pc:sldChg chg="modSp">
-        <pc:chgData name="" userId="9a24253a5e4fde46" providerId="LiveId" clId="{C0A7ED71-9872-40E9-8CCC-A5734F98C157}" dt="2024-10-24T16:23:05.950" v="5" actId="27636"/>
-        <pc:sldMkLst>
-          <pc:docMk/>
-          <pc:sldMk cId="0" sldId="272"/>
-        </pc:sldMkLst>
-        <pc:spChg chg="mod">
-          <ac:chgData name="" userId="9a24253a5e4fde46" providerId="LiveId" clId="{C0A7ED71-9872-40E9-8CCC-A5734F98C157}" dt="2024-10-24T16:23:05.950" v="5" actId="27636"/>
-          <ac:spMkLst>
-            <pc:docMk/>
-            <pc:sldMk cId="0" sldId="272"/>
-            <ac:spMk id="54275" creationId="{00000000-0000-0000-0000-000000000000}"/>
-          </ac:spMkLst>
-        </pc:spChg>
-      </pc:sldChg>
-      <pc:sldChg chg="modSp">
-        <pc:chgData name="" userId="9a24253a5e4fde46" providerId="LiveId" clId="{C0A7ED71-9872-40E9-8CCC-A5734F98C157}" dt="2024-10-24T16:23:05.661" v="0"/>
-        <pc:sldMkLst>
-          <pc:docMk/>
-          <pc:sldMk cId="0" sldId="273"/>
-        </pc:sldMkLst>
-        <pc:spChg chg="mod">
-          <ac:chgData name="" userId="9a24253a5e4fde46" providerId="LiveId" clId="{C0A7ED71-9872-40E9-8CCC-A5734F98C157}" dt="2024-10-24T16:23:05.661" v="0"/>
-          <ac:spMkLst>
-            <pc:docMk/>
-            <pc:sldMk cId="0" sldId="273"/>
-            <ac:spMk id="55299" creationId="{00000000-0000-0000-0000-000000000000}"/>
-          </ac:spMkLst>
-        </pc:spChg>
-      </pc:sldChg>
-      <pc:sldChg chg="modSp">
-        <pc:chgData name="" userId="9a24253a5e4fde46" providerId="LiveId" clId="{C0A7ED71-9872-40E9-8CCC-A5734F98C157}" dt="2024-10-24T16:23:05.661" v="0"/>
-        <pc:sldMkLst>
-          <pc:docMk/>
-          <pc:sldMk cId="0" sldId="275"/>
-        </pc:sldMkLst>
-        <pc:spChg chg="mod">
-          <ac:chgData name="" userId="9a24253a5e4fde46" providerId="LiveId" clId="{C0A7ED71-9872-40E9-8CCC-A5734F98C157}" dt="2024-10-24T16:23:05.661" v="0"/>
-          <ac:spMkLst>
-            <pc:docMk/>
-            <pc:sldMk cId="0" sldId="275"/>
-            <ac:spMk id="57347" creationId="{00000000-0000-0000-0000-000000000000}"/>
-          </ac:spMkLst>
-        </pc:spChg>
-        <pc:picChg chg="mod">
-          <ac:chgData name="" userId="9a24253a5e4fde46" providerId="LiveId" clId="{C0A7ED71-9872-40E9-8CCC-A5734F98C157}" dt="2024-10-24T16:23:05.661" v="0"/>
-          <ac:picMkLst>
-            <pc:docMk/>
-            <pc:sldMk cId="0" sldId="275"/>
-            <ac:picMk id="57349" creationId="{00000000-0000-0000-0000-000000000000}"/>
-          </ac:picMkLst>
-        </pc:picChg>
-      </pc:sldChg>
-      <pc:sldChg chg="modSp">
-        <pc:chgData name="" userId="9a24253a5e4fde46" providerId="LiveId" clId="{C0A7ED71-9872-40E9-8CCC-A5734F98C157}" dt="2024-10-24T16:23:05.661" v="0"/>
-        <pc:sldMkLst>
-          <pc:docMk/>
-          <pc:sldMk cId="0" sldId="276"/>
-        </pc:sldMkLst>
-        <pc:spChg chg="mod">
-          <ac:chgData name="" userId="9a24253a5e4fde46" providerId="LiveId" clId="{C0A7ED71-9872-40E9-8CCC-A5734F98C157}" dt="2024-10-24T16:23:05.661" v="0"/>
-          <ac:spMkLst>
-            <pc:docMk/>
-            <pc:sldMk cId="0" sldId="276"/>
-            <ac:spMk id="59395" creationId="{00000000-0000-0000-0000-000000000000}"/>
-          </ac:spMkLst>
-        </pc:spChg>
-        <pc:picChg chg="mod">
-          <ac:chgData name="" userId="9a24253a5e4fde46" providerId="LiveId" clId="{C0A7ED71-9872-40E9-8CCC-A5734F98C157}" dt="2024-10-24T16:23:05.661" v="0"/>
-          <ac:picMkLst>
-            <pc:docMk/>
-            <pc:sldMk cId="0" sldId="276"/>
-            <ac:picMk id="59397" creationId="{00000000-0000-0000-0000-000000000000}"/>
-          </ac:picMkLst>
-        </pc:picChg>
-      </pc:sldChg>
-      <pc:sldChg chg="modSp">
-        <pc:chgData name="" userId="9a24253a5e4fde46" providerId="LiveId" clId="{C0A7ED71-9872-40E9-8CCC-A5734F98C157}" dt="2024-10-24T17:25:31.274" v="368" actId="20577"/>
-        <pc:sldMkLst>
-          <pc:docMk/>
-          <pc:sldMk cId="521235012" sldId="281"/>
-        </pc:sldMkLst>
-        <pc:spChg chg="mod">
-          <ac:chgData name="" userId="9a24253a5e4fde46" providerId="LiveId" clId="{C0A7ED71-9872-40E9-8CCC-A5734F98C157}" dt="2024-10-24T17:25:31.274" v="368" actId="20577"/>
-          <ac:spMkLst>
-            <pc:docMk/>
-            <pc:sldMk cId="521235012" sldId="281"/>
-            <ac:spMk id="3" creationId="{00000000-0000-0000-0000-000000000000}"/>
-          </ac:spMkLst>
-        </pc:spChg>
-      </pc:sldChg>
-      <pc:sldChg chg="modSp">
-        <pc:chgData name="" userId="9a24253a5e4fde46" providerId="LiveId" clId="{C0A7ED71-9872-40E9-8CCC-A5734F98C157}" dt="2024-10-24T16:23:05.958" v="6" actId="27636"/>
-        <pc:sldMkLst>
-          <pc:docMk/>
-          <pc:sldMk cId="152965521" sldId="283"/>
-        </pc:sldMkLst>
-        <pc:spChg chg="mod">
-          <ac:chgData name="" userId="9a24253a5e4fde46" providerId="LiveId" clId="{C0A7ED71-9872-40E9-8CCC-A5734F98C157}" dt="2024-10-24T16:23:05.958" v="6" actId="27636"/>
-          <ac:spMkLst>
-            <pc:docMk/>
-            <pc:sldMk cId="152965521" sldId="283"/>
-            <ac:spMk id="3" creationId="{00000000-0000-0000-0000-000000000000}"/>
-          </ac:spMkLst>
-        </pc:spChg>
-      </pc:sldChg>
-      <pc:sldChg chg="modSp">
-        <pc:chgData name="" userId="9a24253a5e4fde46" providerId="LiveId" clId="{C0A7ED71-9872-40E9-8CCC-A5734F98C157}" dt="2024-10-24T16:23:05.972" v="7" actId="27636"/>
-        <pc:sldMkLst>
-          <pc:docMk/>
-          <pc:sldMk cId="2191714699" sldId="284"/>
-        </pc:sldMkLst>
-        <pc:spChg chg="mod">
-          <ac:chgData name="" userId="9a24253a5e4fde46" providerId="LiveId" clId="{C0A7ED71-9872-40E9-8CCC-A5734F98C157}" dt="2024-10-24T16:23:05.972" v="7" actId="27636"/>
-          <ac:spMkLst>
-            <pc:docMk/>
-            <pc:sldMk cId="2191714699" sldId="284"/>
-            <ac:spMk id="3" creationId="{00000000-0000-0000-0000-000000000000}"/>
-          </ac:spMkLst>
-        </pc:spChg>
-      </pc:sldChg>
-      <pc:sldChg chg="modSp">
-        <pc:chgData name="" userId="9a24253a5e4fde46" providerId="LiveId" clId="{C0A7ED71-9872-40E9-8CCC-A5734F98C157}" dt="2024-10-24T17:14:08.195" v="305" actId="6549"/>
-        <pc:sldMkLst>
-          <pc:docMk/>
-          <pc:sldMk cId="268169168" sldId="285"/>
-        </pc:sldMkLst>
-        <pc:spChg chg="mod">
-          <ac:chgData name="" userId="9a24253a5e4fde46" providerId="LiveId" clId="{C0A7ED71-9872-40E9-8CCC-A5734F98C157}" dt="2024-10-24T17:14:08.195" v="305" actId="6549"/>
-          <ac:spMkLst>
-            <pc:docMk/>
-            <pc:sldMk cId="268169168" sldId="285"/>
-            <ac:spMk id="4" creationId="{00000000-0000-0000-0000-000000000000}"/>
-          </ac:spMkLst>
-        </pc:spChg>
-      </pc:sldChg>
-      <pc:sldChg chg="modSp">
-        <pc:chgData name="" userId="9a24253a5e4fde46" providerId="LiveId" clId="{C0A7ED71-9872-40E9-8CCC-A5734F98C157}" dt="2024-10-24T16:23:05.981" v="8" actId="27636"/>
-        <pc:sldMkLst>
-          <pc:docMk/>
-          <pc:sldMk cId="3736608000" sldId="288"/>
-        </pc:sldMkLst>
-        <pc:spChg chg="mod">
-          <ac:chgData name="" userId="9a24253a5e4fde46" providerId="LiveId" clId="{C0A7ED71-9872-40E9-8CCC-A5734F98C157}" dt="2024-10-24T16:23:05.981" v="8" actId="27636"/>
-          <ac:spMkLst>
-            <pc:docMk/>
-            <pc:sldMk cId="3736608000" sldId="288"/>
-            <ac:spMk id="3" creationId="{00000000-0000-0000-0000-000000000000}"/>
-          </ac:spMkLst>
-        </pc:spChg>
-      </pc:sldChg>
-      <pc:sldChg chg="modSp add">
-        <pc:chgData name="" userId="9a24253a5e4fde46" providerId="LiveId" clId="{C0A7ED71-9872-40E9-8CCC-A5734F98C157}" dt="2024-10-24T16:54:04.902" v="106" actId="1076"/>
-        <pc:sldMkLst>
-          <pc:docMk/>
-          <pc:sldMk cId="418240120" sldId="289"/>
-        </pc:sldMkLst>
-        <pc:spChg chg="mod">
-          <ac:chgData name="" userId="9a24253a5e4fde46" providerId="LiveId" clId="{C0A7ED71-9872-40E9-8CCC-A5734F98C157}" dt="2024-10-24T16:50:17.323" v="83" actId="20577"/>
-          <ac:spMkLst>
-            <pc:docMk/>
-            <pc:sldMk cId="418240120" sldId="289"/>
-            <ac:spMk id="38914" creationId="{00000000-0000-0000-0000-000000000000}"/>
-          </ac:spMkLst>
-        </pc:spChg>
-        <pc:spChg chg="mod">
-          <ac:chgData name="" userId="9a24253a5e4fde46" providerId="LiveId" clId="{C0A7ED71-9872-40E9-8CCC-A5734F98C157}" dt="2024-10-24T16:54:04.902" v="106" actId="1076"/>
-          <ac:spMkLst>
-            <pc:docMk/>
-            <pc:sldMk cId="418240120" sldId="289"/>
-            <ac:spMk id="38915" creationId="{00000000-0000-0000-0000-000000000000}"/>
-          </ac:spMkLst>
-        </pc:spChg>
-      </pc:sldChg>
-      <pc:sldChg chg="modSp add">
-        <pc:chgData name="" userId="9a24253a5e4fde46" providerId="LiveId" clId="{C0A7ED71-9872-40E9-8CCC-A5734F98C157}" dt="2024-10-24T17:01:04.661" v="222" actId="6549"/>
-        <pc:sldMkLst>
-          <pc:docMk/>
-          <pc:sldMk cId="0" sldId="290"/>
-        </pc:sldMkLst>
-        <pc:spChg chg="mod">
-          <ac:chgData name="" userId="9a24253a5e4fde46" providerId="LiveId" clId="{C0A7ED71-9872-40E9-8CCC-A5734F98C157}" dt="2024-10-24T17:01:04.661" v="222" actId="6549"/>
-          <ac:spMkLst>
-            <pc:docMk/>
-            <pc:sldMk cId="0" sldId="290"/>
-            <ac:spMk id="3" creationId="{00000000-0000-0000-0000-000000000000}"/>
-          </ac:spMkLst>
-        </pc:spChg>
-      </pc:sldChg>
-      <pc:sldChg chg="modSp add">
-        <pc:chgData name="" userId="9a24253a5e4fde46" providerId="LiveId" clId="{C0A7ED71-9872-40E9-8CCC-A5734F98C157}" dt="2024-10-24T17:01:14.804" v="228" actId="6549"/>
-        <pc:sldMkLst>
-          <pc:docMk/>
-          <pc:sldMk cId="0" sldId="291"/>
-        </pc:sldMkLst>
-        <pc:spChg chg="mod">
-          <ac:chgData name="" userId="9a24253a5e4fde46" providerId="LiveId" clId="{C0A7ED71-9872-40E9-8CCC-A5734F98C157}" dt="2024-10-24T17:01:14.804" v="228" actId="6549"/>
-          <ac:spMkLst>
-            <pc:docMk/>
-            <pc:sldMk cId="0" sldId="291"/>
-            <ac:spMk id="3" creationId="{00000000-0000-0000-0000-000000000000}"/>
-          </ac:spMkLst>
-        </pc:spChg>
-      </pc:sldChg>
-      <pc:sldChg chg="modSp add">
-        <pc:chgData name="" userId="9a24253a5e4fde46" providerId="LiveId" clId="{C0A7ED71-9872-40E9-8CCC-A5734F98C157}" dt="2024-10-24T17:01:26.743" v="233" actId="6549"/>
-        <pc:sldMkLst>
-          <pc:docMk/>
-          <pc:sldMk cId="0" sldId="292"/>
-        </pc:sldMkLst>
-        <pc:spChg chg="mod">
-          <ac:chgData name="" userId="9a24253a5e4fde46" providerId="LiveId" clId="{C0A7ED71-9872-40E9-8CCC-A5734F98C157}" dt="2024-10-24T17:01:26.743" v="233" actId="6549"/>
-          <ac:spMkLst>
-            <pc:docMk/>
-            <pc:sldMk cId="0" sldId="292"/>
-            <ac:spMk id="3" creationId="{00000000-0000-0000-0000-000000000000}"/>
-          </ac:spMkLst>
-        </pc:spChg>
-      </pc:sldChg>
-      <pc:sldChg chg="modSp add del">
-        <pc:chgData name="" userId="9a24253a5e4fde46" providerId="LiveId" clId="{C0A7ED71-9872-40E9-8CCC-A5734F98C157}" dt="2024-10-24T17:03:08.302" v="253" actId="2696"/>
-        <pc:sldMkLst>
-          <pc:docMk/>
-          <pc:sldMk cId="0" sldId="293"/>
-        </pc:sldMkLst>
-        <pc:spChg chg="mod">
-          <ac:chgData name="" userId="9a24253a5e4fde46" providerId="LiveId" clId="{C0A7ED71-9872-40E9-8CCC-A5734F98C157}" dt="2024-10-24T17:01:38.615" v="239" actId="6549"/>
-          <ac:spMkLst>
-            <pc:docMk/>
-            <pc:sldMk cId="0" sldId="293"/>
-            <ac:spMk id="3" creationId="{00000000-0000-0000-0000-000000000000}"/>
-          </ac:spMkLst>
-        </pc:spChg>
-      </pc:sldChg>
-      <pc:sldChg chg="modSp add del">
-        <pc:chgData name="" userId="9a24253a5e4fde46" providerId="LiveId" clId="{C0A7ED71-9872-40E9-8CCC-A5734F98C157}" dt="2024-10-24T17:02:59.056" v="252" actId="2696"/>
-        <pc:sldMkLst>
-          <pc:docMk/>
-          <pc:sldMk cId="0" sldId="294"/>
-        </pc:sldMkLst>
-        <pc:spChg chg="mod">
-          <ac:chgData name="" userId="9a24253a5e4fde46" providerId="LiveId" clId="{C0A7ED71-9872-40E9-8CCC-A5734F98C157}" dt="2024-10-24T17:01:51.815" v="245" actId="6549"/>
-          <ac:spMkLst>
-            <pc:docMk/>
-            <pc:sldMk cId="0" sldId="294"/>
-            <ac:spMk id="3" creationId="{00000000-0000-0000-0000-000000000000}"/>
-          </ac:spMkLst>
-        </pc:spChg>
-      </pc:sldChg>
-      <pc:sldChg chg="modSp add">
-        <pc:chgData name="" userId="9a24253a5e4fde46" providerId="LiveId" clId="{C0A7ED71-9872-40E9-8CCC-A5734F98C157}" dt="2024-10-24T17:02:10.119" v="251" actId="6549"/>
-        <pc:sldMkLst>
-          <pc:docMk/>
-          <pc:sldMk cId="0" sldId="295"/>
-        </pc:sldMkLst>
-        <pc:spChg chg="mod">
-          <ac:chgData name="" userId="9a24253a5e4fde46" providerId="LiveId" clId="{C0A7ED71-9872-40E9-8CCC-A5734F98C157}" dt="2024-10-24T17:02:10.119" v="251" actId="6549"/>
-          <ac:spMkLst>
-            <pc:docMk/>
-            <pc:sldMk cId="0" sldId="295"/>
-            <ac:spMk id="3" creationId="{00000000-0000-0000-0000-000000000000}"/>
-          </ac:spMkLst>
-        </pc:spChg>
-      </pc:sldChg>
-      <pc:sldChg chg="modSp add">
-        <pc:chgData name="" userId="9a24253a5e4fde46" providerId="LiveId" clId="{C0A7ED71-9872-40E9-8CCC-A5734F98C157}" dt="2024-10-24T17:14:30.402" v="312" actId="6549"/>
-        <pc:sldMkLst>
-          <pc:docMk/>
-          <pc:sldMk cId="0" sldId="296"/>
-        </pc:sldMkLst>
-        <pc:spChg chg="mod">
-          <ac:chgData name="" userId="9a24253a5e4fde46" providerId="LiveId" clId="{C0A7ED71-9872-40E9-8CCC-A5734F98C157}" dt="2024-10-24T17:14:30.402" v="312" actId="6549"/>
-          <ac:spMkLst>
-            <pc:docMk/>
-            <pc:sldMk cId="0" sldId="296"/>
-            <ac:spMk id="3" creationId="{00000000-0000-0000-0000-000000000000}"/>
-          </ac:spMkLst>
-        </pc:spChg>
-      </pc:sldChg>
-      <pc:sldChg chg="modSp add">
-        <pc:chgData name="" userId="9a24253a5e4fde46" providerId="LiveId" clId="{C0A7ED71-9872-40E9-8CCC-A5734F98C157}" dt="2024-10-24T17:14:46.530" v="318" actId="6549"/>
-        <pc:sldMkLst>
-          <pc:docMk/>
-          <pc:sldMk cId="0" sldId="297"/>
-        </pc:sldMkLst>
-        <pc:spChg chg="mod">
-          <ac:chgData name="" userId="9a24253a5e4fde46" providerId="LiveId" clId="{C0A7ED71-9872-40E9-8CCC-A5734F98C157}" dt="2024-10-24T17:14:46.530" v="318" actId="6549"/>
-          <ac:spMkLst>
-            <pc:docMk/>
-            <pc:sldMk cId="0" sldId="297"/>
-            <ac:spMk id="3" creationId="{00000000-0000-0000-0000-000000000000}"/>
-          </ac:spMkLst>
-        </pc:spChg>
-      </pc:sldChg>
-      <pc:sldChg chg="modSp add">
-        <pc:chgData name="" userId="9a24253a5e4fde46" providerId="LiveId" clId="{C0A7ED71-9872-40E9-8CCC-A5734F98C157}" dt="2024-10-24T17:14:59.411" v="324" actId="6549"/>
-        <pc:sldMkLst>
-          <pc:docMk/>
-          <pc:sldMk cId="0" sldId="298"/>
-        </pc:sldMkLst>
-        <pc:spChg chg="mod">
-          <ac:chgData name="" userId="9a24253a5e4fde46" providerId="LiveId" clId="{C0A7ED71-9872-40E9-8CCC-A5734F98C157}" dt="2024-10-24T17:14:59.411" v="324" actId="6549"/>
-          <ac:spMkLst>
-            <pc:docMk/>
-            <pc:sldMk cId="0" sldId="298"/>
-            <ac:spMk id="3" creationId="{00000000-0000-0000-0000-000000000000}"/>
-          </ac:spMkLst>
-        </pc:spChg>
-      </pc:sldChg>
-      <pc:sldChg chg="add del">
-        <pc:chgData name="" userId="9a24253a5e4fde46" providerId="LiveId" clId="{C0A7ED71-9872-40E9-8CCC-A5734F98C157}" dt="2024-10-24T17:15:05.023" v="325" actId="2696"/>
-        <pc:sldMkLst>
-          <pc:docMk/>
-          <pc:sldMk cId="0" sldId="299"/>
-        </pc:sldMkLst>
-      </pc:sldChg>
-      <pc:sldChg chg="modSp add">
-        <pc:chgData name="" userId="9a24253a5e4fde46" providerId="LiveId" clId="{C0A7ED71-9872-40E9-8CCC-A5734F98C157}" dt="2024-10-24T17:15:14.130" v="331" actId="6549"/>
-        <pc:sldMkLst>
-          <pc:docMk/>
-          <pc:sldMk cId="0" sldId="300"/>
-        </pc:sldMkLst>
-        <pc:spChg chg="mod">
-          <ac:chgData name="" userId="9a24253a5e4fde46" providerId="LiveId" clId="{C0A7ED71-9872-40E9-8CCC-A5734F98C157}" dt="2024-10-24T17:15:14.130" v="331" actId="6549"/>
-          <ac:spMkLst>
-            <pc:docMk/>
-            <pc:sldMk cId="0" sldId="300"/>
-            <ac:spMk id="3" creationId="{00000000-0000-0000-0000-000000000000}"/>
-          </ac:spMkLst>
-        </pc:spChg>
-      </pc:sldChg>
-      <pc:sldChg chg="addSp delSp modSp add">
-        <pc:chgData name="" userId="9a24253a5e4fde46" providerId="LiveId" clId="{C0A7ED71-9872-40E9-8CCC-A5734F98C157}" dt="2024-10-24T17:20:37.846" v="354" actId="20577"/>
-        <pc:sldMkLst>
-          <pc:docMk/>
-          <pc:sldMk cId="868757901" sldId="301"/>
-        </pc:sldMkLst>
-        <pc:spChg chg="del">
-          <ac:chgData name="" userId="9a24253a5e4fde46" providerId="LiveId" clId="{C0A7ED71-9872-40E9-8CCC-A5734F98C157}" dt="2024-10-24T17:20:31.849" v="335"/>
-          <ac:spMkLst>
-            <pc:docMk/>
-            <pc:sldMk cId="868757901" sldId="301"/>
-            <ac:spMk id="2" creationId="{2535F4CB-C567-4BEF-A5FD-6A40CE37A3D3}"/>
-          </ac:spMkLst>
-        </pc:spChg>
-        <pc:spChg chg="del">
-          <ac:chgData name="" userId="9a24253a5e4fde46" providerId="LiveId" clId="{C0A7ED71-9872-40E9-8CCC-A5734F98C157}" dt="2024-10-24T17:20:31.849" v="335"/>
-          <ac:spMkLst>
-            <pc:docMk/>
-            <pc:sldMk cId="868757901" sldId="301"/>
-            <ac:spMk id="3" creationId="{2BFF179F-3C08-4DD4-B1C6-C4E1DAF75858}"/>
-          </ac:spMkLst>
-        </pc:spChg>
-        <pc:spChg chg="add mod">
-          <ac:chgData name="" userId="9a24253a5e4fde46" providerId="LiveId" clId="{C0A7ED71-9872-40E9-8CCC-A5734F98C157}" dt="2024-10-24T17:20:37.846" v="354" actId="20577"/>
-          <ac:spMkLst>
-            <pc:docMk/>
-            <pc:sldMk cId="868757901" sldId="301"/>
-            <ac:spMk id="4" creationId="{9918E6C8-5D58-4E61-A1E5-6562746116F1}"/>
-          </ac:spMkLst>
-        </pc:spChg>
-        <pc:spChg chg="add mod">
-          <ac:chgData name="" userId="9a24253a5e4fde46" providerId="LiveId" clId="{C0A7ED71-9872-40E9-8CCC-A5734F98C157}" dt="2024-10-24T17:20:31.849" v="335"/>
-          <ac:spMkLst>
-            <pc:docMk/>
-            <pc:sldMk cId="868757901" sldId="301"/>
-            <ac:spMk id="5" creationId="{1DE84F29-135C-43EF-B358-FC714E50F90D}"/>
-          </ac:spMkLst>
-        </pc:spChg>
-      </pc:sldChg>
-      <pc:sldMasterChg chg="modSp modSldLayout">
-        <pc:chgData name="" userId="9a24253a5e4fde46" providerId="LiveId" clId="{C0A7ED71-9872-40E9-8CCC-A5734F98C157}" dt="2024-10-24T16:23:05.661" v="0"/>
-        <pc:sldMasterMkLst>
-          <pc:docMk/>
-          <pc:sldMasterMk cId="2715811080" sldId="2147483720"/>
-        </pc:sldMasterMkLst>
-        <pc:spChg chg="mod">
-          <ac:chgData name="" userId="9a24253a5e4fde46" providerId="LiveId" clId="{C0A7ED71-9872-40E9-8CCC-A5734F98C157}" dt="2024-10-24T16:23:05.661" v="0"/>
-          <ac:spMkLst>
-            <pc:docMk/>
-            <pc:sldMasterMk cId="2715811080" sldId="2147483720"/>
-            <ac:spMk id="2" creationId="{00000000-0000-0000-0000-000000000000}"/>
-          </ac:spMkLst>
-        </pc:spChg>
-        <pc:spChg chg="mod">
-          <ac:chgData name="" userId="9a24253a5e4fde46" providerId="LiveId" clId="{C0A7ED71-9872-40E9-8CCC-A5734F98C157}" dt="2024-10-24T16:23:05.661" v="0"/>
-          <ac:spMkLst>
-            <pc:docMk/>
-            <pc:sldMasterMk cId="2715811080" sldId="2147483720"/>
-            <ac:spMk id="3" creationId="{00000000-0000-0000-0000-000000000000}"/>
-          </ac:spMkLst>
-        </pc:spChg>
-        <pc:spChg chg="mod">
-          <ac:chgData name="" userId="9a24253a5e4fde46" providerId="LiveId" clId="{C0A7ED71-9872-40E9-8CCC-A5734F98C157}" dt="2024-10-24T16:23:05.661" v="0"/>
-          <ac:spMkLst>
-            <pc:docMk/>
-            <pc:sldMasterMk cId="2715811080" sldId="2147483720"/>
-            <ac:spMk id="4" creationId="{00000000-0000-0000-0000-000000000000}"/>
-          </ac:spMkLst>
-        </pc:spChg>
-        <pc:spChg chg="mod">
-          <ac:chgData name="" userId="9a24253a5e4fde46" providerId="LiveId" clId="{C0A7ED71-9872-40E9-8CCC-A5734F98C157}" dt="2024-10-24T16:23:05.661" v="0"/>
-          <ac:spMkLst>
-            <pc:docMk/>
-            <pc:sldMasterMk cId="2715811080" sldId="2147483720"/>
-            <ac:spMk id="5" creationId="{00000000-0000-0000-0000-000000000000}"/>
-          </ac:spMkLst>
-        </pc:spChg>
-        <pc:spChg chg="mod">
-          <ac:chgData name="" userId="9a24253a5e4fde46" providerId="LiveId" clId="{C0A7ED71-9872-40E9-8CCC-A5734F98C157}" dt="2024-10-24T16:23:05.661" v="0"/>
-          <ac:spMkLst>
-            <pc:docMk/>
-            <pc:sldMasterMk cId="2715811080" sldId="2147483720"/>
-            <ac:spMk id="6" creationId="{00000000-0000-0000-0000-000000000000}"/>
-          </ac:spMkLst>
-        </pc:spChg>
-        <pc:spChg chg="mod">
-          <ac:chgData name="" userId="9a24253a5e4fde46" providerId="LiveId" clId="{C0A7ED71-9872-40E9-8CCC-A5734F98C157}" dt="2024-10-24T16:23:05.661" v="0"/>
-          <ac:spMkLst>
-            <pc:docMk/>
-            <pc:sldMasterMk cId="2715811080" sldId="2147483720"/>
-            <ac:spMk id="19" creationId="{00000000-0000-0000-0000-000000000000}"/>
-          </ac:spMkLst>
-        </pc:spChg>
-        <pc:spChg chg="mod">
-          <ac:chgData name="" userId="9a24253a5e4fde46" providerId="LiveId" clId="{C0A7ED71-9872-40E9-8CCC-A5734F98C157}" dt="2024-10-24T16:23:05.661" v="0"/>
-          <ac:spMkLst>
-            <pc:docMk/>
-            <pc:sldMasterMk cId="2715811080" sldId="2147483720"/>
-            <ac:spMk id="20" creationId="{00000000-0000-0000-0000-000000000000}"/>
-          </ac:spMkLst>
-        </pc:spChg>
-        <pc:spChg chg="mod">
-          <ac:chgData name="" userId="9a24253a5e4fde46" providerId="LiveId" clId="{C0A7ED71-9872-40E9-8CCC-A5734F98C157}" dt="2024-10-24T16:23:05.661" v="0"/>
-          <ac:spMkLst>
-            <pc:docMk/>
-            <pc:sldMasterMk cId="2715811080" sldId="2147483720"/>
-            <ac:spMk id="21" creationId="{00000000-0000-0000-0000-000000000000}"/>
-          </ac:spMkLst>
-        </pc:spChg>
-        <pc:spChg chg="mod">
-          <ac:chgData name="" userId="9a24253a5e4fde46" providerId="LiveId" clId="{C0A7ED71-9872-40E9-8CCC-A5734F98C157}" dt="2024-10-24T16:23:05.661" v="0"/>
-          <ac:spMkLst>
-            <pc:docMk/>
-            <pc:sldMasterMk cId="2715811080" sldId="2147483720"/>
-            <ac:spMk id="22" creationId="{00000000-0000-0000-0000-000000000000}"/>
-          </ac:spMkLst>
-        </pc:spChg>
-        <pc:spChg chg="mod">
-          <ac:chgData name="" userId="9a24253a5e4fde46" providerId="LiveId" clId="{C0A7ED71-9872-40E9-8CCC-A5734F98C157}" dt="2024-10-24T16:23:05.661" v="0"/>
-          <ac:spMkLst>
-            <pc:docMk/>
-            <pc:sldMasterMk cId="2715811080" sldId="2147483720"/>
-            <ac:spMk id="23" creationId="{00000000-0000-0000-0000-000000000000}"/>
-          </ac:spMkLst>
-        </pc:spChg>
-        <pc:spChg chg="mod">
-          <ac:chgData name="" userId="9a24253a5e4fde46" providerId="LiveId" clId="{C0A7ED71-9872-40E9-8CCC-A5734F98C157}" dt="2024-10-24T16:23:05.661" v="0"/>
-          <ac:spMkLst>
-            <pc:docMk/>
-            <pc:sldMasterMk cId="2715811080" sldId="2147483720"/>
-            <ac:spMk id="24" creationId="{00000000-0000-0000-0000-000000000000}"/>
-          </ac:spMkLst>
-        </pc:spChg>
-        <pc:sldLayoutChg chg="modSp">
-          <pc:chgData name="" userId="9a24253a5e4fde46" providerId="LiveId" clId="{C0A7ED71-9872-40E9-8CCC-A5734F98C157}" dt="2024-10-24T16:23:05.661" v="0"/>
-          <pc:sldLayoutMkLst>
-            <pc:docMk/>
-            <pc:sldMasterMk cId="2715811080" sldId="2147483720"/>
-            <pc:sldLayoutMk cId="2635238512" sldId="2147483721"/>
-          </pc:sldLayoutMkLst>
-          <pc:spChg chg="mod">
-            <ac:chgData name="" userId="9a24253a5e4fde46" providerId="LiveId" clId="{C0A7ED71-9872-40E9-8CCC-A5734F98C157}" dt="2024-10-24T16:23:05.661" v="0"/>
-            <ac:spMkLst>
-              <pc:docMk/>
-              <pc:sldMasterMk cId="2715811080" sldId="2147483720"/>
-              <pc:sldLayoutMk cId="2635238512" sldId="2147483721"/>
-              <ac:spMk id="2" creationId="{00000000-0000-0000-0000-000000000000}"/>
-            </ac:spMkLst>
-          </pc:spChg>
-          <pc:spChg chg="mod">
-            <ac:chgData name="" userId="9a24253a5e4fde46" providerId="LiveId" clId="{C0A7ED71-9872-40E9-8CCC-A5734F98C157}" dt="2024-10-24T16:23:05.661" v="0"/>
-            <ac:spMkLst>
-              <pc:docMk/>
-              <pc:sldMasterMk cId="2715811080" sldId="2147483720"/>
-              <pc:sldLayoutMk cId="2635238512" sldId="2147483721"/>
-              <ac:spMk id="3" creationId="{00000000-0000-0000-0000-000000000000}"/>
-            </ac:spMkLst>
-          </pc:spChg>
-        </pc:sldLayoutChg>
-        <pc:sldLayoutChg chg="modSp">
-          <pc:chgData name="" userId="9a24253a5e4fde46" providerId="LiveId" clId="{C0A7ED71-9872-40E9-8CCC-A5734F98C157}" dt="2024-10-24T16:23:05.661" v="0"/>
-          <pc:sldLayoutMkLst>
-            <pc:docMk/>
-            <pc:sldMasterMk cId="2715811080" sldId="2147483720"/>
-            <pc:sldLayoutMk cId="3351539430" sldId="2147483723"/>
-          </pc:sldLayoutMkLst>
-          <pc:spChg chg="mod">
-            <ac:chgData name="" userId="9a24253a5e4fde46" providerId="LiveId" clId="{C0A7ED71-9872-40E9-8CCC-A5734F98C157}" dt="2024-10-24T16:23:05.661" v="0"/>
-            <ac:spMkLst>
-              <pc:docMk/>
-              <pc:sldMasterMk cId="2715811080" sldId="2147483720"/>
-              <pc:sldLayoutMk cId="3351539430" sldId="2147483723"/>
-              <ac:spMk id="2" creationId="{00000000-0000-0000-0000-000000000000}"/>
-            </ac:spMkLst>
-          </pc:spChg>
-          <pc:spChg chg="mod">
-            <ac:chgData name="" userId="9a24253a5e4fde46" providerId="LiveId" clId="{C0A7ED71-9872-40E9-8CCC-A5734F98C157}" dt="2024-10-24T16:23:05.661" v="0"/>
-            <ac:spMkLst>
-              <pc:docMk/>
-              <pc:sldMasterMk cId="2715811080" sldId="2147483720"/>
-              <pc:sldLayoutMk cId="3351539430" sldId="2147483723"/>
-              <ac:spMk id="3" creationId="{00000000-0000-0000-0000-000000000000}"/>
-            </ac:spMkLst>
-          </pc:spChg>
-        </pc:sldLayoutChg>
-        <pc:sldLayoutChg chg="modSp">
-          <pc:chgData name="" userId="9a24253a5e4fde46" providerId="LiveId" clId="{C0A7ED71-9872-40E9-8CCC-A5734F98C157}" dt="2024-10-24T16:23:05.661" v="0"/>
-          <pc:sldLayoutMkLst>
-            <pc:docMk/>
-            <pc:sldMasterMk cId="2715811080" sldId="2147483720"/>
-            <pc:sldLayoutMk cId="1629055339" sldId="2147483724"/>
-          </pc:sldLayoutMkLst>
-          <pc:spChg chg="mod">
-            <ac:chgData name="" userId="9a24253a5e4fde46" providerId="LiveId" clId="{C0A7ED71-9872-40E9-8CCC-A5734F98C157}" dt="2024-10-24T16:23:05.661" v="0"/>
-            <ac:spMkLst>
-              <pc:docMk/>
-              <pc:sldMasterMk cId="2715811080" sldId="2147483720"/>
-              <pc:sldLayoutMk cId="1629055339" sldId="2147483724"/>
-              <ac:spMk id="3" creationId="{00000000-0000-0000-0000-000000000000}"/>
-            </ac:spMkLst>
-          </pc:spChg>
-          <pc:spChg chg="mod">
-            <ac:chgData name="" userId="9a24253a5e4fde46" providerId="LiveId" clId="{C0A7ED71-9872-40E9-8CCC-A5734F98C157}" dt="2024-10-24T16:23:05.661" v="0"/>
-            <ac:spMkLst>
-              <pc:docMk/>
-              <pc:sldMasterMk cId="2715811080" sldId="2147483720"/>
-              <pc:sldLayoutMk cId="1629055339" sldId="2147483724"/>
-              <ac:spMk id="4" creationId="{00000000-0000-0000-0000-000000000000}"/>
-            </ac:spMkLst>
-          </pc:spChg>
-        </pc:sldLayoutChg>
-        <pc:sldLayoutChg chg="modSp">
-          <pc:chgData name="" userId="9a24253a5e4fde46" providerId="LiveId" clId="{C0A7ED71-9872-40E9-8CCC-A5734F98C157}" dt="2024-10-24T16:23:05.661" v="0"/>
-          <pc:sldLayoutMkLst>
-            <pc:docMk/>
-            <pc:sldMasterMk cId="2715811080" sldId="2147483720"/>
-            <pc:sldLayoutMk cId="3266510821" sldId="2147483725"/>
-          </pc:sldLayoutMkLst>
-          <pc:spChg chg="mod">
-            <ac:chgData name="" userId="9a24253a5e4fde46" providerId="LiveId" clId="{C0A7ED71-9872-40E9-8CCC-A5734F98C157}" dt="2024-10-24T16:23:05.661" v="0"/>
-            <ac:spMkLst>
-              <pc:docMk/>
-              <pc:sldMasterMk cId="2715811080" sldId="2147483720"/>
-              <pc:sldLayoutMk cId="3266510821" sldId="2147483725"/>
-              <ac:spMk id="3" creationId="{00000000-0000-0000-0000-000000000000}"/>
-            </ac:spMkLst>
-          </pc:spChg>
-          <pc:spChg chg="mod">
-            <ac:chgData name="" userId="9a24253a5e4fde46" providerId="LiveId" clId="{C0A7ED71-9872-40E9-8CCC-A5734F98C157}" dt="2024-10-24T16:23:05.661" v="0"/>
-            <ac:spMkLst>
-              <pc:docMk/>
-              <pc:sldMasterMk cId="2715811080" sldId="2147483720"/>
-              <pc:sldLayoutMk cId="3266510821" sldId="2147483725"/>
-              <ac:spMk id="4" creationId="{00000000-0000-0000-0000-000000000000}"/>
-            </ac:spMkLst>
-          </pc:spChg>
-          <pc:spChg chg="mod">
-            <ac:chgData name="" userId="9a24253a5e4fde46" providerId="LiveId" clId="{C0A7ED71-9872-40E9-8CCC-A5734F98C157}" dt="2024-10-24T16:23:05.661" v="0"/>
-            <ac:spMkLst>
-              <pc:docMk/>
-              <pc:sldMasterMk cId="2715811080" sldId="2147483720"/>
-              <pc:sldLayoutMk cId="3266510821" sldId="2147483725"/>
-              <ac:spMk id="5" creationId="{00000000-0000-0000-0000-000000000000}"/>
-            </ac:spMkLst>
-          </pc:spChg>
-          <pc:spChg chg="mod">
-            <ac:chgData name="" userId="9a24253a5e4fde46" providerId="LiveId" clId="{C0A7ED71-9872-40E9-8CCC-A5734F98C157}" dt="2024-10-24T16:23:05.661" v="0"/>
-            <ac:spMkLst>
-              <pc:docMk/>
-              <pc:sldMasterMk cId="2715811080" sldId="2147483720"/>
-              <pc:sldLayoutMk cId="3266510821" sldId="2147483725"/>
-              <ac:spMk id="6" creationId="{00000000-0000-0000-0000-000000000000}"/>
-            </ac:spMkLst>
-          </pc:spChg>
-        </pc:sldLayoutChg>
-        <pc:sldLayoutChg chg="modSp">
-          <pc:chgData name="" userId="9a24253a5e4fde46" providerId="LiveId" clId="{C0A7ED71-9872-40E9-8CCC-A5734F98C157}" dt="2024-10-24T16:23:05.661" v="0"/>
-          <pc:sldLayoutMkLst>
-            <pc:docMk/>
-            <pc:sldMasterMk cId="2715811080" sldId="2147483720"/>
-            <pc:sldLayoutMk cId="550770306" sldId="2147483728"/>
-          </pc:sldLayoutMkLst>
-          <pc:spChg chg="mod">
-            <ac:chgData name="" userId="9a24253a5e4fde46" providerId="LiveId" clId="{C0A7ED71-9872-40E9-8CCC-A5734F98C157}" dt="2024-10-24T16:23:05.661" v="0"/>
-            <ac:spMkLst>
-              <pc:docMk/>
-              <pc:sldMasterMk cId="2715811080" sldId="2147483720"/>
-              <pc:sldLayoutMk cId="550770306" sldId="2147483728"/>
-              <ac:spMk id="2" creationId="{00000000-0000-0000-0000-000000000000}"/>
-            </ac:spMkLst>
-          </pc:spChg>
-          <pc:spChg chg="mod">
-            <ac:chgData name="" userId="9a24253a5e4fde46" providerId="LiveId" clId="{C0A7ED71-9872-40E9-8CCC-A5734F98C157}" dt="2024-10-24T16:23:05.661" v="0"/>
-            <ac:spMkLst>
-              <pc:docMk/>
-              <pc:sldMasterMk cId="2715811080" sldId="2147483720"/>
-              <pc:sldLayoutMk cId="550770306" sldId="2147483728"/>
-              <ac:spMk id="3" creationId="{00000000-0000-0000-0000-000000000000}"/>
-            </ac:spMkLst>
-          </pc:spChg>
-          <pc:spChg chg="mod">
-            <ac:chgData name="" userId="9a24253a5e4fde46" providerId="LiveId" clId="{C0A7ED71-9872-40E9-8CCC-A5734F98C157}" dt="2024-10-24T16:23:05.661" v="0"/>
-            <ac:spMkLst>
-              <pc:docMk/>
-              <pc:sldMasterMk cId="2715811080" sldId="2147483720"/>
-              <pc:sldLayoutMk cId="550770306" sldId="2147483728"/>
-              <ac:spMk id="4" creationId="{00000000-0000-0000-0000-000000000000}"/>
-            </ac:spMkLst>
-          </pc:spChg>
-        </pc:sldLayoutChg>
-        <pc:sldLayoutChg chg="modSp">
-          <pc:chgData name="" userId="9a24253a5e4fde46" providerId="LiveId" clId="{C0A7ED71-9872-40E9-8CCC-A5734F98C157}" dt="2024-10-24T16:23:05.661" v="0"/>
-          <pc:sldLayoutMkLst>
-            <pc:docMk/>
-            <pc:sldMasterMk cId="2715811080" sldId="2147483720"/>
-            <pc:sldLayoutMk cId="1181914629" sldId="2147483729"/>
-          </pc:sldLayoutMkLst>
-          <pc:spChg chg="mod">
-            <ac:chgData name="" userId="9a24253a5e4fde46" providerId="LiveId" clId="{C0A7ED71-9872-40E9-8CCC-A5734F98C157}" dt="2024-10-24T16:23:05.661" v="0"/>
-            <ac:spMkLst>
-              <pc:docMk/>
-              <pc:sldMasterMk cId="2715811080" sldId="2147483720"/>
-              <pc:sldLayoutMk cId="1181914629" sldId="2147483729"/>
-              <ac:spMk id="2" creationId="{00000000-0000-0000-0000-000000000000}"/>
-            </ac:spMkLst>
-          </pc:spChg>
-          <pc:spChg chg="mod">
-            <ac:chgData name="" userId="9a24253a5e4fde46" providerId="LiveId" clId="{C0A7ED71-9872-40E9-8CCC-A5734F98C157}" dt="2024-10-24T16:23:05.661" v="0"/>
-            <ac:spMkLst>
-              <pc:docMk/>
-              <pc:sldMasterMk cId="2715811080" sldId="2147483720"/>
-              <pc:sldLayoutMk cId="1181914629" sldId="2147483729"/>
-              <ac:spMk id="3" creationId="{00000000-0000-0000-0000-000000000000}"/>
-            </ac:spMkLst>
-          </pc:spChg>
-          <pc:spChg chg="mod">
-            <ac:chgData name="" userId="9a24253a5e4fde46" providerId="LiveId" clId="{C0A7ED71-9872-40E9-8CCC-A5734F98C157}" dt="2024-10-24T16:23:05.661" v="0"/>
-            <ac:spMkLst>
-              <pc:docMk/>
-              <pc:sldMasterMk cId="2715811080" sldId="2147483720"/>
-              <pc:sldLayoutMk cId="1181914629" sldId="2147483729"/>
-              <ac:spMk id="4" creationId="{00000000-0000-0000-0000-000000000000}"/>
-            </ac:spMkLst>
-          </pc:spChg>
-        </pc:sldLayoutChg>
-        <pc:sldLayoutChg chg="modSp">
-          <pc:chgData name="" userId="9a24253a5e4fde46" providerId="LiveId" clId="{C0A7ED71-9872-40E9-8CCC-A5734F98C157}" dt="2024-10-24T16:23:05.661" v="0"/>
-          <pc:sldLayoutMkLst>
-            <pc:docMk/>
-            <pc:sldMasterMk cId="2715811080" sldId="2147483720"/>
-            <pc:sldLayoutMk cId="3999679559" sldId="2147483730"/>
-          </pc:sldLayoutMkLst>
-          <pc:spChg chg="mod">
-            <ac:chgData name="" userId="9a24253a5e4fde46" providerId="LiveId" clId="{C0A7ED71-9872-40E9-8CCC-A5734F98C157}" dt="2024-10-24T16:23:05.661" v="0"/>
-            <ac:spMkLst>
-              <pc:docMk/>
-              <pc:sldMasterMk cId="2715811080" sldId="2147483720"/>
-              <pc:sldLayoutMk cId="3999679559" sldId="2147483730"/>
-              <ac:spMk id="2" creationId="{00000000-0000-0000-0000-000000000000}"/>
-            </ac:spMkLst>
-          </pc:spChg>
-          <pc:spChg chg="mod">
-            <ac:chgData name="" userId="9a24253a5e4fde46" providerId="LiveId" clId="{C0A7ED71-9872-40E9-8CCC-A5734F98C157}" dt="2024-10-24T16:23:05.661" v="0"/>
-            <ac:spMkLst>
-              <pc:docMk/>
-              <pc:sldMasterMk cId="2715811080" sldId="2147483720"/>
-              <pc:sldLayoutMk cId="3999679559" sldId="2147483730"/>
-              <ac:spMk id="3" creationId="{00000000-0000-0000-0000-000000000000}"/>
-            </ac:spMkLst>
-          </pc:spChg>
-          <pc:spChg chg="mod">
-            <ac:chgData name="" userId="9a24253a5e4fde46" providerId="LiveId" clId="{C0A7ED71-9872-40E9-8CCC-A5734F98C157}" dt="2024-10-24T16:23:05.661" v="0"/>
-            <ac:spMkLst>
-              <pc:docMk/>
-              <pc:sldMasterMk cId="2715811080" sldId="2147483720"/>
-              <pc:sldLayoutMk cId="3999679559" sldId="2147483730"/>
-              <ac:spMk id="4" creationId="{00000000-0000-0000-0000-000000000000}"/>
-            </ac:spMkLst>
-          </pc:spChg>
-        </pc:sldLayoutChg>
-        <pc:sldLayoutChg chg="modSp">
-          <pc:chgData name="" userId="9a24253a5e4fde46" providerId="LiveId" clId="{C0A7ED71-9872-40E9-8CCC-A5734F98C157}" dt="2024-10-24T16:23:05.661" v="0"/>
-          <pc:sldLayoutMkLst>
-            <pc:docMk/>
-            <pc:sldMasterMk cId="2715811080" sldId="2147483720"/>
-            <pc:sldLayoutMk cId="3160871338" sldId="2147483731"/>
-          </pc:sldLayoutMkLst>
-          <pc:spChg chg="mod">
-            <ac:chgData name="" userId="9a24253a5e4fde46" providerId="LiveId" clId="{C0A7ED71-9872-40E9-8CCC-A5734F98C157}" dt="2024-10-24T16:23:05.661" v="0"/>
-            <ac:spMkLst>
-              <pc:docMk/>
-              <pc:sldMasterMk cId="2715811080" sldId="2147483720"/>
-              <pc:sldLayoutMk cId="3160871338" sldId="2147483731"/>
-              <ac:spMk id="2" creationId="{00000000-0000-0000-0000-000000000000}"/>
-            </ac:spMkLst>
-          </pc:spChg>
-          <pc:spChg chg="mod">
-            <ac:chgData name="" userId="9a24253a5e4fde46" providerId="LiveId" clId="{C0A7ED71-9872-40E9-8CCC-A5734F98C157}" dt="2024-10-24T16:23:05.661" v="0"/>
-            <ac:spMkLst>
-              <pc:docMk/>
-              <pc:sldMasterMk cId="2715811080" sldId="2147483720"/>
-              <pc:sldLayoutMk cId="3160871338" sldId="2147483731"/>
-              <ac:spMk id="8" creationId="{00000000-0000-0000-0000-000000000000}"/>
-            </ac:spMkLst>
-          </pc:spChg>
-        </pc:sldLayoutChg>
-        <pc:sldLayoutChg chg="modSp">
-          <pc:chgData name="" userId="9a24253a5e4fde46" providerId="LiveId" clId="{C0A7ED71-9872-40E9-8CCC-A5734F98C157}" dt="2024-10-24T16:23:05.661" v="0"/>
-          <pc:sldLayoutMkLst>
-            <pc:docMk/>
-            <pc:sldMasterMk cId="2715811080" sldId="2147483720"/>
-            <pc:sldLayoutMk cId="1890690157" sldId="2147483732"/>
-          </pc:sldLayoutMkLst>
-          <pc:spChg chg="mod">
-            <ac:chgData name="" userId="9a24253a5e4fde46" providerId="LiveId" clId="{C0A7ED71-9872-40E9-8CCC-A5734F98C157}" dt="2024-10-24T16:23:05.661" v="0"/>
-            <ac:spMkLst>
-              <pc:docMk/>
-              <pc:sldMasterMk cId="2715811080" sldId="2147483720"/>
-              <pc:sldLayoutMk cId="1890690157" sldId="2147483732"/>
-              <ac:spMk id="2" creationId="{00000000-0000-0000-0000-000000000000}"/>
-            </ac:spMkLst>
-          </pc:spChg>
-          <pc:spChg chg="mod">
-            <ac:chgData name="" userId="9a24253a5e4fde46" providerId="LiveId" clId="{C0A7ED71-9872-40E9-8CCC-A5734F98C157}" dt="2024-10-24T16:23:05.661" v="0"/>
-            <ac:spMkLst>
-              <pc:docMk/>
-              <pc:sldMasterMk cId="2715811080" sldId="2147483720"/>
-              <pc:sldLayoutMk cId="1890690157" sldId="2147483732"/>
-              <ac:spMk id="10" creationId="{00000000-0000-0000-0000-000000000000}"/>
-            </ac:spMkLst>
-          </pc:spChg>
-          <pc:spChg chg="mod">
-            <ac:chgData name="" userId="9a24253a5e4fde46" providerId="LiveId" clId="{C0A7ED71-9872-40E9-8CCC-A5734F98C157}" dt="2024-10-24T16:23:05.661" v="0"/>
-            <ac:spMkLst>
-              <pc:docMk/>
-              <pc:sldMasterMk cId="2715811080" sldId="2147483720"/>
-              <pc:sldLayoutMk cId="1890690157" sldId="2147483732"/>
-              <ac:spMk id="11" creationId="{00000000-0000-0000-0000-000000000000}"/>
-            </ac:spMkLst>
-          </pc:spChg>
-          <pc:spChg chg="mod">
-            <ac:chgData name="" userId="9a24253a5e4fde46" providerId="LiveId" clId="{C0A7ED71-9872-40E9-8CCC-A5734F98C157}" dt="2024-10-24T16:23:05.661" v="0"/>
-            <ac:spMkLst>
-              <pc:docMk/>
-              <pc:sldMasterMk cId="2715811080" sldId="2147483720"/>
-              <pc:sldLayoutMk cId="1890690157" sldId="2147483732"/>
-              <ac:spMk id="12" creationId="{00000000-0000-0000-0000-000000000000}"/>
-            </ac:spMkLst>
-          </pc:spChg>
-          <pc:spChg chg="mod">
-            <ac:chgData name="" userId="9a24253a5e4fde46" providerId="LiveId" clId="{C0A7ED71-9872-40E9-8CCC-A5734F98C157}" dt="2024-10-24T16:23:05.661" v="0"/>
-            <ac:spMkLst>
-              <pc:docMk/>
-              <pc:sldMasterMk cId="2715811080" sldId="2147483720"/>
-              <pc:sldLayoutMk cId="1890690157" sldId="2147483732"/>
-              <ac:spMk id="15" creationId="{00000000-0000-0000-0000-000000000000}"/>
-            </ac:spMkLst>
-          </pc:spChg>
-        </pc:sldLayoutChg>
-        <pc:sldLayoutChg chg="modSp">
-          <pc:chgData name="" userId="9a24253a5e4fde46" providerId="LiveId" clId="{C0A7ED71-9872-40E9-8CCC-A5734F98C157}" dt="2024-10-24T16:23:05.661" v="0"/>
-          <pc:sldLayoutMkLst>
-            <pc:docMk/>
-            <pc:sldMasterMk cId="2715811080" sldId="2147483720"/>
-            <pc:sldLayoutMk cId="4238728733" sldId="2147483733"/>
-          </pc:sldLayoutMkLst>
-          <pc:spChg chg="mod">
-            <ac:chgData name="" userId="9a24253a5e4fde46" providerId="LiveId" clId="{C0A7ED71-9872-40E9-8CCC-A5734F98C157}" dt="2024-10-24T16:23:05.661" v="0"/>
-            <ac:spMkLst>
-              <pc:docMk/>
-              <pc:sldMasterMk cId="2715811080" sldId="2147483720"/>
-              <pc:sldLayoutMk cId="4238728733" sldId="2147483733"/>
-              <ac:spMk id="2" creationId="{00000000-0000-0000-0000-000000000000}"/>
-            </ac:spMkLst>
-          </pc:spChg>
-          <pc:spChg chg="mod">
-            <ac:chgData name="" userId="9a24253a5e4fde46" providerId="LiveId" clId="{C0A7ED71-9872-40E9-8CCC-A5734F98C157}" dt="2024-10-24T16:23:05.661" v="0"/>
-            <ac:spMkLst>
-              <pc:docMk/>
-              <pc:sldMasterMk cId="2715811080" sldId="2147483720"/>
-              <pc:sldLayoutMk cId="4238728733" sldId="2147483733"/>
-              <ac:spMk id="3" creationId="{00000000-0000-0000-0000-000000000000}"/>
-            </ac:spMkLst>
-          </pc:spChg>
-        </pc:sldLayoutChg>
-        <pc:sldLayoutChg chg="modSp">
-          <pc:chgData name="" userId="9a24253a5e4fde46" providerId="LiveId" clId="{C0A7ED71-9872-40E9-8CCC-A5734F98C157}" dt="2024-10-24T16:23:05.661" v="0"/>
-          <pc:sldLayoutMkLst>
-            <pc:docMk/>
-            <pc:sldMasterMk cId="2715811080" sldId="2147483720"/>
-            <pc:sldLayoutMk cId="3588065463" sldId="2147483734"/>
-          </pc:sldLayoutMkLst>
-          <pc:spChg chg="mod">
-            <ac:chgData name="" userId="9a24253a5e4fde46" providerId="LiveId" clId="{C0A7ED71-9872-40E9-8CCC-A5734F98C157}" dt="2024-10-24T16:23:05.661" v="0"/>
-            <ac:spMkLst>
-              <pc:docMk/>
-              <pc:sldMasterMk cId="2715811080" sldId="2147483720"/>
-              <pc:sldLayoutMk cId="3588065463" sldId="2147483734"/>
-              <ac:spMk id="3" creationId="{00000000-0000-0000-0000-000000000000}"/>
-            </ac:spMkLst>
-          </pc:spChg>
-          <pc:spChg chg="mod">
-            <ac:chgData name="" userId="9a24253a5e4fde46" providerId="LiveId" clId="{C0A7ED71-9872-40E9-8CCC-A5734F98C157}" dt="2024-10-24T16:23:05.661" v="0"/>
-            <ac:spMkLst>
-              <pc:docMk/>
-              <pc:sldMasterMk cId="2715811080" sldId="2147483720"/>
-              <pc:sldLayoutMk cId="3588065463" sldId="2147483734"/>
-              <ac:spMk id="5" creationId="{00000000-0000-0000-0000-000000000000}"/>
-            </ac:spMkLst>
-          </pc:spChg>
-          <pc:spChg chg="mod">
-            <ac:chgData name="" userId="9a24253a5e4fde46" providerId="LiveId" clId="{C0A7ED71-9872-40E9-8CCC-A5734F98C157}" dt="2024-10-24T16:23:05.661" v="0"/>
-            <ac:spMkLst>
-              <pc:docMk/>
-              <pc:sldMasterMk cId="2715811080" sldId="2147483720"/>
-              <pc:sldLayoutMk cId="3588065463" sldId="2147483734"/>
-              <ac:spMk id="14" creationId="{00000000-0000-0000-0000-000000000000}"/>
-            </ac:spMkLst>
-          </pc:spChg>
-          <pc:spChg chg="mod">
-            <ac:chgData name="" userId="9a24253a5e4fde46" providerId="LiveId" clId="{C0A7ED71-9872-40E9-8CCC-A5734F98C157}" dt="2024-10-24T16:23:05.661" v="0"/>
-            <ac:spMkLst>
-              <pc:docMk/>
-              <pc:sldMasterMk cId="2715811080" sldId="2147483720"/>
-              <pc:sldLayoutMk cId="3588065463" sldId="2147483734"/>
-              <ac:spMk id="16" creationId="{00000000-0000-0000-0000-000000000000}"/>
-            </ac:spMkLst>
-          </pc:spChg>
-          <pc:spChg chg="mod">
-            <ac:chgData name="" userId="9a24253a5e4fde46" providerId="LiveId" clId="{C0A7ED71-9872-40E9-8CCC-A5734F98C157}" dt="2024-10-24T16:23:05.661" v="0"/>
-            <ac:spMkLst>
-              <pc:docMk/>
-              <pc:sldMasterMk cId="2715811080" sldId="2147483720"/>
-              <pc:sldLayoutMk cId="3588065463" sldId="2147483734"/>
-              <ac:spMk id="19" creationId="{00000000-0000-0000-0000-000000000000}"/>
-            </ac:spMkLst>
-          </pc:spChg>
-          <pc:spChg chg="mod">
-            <ac:chgData name="" userId="9a24253a5e4fde46" providerId="LiveId" clId="{C0A7ED71-9872-40E9-8CCC-A5734F98C157}" dt="2024-10-24T16:23:05.661" v="0"/>
-            <ac:spMkLst>
-              <pc:docMk/>
-              <pc:sldMasterMk cId="2715811080" sldId="2147483720"/>
-              <pc:sldLayoutMk cId="3588065463" sldId="2147483734"/>
-              <ac:spMk id="20" creationId="{00000000-0000-0000-0000-000000000000}"/>
-            </ac:spMkLst>
-          </pc:spChg>
-          <pc:cxnChg chg="mod">
-            <ac:chgData name="" userId="9a24253a5e4fde46" providerId="LiveId" clId="{C0A7ED71-9872-40E9-8CCC-A5734F98C157}" dt="2024-10-24T16:23:05.661" v="0"/>
-            <ac:cxnSpMkLst>
-              <pc:docMk/>
-              <pc:sldMasterMk cId="2715811080" sldId="2147483720"/>
-              <pc:sldLayoutMk cId="3588065463" sldId="2147483734"/>
-              <ac:cxnSpMk id="17" creationId="{00000000-0000-0000-0000-000000000000}"/>
-            </ac:cxnSpMkLst>
-          </pc:cxnChg>
-          <pc:cxnChg chg="mod">
-            <ac:chgData name="" userId="9a24253a5e4fde46" providerId="LiveId" clId="{C0A7ED71-9872-40E9-8CCC-A5734F98C157}" dt="2024-10-24T16:23:05.661" v="0"/>
-            <ac:cxnSpMkLst>
-              <pc:docMk/>
-              <pc:sldMasterMk cId="2715811080" sldId="2147483720"/>
-              <pc:sldLayoutMk cId="3588065463" sldId="2147483734"/>
-              <ac:cxnSpMk id="18" creationId="{00000000-0000-0000-0000-000000000000}"/>
-            </ac:cxnSpMkLst>
-          </pc:cxnChg>
-        </pc:sldLayoutChg>
-        <pc:sldLayoutChg chg="modSp">
-          <pc:chgData name="" userId="9a24253a5e4fde46" providerId="LiveId" clId="{C0A7ED71-9872-40E9-8CCC-A5734F98C157}" dt="2024-10-24T16:23:05.661" v="0"/>
-          <pc:sldLayoutMkLst>
-            <pc:docMk/>
-            <pc:sldMasterMk cId="2715811080" sldId="2147483720"/>
-            <pc:sldLayoutMk cId="3516170570" sldId="2147483735"/>
-          </pc:sldLayoutMkLst>
-          <pc:spChg chg="mod">
-            <ac:chgData name="" userId="9a24253a5e4fde46" providerId="LiveId" clId="{C0A7ED71-9872-40E9-8CCC-A5734F98C157}" dt="2024-10-24T16:23:05.661" v="0"/>
-            <ac:spMkLst>
-              <pc:docMk/>
-              <pc:sldMasterMk cId="2715811080" sldId="2147483720"/>
-              <pc:sldLayoutMk cId="3516170570" sldId="2147483735"/>
-              <ac:spMk id="3" creationId="{00000000-0000-0000-0000-000000000000}"/>
-            </ac:spMkLst>
-          </pc:spChg>
-          <pc:spChg chg="mod">
-            <ac:chgData name="" userId="9a24253a5e4fde46" providerId="LiveId" clId="{C0A7ED71-9872-40E9-8CCC-A5734F98C157}" dt="2024-10-24T16:23:05.661" v="0"/>
-            <ac:spMkLst>
-              <pc:docMk/>
-              <pc:sldMasterMk cId="2715811080" sldId="2147483720"/>
-              <pc:sldLayoutMk cId="3516170570" sldId="2147483735"/>
-              <ac:spMk id="5" creationId="{00000000-0000-0000-0000-000000000000}"/>
-            </ac:spMkLst>
-          </pc:spChg>
-          <pc:spChg chg="mod">
-            <ac:chgData name="" userId="9a24253a5e4fde46" providerId="LiveId" clId="{C0A7ED71-9872-40E9-8CCC-A5734F98C157}" dt="2024-10-24T16:23:05.661" v="0"/>
-            <ac:spMkLst>
-              <pc:docMk/>
-              <pc:sldMasterMk cId="2715811080" sldId="2147483720"/>
-              <pc:sldLayoutMk cId="3516170570" sldId="2147483735"/>
-              <ac:spMk id="14" creationId="{00000000-0000-0000-0000-000000000000}"/>
-            </ac:spMkLst>
-          </pc:spChg>
-          <pc:spChg chg="mod">
-            <ac:chgData name="" userId="9a24253a5e4fde46" providerId="LiveId" clId="{C0A7ED71-9872-40E9-8CCC-A5734F98C157}" dt="2024-10-24T16:23:05.661" v="0"/>
-            <ac:spMkLst>
-              <pc:docMk/>
-              <pc:sldMasterMk cId="2715811080" sldId="2147483720"/>
-              <pc:sldLayoutMk cId="3516170570" sldId="2147483735"/>
-              <ac:spMk id="22" creationId="{00000000-0000-0000-0000-000000000000}"/>
-            </ac:spMkLst>
-          </pc:spChg>
-          <pc:spChg chg="mod">
-            <ac:chgData name="" userId="9a24253a5e4fde46" providerId="LiveId" clId="{C0A7ED71-9872-40E9-8CCC-A5734F98C157}" dt="2024-10-24T16:23:05.661" v="0"/>
-            <ac:spMkLst>
-              <pc:docMk/>
-              <pc:sldMasterMk cId="2715811080" sldId="2147483720"/>
-              <pc:sldLayoutMk cId="3516170570" sldId="2147483735"/>
-              <ac:spMk id="23" creationId="{00000000-0000-0000-0000-000000000000}"/>
-            </ac:spMkLst>
-          </pc:spChg>
-          <pc:spChg chg="mod">
-            <ac:chgData name="" userId="9a24253a5e4fde46" providerId="LiveId" clId="{C0A7ED71-9872-40E9-8CCC-A5734F98C157}" dt="2024-10-24T16:23:05.661" v="0"/>
-            <ac:spMkLst>
-              <pc:docMk/>
-              <pc:sldMasterMk cId="2715811080" sldId="2147483720"/>
-              <pc:sldLayoutMk cId="3516170570" sldId="2147483735"/>
-              <ac:spMk id="24" creationId="{00000000-0000-0000-0000-000000000000}"/>
-            </ac:spMkLst>
-          </pc:spChg>
-          <pc:spChg chg="mod">
-            <ac:chgData name="" userId="9a24253a5e4fde46" providerId="LiveId" clId="{C0A7ED71-9872-40E9-8CCC-A5734F98C157}" dt="2024-10-24T16:23:05.661" v="0"/>
-            <ac:spMkLst>
-              <pc:docMk/>
-              <pc:sldMasterMk cId="2715811080" sldId="2147483720"/>
-              <pc:sldLayoutMk cId="3516170570" sldId="2147483735"/>
-              <ac:spMk id="29" creationId="{00000000-0000-0000-0000-000000000000}"/>
-            </ac:spMkLst>
-          </pc:spChg>
-          <pc:spChg chg="mod">
-            <ac:chgData name="" userId="9a24253a5e4fde46" providerId="LiveId" clId="{C0A7ED71-9872-40E9-8CCC-A5734F98C157}" dt="2024-10-24T16:23:05.661" v="0"/>
-            <ac:spMkLst>
-              <pc:docMk/>
-              <pc:sldMasterMk cId="2715811080" sldId="2147483720"/>
-              <pc:sldLayoutMk cId="3516170570" sldId="2147483735"/>
-              <ac:spMk id="30" creationId="{00000000-0000-0000-0000-000000000000}"/>
-            </ac:spMkLst>
-          </pc:spChg>
-          <pc:spChg chg="mod">
-            <ac:chgData name="" userId="9a24253a5e4fde46" providerId="LiveId" clId="{C0A7ED71-9872-40E9-8CCC-A5734F98C157}" dt="2024-10-24T16:23:05.661" v="0"/>
-            <ac:spMkLst>
-              <pc:docMk/>
-              <pc:sldMasterMk cId="2715811080" sldId="2147483720"/>
-              <pc:sldLayoutMk cId="3516170570" sldId="2147483735"/>
-              <ac:spMk id="31" creationId="{00000000-0000-0000-0000-000000000000}"/>
-            </ac:spMkLst>
-          </pc:spChg>
-          <pc:cxnChg chg="mod">
-            <ac:chgData name="" userId="9a24253a5e4fde46" providerId="LiveId" clId="{C0A7ED71-9872-40E9-8CCC-A5734F98C157}" dt="2024-10-24T16:23:05.661" v="0"/>
-            <ac:cxnSpMkLst>
-              <pc:docMk/>
-              <pc:sldMasterMk cId="2715811080" sldId="2147483720"/>
-              <pc:sldLayoutMk cId="3516170570" sldId="2147483735"/>
-              <ac:cxnSpMk id="19" creationId="{00000000-0000-0000-0000-000000000000}"/>
-            </ac:cxnSpMkLst>
-          </pc:cxnChg>
-          <pc:cxnChg chg="mod">
-            <ac:chgData name="" userId="9a24253a5e4fde46" providerId="LiveId" clId="{C0A7ED71-9872-40E9-8CCC-A5734F98C157}" dt="2024-10-24T16:23:05.661" v="0"/>
-            <ac:cxnSpMkLst>
-              <pc:docMk/>
-              <pc:sldMasterMk cId="2715811080" sldId="2147483720"/>
-              <pc:sldLayoutMk cId="3516170570" sldId="2147483735"/>
-              <ac:cxnSpMk id="20" creationId="{00000000-0000-0000-0000-000000000000}"/>
-            </ac:cxnSpMkLst>
-          </pc:cxnChg>
-        </pc:sldLayoutChg>
-        <pc:sldLayoutChg chg="modSp">
-          <pc:chgData name="" userId="9a24253a5e4fde46" providerId="LiveId" clId="{C0A7ED71-9872-40E9-8CCC-A5734F98C157}" dt="2024-10-24T16:23:05.661" v="0"/>
-          <pc:sldLayoutMkLst>
-            <pc:docMk/>
-            <pc:sldMasterMk cId="2715811080" sldId="2147483720"/>
-            <pc:sldLayoutMk cId="3019853519" sldId="2147483737"/>
-          </pc:sldLayoutMkLst>
-          <pc:spChg chg="mod">
-            <ac:chgData name="" userId="9a24253a5e4fde46" providerId="LiveId" clId="{C0A7ED71-9872-40E9-8CCC-A5734F98C157}" dt="2024-10-24T16:23:05.661" v="0"/>
-            <ac:spMkLst>
-              <pc:docMk/>
-              <pc:sldMasterMk cId="2715811080" sldId="2147483720"/>
-              <pc:sldLayoutMk cId="3019853519" sldId="2147483737"/>
-              <ac:spMk id="2" creationId="{00000000-0000-0000-0000-000000000000}"/>
-            </ac:spMkLst>
-          </pc:spChg>
-          <pc:spChg chg="mod">
-            <ac:chgData name="" userId="9a24253a5e4fde46" providerId="LiveId" clId="{C0A7ED71-9872-40E9-8CCC-A5734F98C157}" dt="2024-10-24T16:23:05.661" v="0"/>
-            <ac:spMkLst>
-              <pc:docMk/>
-              <pc:sldMasterMk cId="2715811080" sldId="2147483720"/>
-              <pc:sldLayoutMk cId="3019853519" sldId="2147483737"/>
-              <ac:spMk id="3" creationId="{00000000-0000-0000-0000-000000000000}"/>
-            </ac:spMkLst>
-          </pc:spChg>
-        </pc:sldLayoutChg>
-        <pc:sldLayoutChg chg="modSp">
-          <pc:chgData name="" userId="9a24253a5e4fde46" providerId="LiveId" clId="{C0A7ED71-9872-40E9-8CCC-A5734F98C157}" dt="2024-10-24T16:23:05.661" v="0"/>
-          <pc:sldLayoutMkLst>
-            <pc:docMk/>
-            <pc:sldMasterMk cId="2715811080" sldId="2147483720"/>
-            <pc:sldLayoutMk cId="3236425320" sldId="2147483738"/>
-          </pc:sldLayoutMkLst>
-          <pc:spChg chg="mod">
-            <ac:chgData name="" userId="9a24253a5e4fde46" providerId="LiveId" clId="{C0A7ED71-9872-40E9-8CCC-A5734F98C157}" dt="2024-10-24T16:23:05.661" v="0"/>
-            <ac:spMkLst>
-              <pc:docMk/>
-              <pc:sldMasterMk cId="2715811080" sldId="2147483720"/>
-              <pc:sldLayoutMk cId="3236425320" sldId="2147483738"/>
-              <ac:spMk id="2" creationId="{00000000-0000-0000-0000-000000000000}"/>
-            </ac:spMkLst>
-          </pc:spChg>
-          <pc:spChg chg="mod">
-            <ac:chgData name="" userId="9a24253a5e4fde46" providerId="LiveId" clId="{C0A7ED71-9872-40E9-8CCC-A5734F98C157}" dt="2024-10-24T16:23:05.661" v="0"/>
-            <ac:spMkLst>
-              <pc:docMk/>
-              <pc:sldMasterMk cId="2715811080" sldId="2147483720"/>
-              <pc:sldLayoutMk cId="3236425320" sldId="2147483738"/>
-              <ac:spMk id="3" creationId="{00000000-0000-0000-0000-000000000000}"/>
-            </ac:spMkLst>
-          </pc:spChg>
-          <pc:spChg chg="mod">
-            <ac:chgData name="" userId="9a24253a5e4fde46" providerId="LiveId" clId="{C0A7ED71-9872-40E9-8CCC-A5734F98C157}" dt="2024-10-24T16:23:05.661" v="0"/>
-            <ac:spMkLst>
-              <pc:docMk/>
-              <pc:sldMasterMk cId="2715811080" sldId="2147483720"/>
-              <pc:sldLayoutMk cId="3236425320" sldId="2147483738"/>
-              <ac:spMk id="4" creationId="{00000000-0000-0000-0000-000000000000}"/>
-            </ac:spMkLst>
-          </pc:spChg>
-          <pc:spChg chg="mod">
-            <ac:chgData name="" userId="9a24253a5e4fde46" providerId="LiveId" clId="{C0A7ED71-9872-40E9-8CCC-A5734F98C157}" dt="2024-10-24T16:23:05.661" v="0"/>
-            <ac:spMkLst>
-              <pc:docMk/>
-              <pc:sldMasterMk cId="2715811080" sldId="2147483720"/>
-              <pc:sldLayoutMk cId="3236425320" sldId="2147483738"/>
-              <ac:spMk id="5" creationId="{00000000-0000-0000-0000-000000000000}"/>
-            </ac:spMkLst>
-          </pc:spChg>
-        </pc:sldLayoutChg>
-        <pc:sldLayoutChg chg="modSp">
-          <pc:chgData name="" userId="9a24253a5e4fde46" providerId="LiveId" clId="{C0A7ED71-9872-40E9-8CCC-A5734F98C157}" dt="2024-10-24T16:23:05.661" v="0"/>
-          <pc:sldLayoutMkLst>
-            <pc:docMk/>
-            <pc:sldMasterMk cId="2715811080" sldId="2147483720"/>
-            <pc:sldLayoutMk cId="355047061" sldId="2147483739"/>
-          </pc:sldLayoutMkLst>
-          <pc:spChg chg="mod">
-            <ac:chgData name="" userId="9a24253a5e4fde46" providerId="LiveId" clId="{C0A7ED71-9872-40E9-8CCC-A5734F98C157}" dt="2024-10-24T16:23:05.661" v="0"/>
-            <ac:spMkLst>
-              <pc:docMk/>
-              <pc:sldMasterMk cId="2715811080" sldId="2147483720"/>
-              <pc:sldLayoutMk cId="355047061" sldId="2147483739"/>
-              <ac:spMk id="2" creationId="{00000000-0000-0000-0000-000000000000}"/>
-            </ac:spMkLst>
-          </pc:spChg>
-          <pc:spChg chg="mod">
-            <ac:chgData name="" userId="9a24253a5e4fde46" providerId="LiveId" clId="{C0A7ED71-9872-40E9-8CCC-A5734F98C157}" dt="2024-10-24T16:23:05.661" v="0"/>
-            <ac:spMkLst>
-              <pc:docMk/>
-              <pc:sldMasterMk cId="2715811080" sldId="2147483720"/>
-              <pc:sldLayoutMk cId="355047061" sldId="2147483739"/>
-              <ac:spMk id="3" creationId="{00000000-0000-0000-0000-000000000000}"/>
-            </ac:spMkLst>
-          </pc:spChg>
-          <pc:spChg chg="mod">
-            <ac:chgData name="" userId="9a24253a5e4fde46" providerId="LiveId" clId="{C0A7ED71-9872-40E9-8CCC-A5734F98C157}" dt="2024-10-24T16:23:05.661" v="0"/>
-            <ac:spMkLst>
-              <pc:docMk/>
-              <pc:sldMasterMk cId="2715811080" sldId="2147483720"/>
-              <pc:sldLayoutMk cId="355047061" sldId="2147483739"/>
-              <ac:spMk id="4" creationId="{00000000-0000-0000-0000-000000000000}"/>
-            </ac:spMkLst>
-          </pc:spChg>
-          <pc:spChg chg="mod">
-            <ac:chgData name="" userId="9a24253a5e4fde46" providerId="LiveId" clId="{C0A7ED71-9872-40E9-8CCC-A5734F98C157}" dt="2024-10-24T16:23:05.661" v="0"/>
-            <ac:spMkLst>
-              <pc:docMk/>
-              <pc:sldMasterMk cId="2715811080" sldId="2147483720"/>
-              <pc:sldLayoutMk cId="355047061" sldId="2147483739"/>
-              <ac:spMk id="5" creationId="{00000000-0000-0000-0000-000000000000}"/>
-            </ac:spMkLst>
-          </pc:spChg>
-          <pc:spChg chg="mod">
-            <ac:chgData name="" userId="9a24253a5e4fde46" providerId="LiveId" clId="{C0A7ED71-9872-40E9-8CCC-A5734F98C157}" dt="2024-10-24T16:23:05.661" v="0"/>
-            <ac:spMkLst>
-              <pc:docMk/>
-              <pc:sldMasterMk cId="2715811080" sldId="2147483720"/>
-              <pc:sldLayoutMk cId="355047061" sldId="2147483739"/>
-              <ac:spMk id="6" creationId="{00000000-0000-0000-0000-000000000000}"/>
-            </ac:spMkLst>
-          </pc:spChg>
-          <pc:spChg chg="mod">
-            <ac:chgData name="" userId="9a24253a5e4fde46" providerId="LiveId" clId="{C0A7ED71-9872-40E9-8CCC-A5734F98C157}" dt="2024-10-24T16:23:05.661" v="0"/>
-            <ac:spMkLst>
-              <pc:docMk/>
-              <pc:sldMasterMk cId="2715811080" sldId="2147483720"/>
-              <pc:sldLayoutMk cId="355047061" sldId="2147483739"/>
-              <ac:spMk id="7" creationId="{00000000-0000-0000-0000-000000000000}"/>
-            </ac:spMkLst>
-          </pc:spChg>
-        </pc:sldLayoutChg>
-        <pc:sldLayoutChg chg="modSp">
-          <pc:chgData name="" userId="9a24253a5e4fde46" providerId="LiveId" clId="{C0A7ED71-9872-40E9-8CCC-A5734F98C157}" dt="2024-10-24T16:23:05.661" v="0"/>
-          <pc:sldLayoutMkLst>
-            <pc:docMk/>
-            <pc:sldMasterMk cId="2715811080" sldId="2147483720"/>
-            <pc:sldLayoutMk cId="397609261" sldId="2147483740"/>
-          </pc:sldLayoutMkLst>
-          <pc:spChg chg="mod">
-            <ac:chgData name="" userId="9a24253a5e4fde46" providerId="LiveId" clId="{C0A7ED71-9872-40E9-8CCC-A5734F98C157}" dt="2024-10-24T16:23:05.661" v="0"/>
-            <ac:spMkLst>
-              <pc:docMk/>
-              <pc:sldMasterMk cId="2715811080" sldId="2147483720"/>
-              <pc:sldLayoutMk cId="397609261" sldId="2147483740"/>
-              <ac:spMk id="2" creationId="{00000000-0000-0000-0000-000000000000}"/>
-            </ac:spMkLst>
-          </pc:spChg>
-          <pc:spChg chg="mod">
-            <ac:chgData name="" userId="9a24253a5e4fde46" providerId="LiveId" clId="{C0A7ED71-9872-40E9-8CCC-A5734F98C157}" dt="2024-10-24T16:23:05.661" v="0"/>
-            <ac:spMkLst>
-              <pc:docMk/>
-              <pc:sldMasterMk cId="2715811080" sldId="2147483720"/>
-              <pc:sldLayoutMk cId="397609261" sldId="2147483740"/>
-              <ac:spMk id="3" creationId="{00000000-0000-0000-0000-000000000000}"/>
-            </ac:spMkLst>
-          </pc:spChg>
-          <pc:spChg chg="mod">
-            <ac:chgData name="" userId="9a24253a5e4fde46" providerId="LiveId" clId="{C0A7ED71-9872-40E9-8CCC-A5734F98C157}" dt="2024-10-24T16:23:05.661" v="0"/>
-            <ac:spMkLst>
-              <pc:docMk/>
-              <pc:sldMasterMk cId="2715811080" sldId="2147483720"/>
-              <pc:sldLayoutMk cId="397609261" sldId="2147483740"/>
-              <ac:spMk id="4" creationId="{00000000-0000-0000-0000-000000000000}"/>
-            </ac:spMkLst>
-          </pc:spChg>
-          <pc:spChg chg="mod">
-            <ac:chgData name="" userId="9a24253a5e4fde46" providerId="LiveId" clId="{C0A7ED71-9872-40E9-8CCC-A5734F98C157}" dt="2024-10-24T16:23:05.661" v="0"/>
-            <ac:spMkLst>
-              <pc:docMk/>
-              <pc:sldMasterMk cId="2715811080" sldId="2147483720"/>
-              <pc:sldLayoutMk cId="397609261" sldId="2147483740"/>
-              <ac:spMk id="5" creationId="{00000000-0000-0000-0000-000000000000}"/>
-            </ac:spMkLst>
-          </pc:spChg>
-          <pc:spChg chg="mod">
-            <ac:chgData name="" userId="9a24253a5e4fde46" providerId="LiveId" clId="{C0A7ED71-9872-40E9-8CCC-A5734F98C157}" dt="2024-10-24T16:23:05.661" v="0"/>
-            <ac:spMkLst>
-              <pc:docMk/>
-              <pc:sldMasterMk cId="2715811080" sldId="2147483720"/>
-              <pc:sldLayoutMk cId="397609261" sldId="2147483740"/>
-              <ac:spMk id="6" creationId="{00000000-0000-0000-0000-000000000000}"/>
-            </ac:spMkLst>
-          </pc:spChg>
-          <pc:spChg chg="mod">
-            <ac:chgData name="" userId="9a24253a5e4fde46" providerId="LiveId" clId="{C0A7ED71-9872-40E9-8CCC-A5734F98C157}" dt="2024-10-24T16:23:05.661" v="0"/>
-            <ac:spMkLst>
-              <pc:docMk/>
-              <pc:sldMasterMk cId="2715811080" sldId="2147483720"/>
-              <pc:sldLayoutMk cId="397609261" sldId="2147483740"/>
-              <ac:spMk id="7" creationId="{00000000-0000-0000-0000-000000000000}"/>
-            </ac:spMkLst>
-          </pc:spChg>
-        </pc:sldLayoutChg>
-      </pc:sldMasterChg>
-    </pc:docChg>
-  </pc:docChgLst>
-</pc:chgInfo>
-</file>
-
 <file path=ppt/notesMasters/notesMaster1.xml><?xml version="1.0" encoding="utf-8"?>
 <p:notesMaster xmlns:a="http://schemas.openxmlformats.org/drawingml/2006/main" xmlns:r="http://schemas.openxmlformats.org/officeDocument/2006/relationships" xmlns:p="http://schemas.openxmlformats.org/presentationml/2006/main">
   <p:cSld>
@@ -1620,7 +260,7 @@
             <a:fld id="{33883926-089C-4490-ABE8-2528134176F1}" type="datetimeFigureOut">
               <a:rPr lang="en-US" smtClean="0"/>
               <a:pPr/>
-              <a:t>10/24/2024</a:t>
+              <a:t>3/24/2026</a:t>
             </a:fld>
             <a:endParaRPr lang="en-US"/>
           </a:p>
@@ -1978,6 +618,771 @@
 </p:notes>
 </file>
 
+<file path=ppt/notesSlides/notesSlide10.xml><?xml version="1.0" encoding="utf-8"?>
+<p:notes xmlns:a="http://schemas.openxmlformats.org/drawingml/2006/main" xmlns:r="http://schemas.openxmlformats.org/officeDocument/2006/relationships" xmlns:p="http://schemas.openxmlformats.org/presentationml/2006/main">
+  <p:cSld>
+    <p:spTree>
+      <p:nvGrpSpPr>
+        <p:cNvPr id="1" name=""/>
+        <p:cNvGrpSpPr/>
+        <p:nvPr/>
+      </p:nvGrpSpPr>
+      <p:grpSpPr>
+        <a:xfrm>
+          <a:off x="0" y="0"/>
+          <a:ext cx="0" cy="0"/>
+          <a:chOff x="0" y="0"/>
+          <a:chExt cx="0" cy="0"/>
+        </a:xfrm>
+      </p:grpSpPr>
+      <p:sp>
+        <p:nvSpPr>
+          <p:cNvPr id="2" name="Slide Image Placeholder 1"/>
+          <p:cNvSpPr>
+            <a:spLocks noGrp="1" noRot="1" noChangeAspect="1"/>
+          </p:cNvSpPr>
+          <p:nvPr>
+            <p:ph type="sldImg"/>
+          </p:nvPr>
+        </p:nvSpPr>
+        <p:spPr/>
+      </p:sp>
+      <p:sp>
+        <p:nvSpPr>
+          <p:cNvPr id="3" name="Notes Placeholder 2"/>
+          <p:cNvSpPr>
+            <a:spLocks noGrp="1"/>
+          </p:cNvSpPr>
+          <p:nvPr>
+            <p:ph type="body" idx="1"/>
+          </p:nvPr>
+        </p:nvSpPr>
+        <p:spPr/>
+        <p:txBody>
+          <a:bodyPr/>
+          <a:lstStyle/>
+          <a:p>
+            <a:r>
+              <a:rPr lang="en-US" b="1" dirty="0"/>
+              <a:t>Slide 3: Boom in Vernacular Literature</a:t>
+            </a:r>
+          </a:p>
+          <a:p>
+            <a:r>
+              <a:rPr lang="en-US" b="1" dirty="0"/>
+              <a:t>Popular literature written in colloquial </a:t>
+            </a:r>
+            <a:r>
+              <a:rPr lang="en-US" b="1" i="1" dirty="0" err="1"/>
+              <a:t>baihua</a:t>
+            </a:r>
+            <a:r>
+              <a:rPr lang="en-US" b="1" dirty="0"/>
+              <a:t> (everyday spoken language) instead of classical Chinese</a:t>
+            </a:r>
+            <a:r>
+              <a:rPr lang="en-US" dirty="0"/>
+              <a:t> Lecture note: For the first time in Chinese history, best-selling books were written in the language people actually spoke. This made literature accessible to merchants, shopkeepers, women, and even semi-literate urban residents — a true cultural democratization.</a:t>
+            </a:r>
+          </a:p>
+          <a:p>
+            <a:r>
+              <a:rPr lang="en-US" b="1" dirty="0"/>
+              <a:t>Four great Ming novels</a:t>
+            </a:r>
+            <a:r>
+              <a:rPr lang="en-US" dirty="0"/>
+              <a:t> Lecture note: </a:t>
+            </a:r>
+            <a:r>
+              <a:rPr lang="en-US" i="1" dirty="0"/>
+              <a:t>Romance of the Three Kingdoms</a:t>
+            </a:r>
+            <a:r>
+              <a:rPr lang="en-US" dirty="0"/>
+              <a:t>, </a:t>
+            </a:r>
+            <a:r>
+              <a:rPr lang="en-US" i="1" dirty="0"/>
+              <a:t>Water Margin</a:t>
+            </a:r>
+            <a:r>
+              <a:rPr lang="en-US" dirty="0"/>
+              <a:t> (</a:t>
+            </a:r>
+            <a:r>
+              <a:rPr lang="en-US" i="1" dirty="0"/>
+              <a:t>Outlaws of the Marsh</a:t>
+            </a:r>
+            <a:r>
+              <a:rPr lang="en-US" dirty="0"/>
+              <a:t>), </a:t>
+            </a:r>
+            <a:r>
+              <a:rPr lang="en-US" i="1" dirty="0"/>
+              <a:t>Journey to the West</a:t>
+            </a:r>
+            <a:r>
+              <a:rPr lang="en-US" dirty="0"/>
+              <a:t>, and </a:t>
+            </a:r>
+            <a:r>
+              <a:rPr lang="en-US" i="1" dirty="0"/>
+              <a:t>Plum in the Golden Vase</a:t>
+            </a:r>
+            <a:r>
+              <a:rPr lang="en-US" dirty="0"/>
+              <a:t> (</a:t>
+            </a:r>
+            <a:r>
+              <a:rPr lang="en-US" i="1" dirty="0"/>
+              <a:t>Jin Ping Mei</a:t>
+            </a:r>
+            <a:r>
+              <a:rPr lang="en-US" dirty="0"/>
+              <a:t>). All were written or reached final form in the Ming and became instant classics. They mixed history, adventure, satire, and social commentary.</a:t>
+            </a:r>
+          </a:p>
+          <a:p>
+            <a:r>
+              <a:rPr lang="en-US" b="1" dirty="0"/>
+              <a:t>Drama flourished: most famous example is </a:t>
+            </a:r>
+            <a:r>
+              <a:rPr lang="en-US" b="1" i="1" dirty="0"/>
+              <a:t>The Peony Pavilion</a:t>
+            </a:r>
+            <a:r>
+              <a:rPr lang="en-US" b="1" dirty="0"/>
+              <a:t> by Tang Xianzu (1598) – story of love, dreams, and female agency</a:t>
+            </a:r>
+            <a:r>
+              <a:rPr lang="en-US" dirty="0"/>
+              <a:t> Lecture note: Tang Xianzu’s </a:t>
+            </a:r>
+            <a:r>
+              <a:rPr lang="en-US" i="1" dirty="0"/>
+              <a:t>Peony Pavilion</a:t>
+            </a:r>
+            <a:r>
+              <a:rPr lang="en-US" dirty="0"/>
+              <a:t> is the most beloved Ming play. Its heroine, Du </a:t>
+            </a:r>
+            <a:r>
+              <a:rPr lang="en-US" dirty="0" err="1"/>
+              <a:t>Liniang</a:t>
+            </a:r>
+            <a:r>
+              <a:rPr lang="en-US" dirty="0"/>
+              <a:t>, falls in love in a dream, literally dies of lovesickness, then is resurrected by true love. The play celebrates passion (</a:t>
+            </a:r>
+            <a:r>
+              <a:rPr lang="en-US" i="1" dirty="0"/>
+              <a:t>qing</a:t>
+            </a:r>
+            <a:r>
+              <a:rPr lang="en-US" dirty="0"/>
+              <a:t>) over Confucian restraint and gave young women a powerful cultural model of romantic agency. (You can read the famous garden scene from the Documents section of the textbook here if you want to quote it.)</a:t>
+            </a:r>
+          </a:p>
+          <a:p>
+            <a:r>
+              <a:rPr lang="en-US" b="1" dirty="0"/>
+              <a:t>Reflected urban tastes, romance, adventure, satire, and social criticism</a:t>
+            </a:r>
+            <a:r>
+              <a:rPr lang="en-US" dirty="0"/>
+              <a:t> Lecture note: These works depicted the real world of Jiangnan — merchants cheating customers, corrupt officials, scheming matchmakers, courtesans, and students cramming for exams. They entertained while quietly critiquing social hypocrisy, making literature a mirror of late-Ming urban life.</a:t>
+            </a:r>
+          </a:p>
+          <a:p>
+            <a:endParaRPr lang="en-US" dirty="0"/>
+          </a:p>
+        </p:txBody>
+      </p:sp>
+      <p:sp>
+        <p:nvSpPr>
+          <p:cNvPr id="4" name="Slide Number Placeholder 3"/>
+          <p:cNvSpPr>
+            <a:spLocks noGrp="1"/>
+          </p:cNvSpPr>
+          <p:nvPr>
+            <p:ph type="sldNum" sz="quarter" idx="5"/>
+          </p:nvPr>
+        </p:nvSpPr>
+        <p:spPr/>
+        <p:txBody>
+          <a:bodyPr/>
+          <a:lstStyle/>
+          <a:p>
+            <a:fld id="{C0D6F3DB-BC9C-4B9B-80E8-C50B0E30F7B6}" type="slidenum">
+              <a:rPr lang="en-US" smtClean="0"/>
+              <a:pPr/>
+              <a:t>30</a:t>
+            </a:fld>
+            <a:endParaRPr lang="en-US"/>
+          </a:p>
+        </p:txBody>
+      </p:sp>
+    </p:spTree>
+    <p:extLst>
+      <p:ext uri="{BB962C8B-B14F-4D97-AF65-F5344CB8AC3E}">
+        <p14:creationId xmlns:p14="http://schemas.microsoft.com/office/powerpoint/2010/main" val="3484116165"/>
+      </p:ext>
+    </p:extLst>
+  </p:cSld>
+  <p:clrMapOvr>
+    <a:masterClrMapping/>
+  </p:clrMapOvr>
+</p:notes>
+</file>
+
+<file path=ppt/notesSlides/notesSlide11.xml><?xml version="1.0" encoding="utf-8"?>
+<p:notes xmlns:a="http://schemas.openxmlformats.org/drawingml/2006/main" xmlns:r="http://schemas.openxmlformats.org/officeDocument/2006/relationships" xmlns:p="http://schemas.openxmlformats.org/presentationml/2006/main">
+  <p:cSld>
+    <p:spTree>
+      <p:nvGrpSpPr>
+        <p:cNvPr id="1" name=""/>
+        <p:cNvGrpSpPr/>
+        <p:nvPr/>
+      </p:nvGrpSpPr>
+      <p:grpSpPr>
+        <a:xfrm>
+          <a:off x="0" y="0"/>
+          <a:ext cx="0" cy="0"/>
+          <a:chOff x="0" y="0"/>
+          <a:chExt cx="0" cy="0"/>
+        </a:xfrm>
+      </p:grpSpPr>
+      <p:sp>
+        <p:nvSpPr>
+          <p:cNvPr id="2" name="Slide Image Placeholder 1"/>
+          <p:cNvSpPr>
+            <a:spLocks noGrp="1" noRot="1" noChangeAspect="1"/>
+          </p:cNvSpPr>
+          <p:nvPr>
+            <p:ph type="sldImg"/>
+          </p:nvPr>
+        </p:nvSpPr>
+        <p:spPr/>
+      </p:sp>
+      <p:sp>
+        <p:nvSpPr>
+          <p:cNvPr id="3" name="Notes Placeholder 2"/>
+          <p:cNvSpPr>
+            <a:spLocks noGrp="1"/>
+          </p:cNvSpPr>
+          <p:nvPr>
+            <p:ph type="body" idx="1"/>
+          </p:nvPr>
+        </p:nvSpPr>
+        <p:spPr/>
+        <p:txBody>
+          <a:bodyPr/>
+          <a:lstStyle/>
+          <a:p>
+            <a:r>
+              <a:rPr lang="en-US" b="1" dirty="0"/>
+              <a:t>Slide 4: Women’s Roles in Ming Society</a:t>
+            </a:r>
+          </a:p>
+          <a:p>
+            <a:r>
+              <a:rPr lang="en-US" b="1" dirty="0"/>
+              <a:t>Increased literacy and cultural participation among elite women in Jiangnan</a:t>
+            </a:r>
+            <a:r>
+              <a:rPr lang="en-US" dirty="0"/>
+              <a:t> Lecture note: Rising prosperity and the spread of printing meant more gentry daughters learned to read and write. Many Jiangnan women published poetry collections that circulated among literati circles — something almost unheard of in earlier dynasties.</a:t>
+            </a:r>
+          </a:p>
+          <a:p>
+            <a:r>
+              <a:rPr lang="en-US" b="1" dirty="0"/>
+              <a:t>Some women published poetry collections and gained literary recognition</a:t>
+            </a:r>
+            <a:r>
+              <a:rPr lang="en-US" dirty="0"/>
+              <a:t> Lecture note: Female poets were praised in the same anthologies as men. This was part of a broader late-Ming fascination with individual talent and emotion that crossed gender lines.</a:t>
+            </a:r>
+          </a:p>
+          <a:p>
+            <a:r>
+              <a:rPr lang="en-US" b="1" dirty="0"/>
+              <a:t>Biography highlight: Tan </a:t>
+            </a:r>
+            <a:r>
+              <a:rPr lang="en-US" b="1" dirty="0" err="1"/>
+              <a:t>Yunxian</a:t>
+            </a:r>
+            <a:r>
+              <a:rPr lang="en-US" b="1" dirty="0"/>
+              <a:t> (15th–16th c.), female physician who treated women’s illnesses</a:t>
+            </a:r>
+            <a:r>
+              <a:rPr lang="en-US" dirty="0"/>
+              <a:t> Lecture note: Tan </a:t>
+            </a:r>
+            <a:r>
+              <a:rPr lang="en-US" dirty="0" err="1"/>
+              <a:t>Yunxian</a:t>
+            </a:r>
+            <a:r>
+              <a:rPr lang="en-US" dirty="0"/>
+              <a:t> (1461–1554) came from a medical family in Jiangnan. She learned medicine from her grandmother and practiced exclusively among women, treating chronic conditions such as menstrual disorders, miscarriages, and postpartum depression. At age fifty she wrote an autobiographical medical casebook — one of the earliest by a woman doctor in Chinese history. (See the full Biography in the textbook.)</a:t>
+            </a:r>
+          </a:p>
+          <a:p>
+            <a:r>
+              <a:rPr lang="en-US" b="1" dirty="0"/>
+              <a:t>Persistent Confucian expectations: </a:t>
+            </a:r>
+            <a:r>
+              <a:rPr lang="en-US" b="1" dirty="0" err="1"/>
+              <a:t>footbinding</a:t>
+            </a:r>
+            <a:r>
+              <a:rPr lang="en-US" b="1" dirty="0"/>
+              <a:t> became more widespread; emphasis on chastity and widow fidelity</a:t>
+            </a:r>
+            <a:r>
+              <a:rPr lang="en-US" dirty="0"/>
+              <a:t> Lecture note: While elite women gained new cultural space, conservative values tightened in other areas. </a:t>
+            </a:r>
+            <a:r>
+              <a:rPr lang="en-US" dirty="0" err="1"/>
+              <a:t>Footbinding</a:t>
+            </a:r>
+            <a:r>
+              <a:rPr lang="en-US" dirty="0"/>
+              <a:t> spread from the elite to commoner families as a marker of respectability. Widow chastity was heavily promoted by the state and lineages, and the cult of fidelity reached new heights.</a:t>
+            </a:r>
+          </a:p>
+          <a:p>
+            <a:r>
+              <a:rPr lang="en-US" b="1" dirty="0"/>
+              <a:t>Vibrant urban courtesan culture in Jiangnan cities</a:t>
+            </a:r>
+            <a:r>
+              <a:rPr lang="en-US" dirty="0"/>
+              <a:t> Lecture note: Suzhou and Nanjing became famous for highly educated courtesans who could sing, dance, paint, and compose poetry. Literati men formed intense emotional and intellectual relationships with them — another sign of the late-Ming celebration of passion and individual feeling.</a:t>
+            </a:r>
+          </a:p>
+          <a:p>
+            <a:endParaRPr lang="en-US" dirty="0"/>
+          </a:p>
+        </p:txBody>
+      </p:sp>
+      <p:sp>
+        <p:nvSpPr>
+          <p:cNvPr id="4" name="Slide Number Placeholder 3"/>
+          <p:cNvSpPr>
+            <a:spLocks noGrp="1"/>
+          </p:cNvSpPr>
+          <p:nvPr>
+            <p:ph type="sldNum" sz="quarter" idx="5"/>
+          </p:nvPr>
+        </p:nvSpPr>
+        <p:spPr/>
+        <p:txBody>
+          <a:bodyPr/>
+          <a:lstStyle/>
+          <a:p>
+            <a:fld id="{C0D6F3DB-BC9C-4B9B-80E8-C50B0E30F7B6}" type="slidenum">
+              <a:rPr lang="en-US" smtClean="0"/>
+              <a:pPr/>
+              <a:t>31</a:t>
+            </a:fld>
+            <a:endParaRPr lang="en-US"/>
+          </a:p>
+        </p:txBody>
+      </p:sp>
+    </p:spTree>
+    <p:extLst>
+      <p:ext uri="{BB962C8B-B14F-4D97-AF65-F5344CB8AC3E}">
+        <p14:creationId xmlns:p14="http://schemas.microsoft.com/office/powerpoint/2010/main" val="2712457360"/>
+      </p:ext>
+    </p:extLst>
+  </p:cSld>
+  <p:clrMapOvr>
+    <a:masterClrMapping/>
+  </p:clrMapOvr>
+</p:notes>
+</file>
+
+<file path=ppt/notesSlides/notesSlide12.xml><?xml version="1.0" encoding="utf-8"?>
+<p:notes xmlns:a="http://schemas.openxmlformats.org/drawingml/2006/main" xmlns:r="http://schemas.openxmlformats.org/officeDocument/2006/relationships" xmlns:p="http://schemas.openxmlformats.org/presentationml/2006/main">
+  <p:cSld>
+    <p:spTree>
+      <p:nvGrpSpPr>
+        <p:cNvPr id="1" name=""/>
+        <p:cNvGrpSpPr/>
+        <p:nvPr/>
+      </p:nvGrpSpPr>
+      <p:grpSpPr>
+        <a:xfrm>
+          <a:off x="0" y="0"/>
+          <a:ext cx="0" cy="0"/>
+          <a:chOff x="0" y="0"/>
+          <a:chExt cx="0" cy="0"/>
+        </a:xfrm>
+      </p:grpSpPr>
+      <p:sp>
+        <p:nvSpPr>
+          <p:cNvPr id="2" name="Slide Image Placeholder 1"/>
+          <p:cNvSpPr>
+            <a:spLocks noGrp="1" noRot="1" noChangeAspect="1"/>
+          </p:cNvSpPr>
+          <p:nvPr>
+            <p:ph type="sldImg"/>
+          </p:nvPr>
+        </p:nvSpPr>
+        <p:spPr/>
+      </p:sp>
+      <p:sp>
+        <p:nvSpPr>
+          <p:cNvPr id="3" name="Notes Placeholder 2"/>
+          <p:cNvSpPr>
+            <a:spLocks noGrp="1"/>
+          </p:cNvSpPr>
+          <p:nvPr>
+            <p:ph type="body" idx="1"/>
+          </p:nvPr>
+        </p:nvSpPr>
+        <p:spPr/>
+        <p:txBody>
+          <a:bodyPr/>
+          <a:lstStyle/>
+          <a:p>
+            <a:r>
+              <a:rPr lang="en-US" b="1" dirty="0"/>
+              <a:t>Slide 5: Suzhou Gardens</a:t>
+            </a:r>
+          </a:p>
+          <a:p>
+            <a:r>
+              <a:rPr lang="en-US" b="1" dirty="0"/>
+              <a:t>Private gardens built by wealthy gentry and merchants in Suzhou</a:t>
+            </a:r>
+            <a:r>
+              <a:rPr lang="en-US" dirty="0"/>
+              <a:t> Lecture note: Suzhou, the “Venice of the East,” was the garden capital of Ming China. Almost every wealthy family in the city built a private garden inside their walled compound.</a:t>
+            </a:r>
+          </a:p>
+          <a:p>
+            <a:r>
+              <a:rPr lang="en-US" b="1" dirty="0"/>
+              <a:t>Masterpieces of landscape architecture blending nature, rocks, water, pavilions, and plants</a:t>
+            </a:r>
+            <a:r>
+              <a:rPr lang="en-US" dirty="0"/>
+              <a:t> Lecture note: Designers used “borrowed scenery,” miniature mountains made of bizarre </a:t>
+            </a:r>
+            <a:r>
+              <a:rPr lang="en-US" dirty="0" err="1"/>
+              <a:t>Taihu</a:t>
+            </a:r>
+            <a:r>
+              <a:rPr lang="en-US" dirty="0"/>
+              <a:t> rocks, winding paths, moon gates, and carefully placed pavilions to create an illusion of vast nature in a tiny urban space. Every view was composed like a painting.</a:t>
+            </a:r>
+          </a:p>
+          <a:p>
+            <a:r>
+              <a:rPr lang="en-US" b="1" dirty="0"/>
+              <a:t>Symbol of refined taste, social status, and escape from official life</a:t>
+            </a:r>
+            <a:r>
+              <a:rPr lang="en-US" dirty="0"/>
+              <a:t> Lecture note: A beautiful garden showed that its owner possessed both wealth </a:t>
+            </a:r>
+            <a:r>
+              <a:rPr lang="en-US" i="1" dirty="0"/>
+              <a:t>and</a:t>
+            </a:r>
+            <a:r>
+              <a:rPr lang="en-US" dirty="0"/>
+              <a:t> cultivation. For overworked officials and merchants, the garden was a place to retreat, write poetry, drink wine with friends, and forget the pressures of the outside world.</a:t>
+            </a:r>
+          </a:p>
+          <a:p>
+            <a:r>
+              <a:rPr lang="en-US" b="1" dirty="0"/>
+              <a:t>Represented the fusion of merchant wealth and literati aesthetics</a:t>
+            </a:r>
+            <a:r>
+              <a:rPr lang="en-US" dirty="0"/>
+              <a:t> Lecture note: Many of the greatest Suzhou gardens were financed by merchant fortunes but designed according to the most refined literati taste. This fusion is a perfect example of how commercial wealth was transformed into cultural prestige in late-Ming Jiangnan.</a:t>
+            </a:r>
+          </a:p>
+          <a:p>
+            <a:r>
+              <a:rPr lang="en-US" b="1" dirty="0"/>
+              <a:t>Many famous examples survive today (e.g., Humble Administrator’s Garden, Lingering Garden)</a:t>
+            </a:r>
+            <a:r>
+              <a:rPr lang="en-US" dirty="0"/>
+              <a:t> Lecture note: These gardens are now UNESCO World Heritage sites and remain some of the best-preserved examples of classical Chinese garden design. </a:t>
+            </a:r>
+            <a:r>
+              <a:rPr lang="en-US"/>
+              <a:t>Visiting them today gives students a direct, living connection to the world described in this chapter.</a:t>
+            </a:r>
+          </a:p>
+          <a:p>
+            <a:endParaRPr lang="en-US"/>
+          </a:p>
+        </p:txBody>
+      </p:sp>
+      <p:sp>
+        <p:nvSpPr>
+          <p:cNvPr id="4" name="Slide Number Placeholder 3"/>
+          <p:cNvSpPr>
+            <a:spLocks noGrp="1"/>
+          </p:cNvSpPr>
+          <p:nvPr>
+            <p:ph type="sldNum" sz="quarter" idx="5"/>
+          </p:nvPr>
+        </p:nvSpPr>
+        <p:spPr/>
+        <p:txBody>
+          <a:bodyPr/>
+          <a:lstStyle/>
+          <a:p>
+            <a:fld id="{C0D6F3DB-BC9C-4B9B-80E8-C50B0E30F7B6}" type="slidenum">
+              <a:rPr lang="en-US" smtClean="0"/>
+              <a:pPr/>
+              <a:t>32</a:t>
+            </a:fld>
+            <a:endParaRPr lang="en-US"/>
+          </a:p>
+        </p:txBody>
+      </p:sp>
+    </p:spTree>
+    <p:extLst>
+      <p:ext uri="{BB962C8B-B14F-4D97-AF65-F5344CB8AC3E}">
+        <p14:creationId xmlns:p14="http://schemas.microsoft.com/office/powerpoint/2010/main" val="2482748098"/>
+      </p:ext>
+    </p:extLst>
+  </p:cSld>
+  <p:clrMapOvr>
+    <a:masterClrMapping/>
+  </p:clrMapOvr>
+</p:notes>
+</file>
+
+<file path=ppt/notesSlides/notesSlide13.xml><?xml version="1.0" encoding="utf-8"?>
+<p:notes xmlns:a="http://schemas.openxmlformats.org/drawingml/2006/main" xmlns:r="http://schemas.openxmlformats.org/officeDocument/2006/relationships" xmlns:p="http://schemas.openxmlformats.org/presentationml/2006/main">
+  <p:cSld>
+    <p:spTree>
+      <p:nvGrpSpPr>
+        <p:cNvPr id="1" name=""/>
+        <p:cNvGrpSpPr/>
+        <p:nvPr/>
+      </p:nvGrpSpPr>
+      <p:grpSpPr>
+        <a:xfrm>
+          <a:off x="0" y="0"/>
+          <a:ext cx="0" cy="0"/>
+          <a:chOff x="0" y="0"/>
+          <a:chExt cx="0" cy="0"/>
+        </a:xfrm>
+      </p:grpSpPr>
+      <p:sp>
+        <p:nvSpPr>
+          <p:cNvPr id="2" name="Slide Image Placeholder 1"/>
+          <p:cNvSpPr>
+            <a:spLocks noGrp="1" noRot="1" noChangeAspect="1"/>
+          </p:cNvSpPr>
+          <p:nvPr>
+            <p:ph type="sldImg"/>
+          </p:nvPr>
+        </p:nvSpPr>
+        <p:spPr>
+          <a:xfrm>
+            <a:off x="381000" y="685800"/>
+            <a:ext cx="6096000" cy="3429000"/>
+          </a:xfrm>
+        </p:spPr>
+      </p:sp>
+      <p:sp>
+        <p:nvSpPr>
+          <p:cNvPr id="3" name="Notes Placeholder 2"/>
+          <p:cNvSpPr>
+            <a:spLocks noGrp="1"/>
+          </p:cNvSpPr>
+          <p:nvPr>
+            <p:ph type="body" idx="1"/>
+          </p:nvPr>
+        </p:nvSpPr>
+        <p:spPr/>
+        <p:txBody>
+          <a:bodyPr/>
+          <a:lstStyle/>
+          <a:p>
+            <a:r>
+              <a:rPr lang="en-US" dirty="0"/>
+              <a:t>Tsai, Shih-Shan</a:t>
+            </a:r>
+            <a:r>
+              <a:rPr lang="en-US" baseline="0" dirty="0"/>
+              <a:t> Henry.  </a:t>
+            </a:r>
+            <a:r>
+              <a:rPr lang="en-US" i="1" baseline="0" dirty="0"/>
+              <a:t>The Eunuchs of the Ming Dynasty</a:t>
+            </a:r>
+            <a:r>
+              <a:rPr lang="en-US" baseline="0" dirty="0"/>
+              <a:t>.</a:t>
+            </a:r>
+            <a:endParaRPr lang="en-US" dirty="0"/>
+          </a:p>
+        </p:txBody>
+      </p:sp>
+      <p:sp>
+        <p:nvSpPr>
+          <p:cNvPr id="4" name="Slide Number Placeholder 3"/>
+          <p:cNvSpPr>
+            <a:spLocks noGrp="1"/>
+          </p:cNvSpPr>
+          <p:nvPr>
+            <p:ph type="sldNum" sz="quarter" idx="10"/>
+          </p:nvPr>
+        </p:nvSpPr>
+        <p:spPr/>
+        <p:txBody>
+          <a:bodyPr/>
+          <a:lstStyle/>
+          <a:p>
+            <a:fld id="{C0D6F3DB-BC9C-4B9B-80E8-C50B0E30F7B6}" type="slidenum">
+              <a:rPr lang="en-US" smtClean="0"/>
+              <a:pPr/>
+              <a:t>40</a:t>
+            </a:fld>
+            <a:endParaRPr lang="en-US"/>
+          </a:p>
+        </p:txBody>
+      </p:sp>
+    </p:spTree>
+    <p:extLst>
+      <p:ext uri="{BB962C8B-B14F-4D97-AF65-F5344CB8AC3E}">
+        <p14:creationId xmlns:p14="http://schemas.microsoft.com/office/powerpoint/2010/main" val="4218288580"/>
+      </p:ext>
+    </p:extLst>
+  </p:cSld>
+  <p:clrMapOvr>
+    <a:masterClrMapping/>
+  </p:clrMapOvr>
+</p:notes>
+</file>
+
+<file path=ppt/notesSlides/notesSlide14.xml><?xml version="1.0" encoding="utf-8"?>
+<p:notes xmlns:a="http://schemas.openxmlformats.org/drawingml/2006/main" xmlns:r="http://schemas.openxmlformats.org/officeDocument/2006/relationships" xmlns:p="http://schemas.openxmlformats.org/presentationml/2006/main">
+  <p:cSld>
+    <p:spTree>
+      <p:nvGrpSpPr>
+        <p:cNvPr id="1" name=""/>
+        <p:cNvGrpSpPr/>
+        <p:nvPr/>
+      </p:nvGrpSpPr>
+      <p:grpSpPr>
+        <a:xfrm>
+          <a:off x="0" y="0"/>
+          <a:ext cx="0" cy="0"/>
+          <a:chOff x="0" y="0"/>
+          <a:chExt cx="0" cy="0"/>
+        </a:xfrm>
+      </p:grpSpPr>
+      <p:sp>
+        <p:nvSpPr>
+          <p:cNvPr id="2" name="Slide Image Placeholder 1"/>
+          <p:cNvSpPr>
+            <a:spLocks noGrp="1" noRot="1" noChangeAspect="1"/>
+          </p:cNvSpPr>
+          <p:nvPr>
+            <p:ph type="sldImg"/>
+          </p:nvPr>
+        </p:nvSpPr>
+        <p:spPr>
+          <a:xfrm>
+            <a:off x="381000" y="685800"/>
+            <a:ext cx="6096000" cy="3429000"/>
+          </a:xfrm>
+        </p:spPr>
+      </p:sp>
+      <p:sp>
+        <p:nvSpPr>
+          <p:cNvPr id="3" name="Notes Placeholder 2"/>
+          <p:cNvSpPr>
+            <a:spLocks noGrp="1"/>
+          </p:cNvSpPr>
+          <p:nvPr>
+            <p:ph type="body" idx="1"/>
+          </p:nvPr>
+        </p:nvSpPr>
+        <p:spPr/>
+        <p:txBody>
+          <a:bodyPr/>
+          <a:lstStyle/>
+          <a:p>
+            <a:r>
+              <a:rPr lang="en-US" dirty="0"/>
+              <a:t>Tsai, Shih-Shan</a:t>
+            </a:r>
+            <a:r>
+              <a:rPr lang="en-US" baseline="0" dirty="0"/>
+              <a:t> Henry.  </a:t>
+            </a:r>
+            <a:r>
+              <a:rPr lang="en-US" i="1" baseline="0" dirty="0"/>
+              <a:t>The Eunuchs of the Ming Dynasty</a:t>
+            </a:r>
+            <a:r>
+              <a:rPr lang="en-US" baseline="0" dirty="0"/>
+              <a:t>.</a:t>
+            </a:r>
+            <a:endParaRPr lang="en-US" dirty="0"/>
+          </a:p>
+        </p:txBody>
+      </p:sp>
+      <p:sp>
+        <p:nvSpPr>
+          <p:cNvPr id="4" name="Slide Number Placeholder 3"/>
+          <p:cNvSpPr>
+            <a:spLocks noGrp="1"/>
+          </p:cNvSpPr>
+          <p:nvPr>
+            <p:ph type="sldNum" sz="quarter" idx="10"/>
+          </p:nvPr>
+        </p:nvSpPr>
+        <p:spPr/>
+        <p:txBody>
+          <a:bodyPr/>
+          <a:lstStyle/>
+          <a:p>
+            <a:fld id="{C0D6F3DB-BC9C-4B9B-80E8-C50B0E30F7B6}" type="slidenum">
+              <a:rPr lang="en-US" smtClean="0"/>
+              <a:pPr/>
+              <a:t>41</a:t>
+            </a:fld>
+            <a:endParaRPr lang="en-US"/>
+          </a:p>
+        </p:txBody>
+      </p:sp>
+    </p:spTree>
+    <p:extLst>
+      <p:ext uri="{BB962C8B-B14F-4D97-AF65-F5344CB8AC3E}">
+        <p14:creationId xmlns:p14="http://schemas.microsoft.com/office/powerpoint/2010/main" val="1169848130"/>
+      </p:ext>
+    </p:extLst>
+  </p:cSld>
+  <p:clrMapOvr>
+    <a:masterClrMapping/>
+  </p:clrMapOvr>
+</p:notes>
+</file>
+
 <file path=ppt/notesSlides/notesSlide2.xml><?xml version="1.0" encoding="utf-8"?>
 <p:notes xmlns:a="http://schemas.openxmlformats.org/drawingml/2006/main" xmlns:r="http://schemas.openxmlformats.org/officeDocument/2006/relationships" xmlns:p="http://schemas.openxmlformats.org/presentationml/2006/main">
   <p:cSld>
@@ -2035,6 +1440,34 @@
             <a:r>
               <a:rPr lang="en-US" dirty="0"/>
               <a:t>: The Yellow River frequently flooded during this period, which devastated agricultural lands. The resulting famine and destruction of infrastructure created economic hardship and led to mass migrations and banditry. The failure to manage these disasters reflected a loss of control by the Mongol rulers, similar to how European governments struggled with famine and plague management.</a:t>
+            </a:r>
+          </a:p>
+          <a:p>
+            <a:endParaRPr lang="en-US" dirty="0"/>
+          </a:p>
+          <a:p>
+            <a:pPr marL="0" marR="0" lvl="0" indent="0" algn="l" defTabSz="914400" rtl="0" eaLnBrk="1" fontAlgn="auto" latinLnBrk="0" hangingPunct="1">
+              <a:lnSpc>
+                <a:spcPct val="100000"/>
+              </a:lnSpc>
+              <a:spcBef>
+                <a:spcPts val="0"/>
+              </a:spcBef>
+              <a:spcAft>
+                <a:spcPts val="0"/>
+              </a:spcAft>
+              <a:buClrTx/>
+              <a:buSzTx/>
+              <a:buFontTx/>
+              <a:buNone/>
+              <a:tabLst/>
+              <a:defRPr/>
+            </a:pPr>
+            <a:r>
+              <a:rPr lang="en-US" dirty="0">
+                <a:effectLst/>
+              </a:rPr>
+              <a:t>economic hardship and Mongol over-taxation were equally important,</a:t>
             </a:r>
           </a:p>
           <a:p>
@@ -2900,12 +2333,7 @@
             <p:ph type="sldImg"/>
           </p:nvPr>
         </p:nvSpPr>
-        <p:spPr>
-          <a:xfrm>
-            <a:off x="381000" y="685800"/>
-            <a:ext cx="6096000" cy="3429000"/>
-          </a:xfrm>
-        </p:spPr>
+        <p:spPr/>
       </p:sp>
       <p:sp>
         <p:nvSpPr>
@@ -2923,21 +2351,51 @@
           <a:lstStyle/>
           <a:p>
             <a:r>
-              <a:rPr lang="en-US" dirty="0"/>
-              <a:t>Tsai, Shih-Shan</a:t>
-            </a:r>
-            <a:r>
-              <a:rPr lang="en-US" baseline="0" dirty="0"/>
-              <a:t> Henry.  </a:t>
-            </a:r>
-            <a:r>
-              <a:rPr lang="en-US" i="1" baseline="0" dirty="0"/>
-              <a:t>The Eunuchs of the Ming Dynasty</a:t>
-            </a:r>
-            <a:r>
-              <a:rPr lang="en-US" baseline="0" dirty="0"/>
-              <a:t>.</a:t>
-            </a:r>
+              <a:rPr lang="en-US" b="1" dirty="0"/>
+              <a:t>Slide 1: Jiangnan: The Economic &amp; Cultural Heartland</a:t>
+            </a:r>
+          </a:p>
+          <a:p>
+            <a:r>
+              <a:rPr lang="en-US" b="1" dirty="0"/>
+              <a:t>Lower Yangzi Delta (modern Shanghai, Suzhou, Nanjing, Hangzhou)</a:t>
+            </a:r>
+            <a:r>
+              <a:rPr lang="en-US" dirty="0"/>
+              <a:t> Lecture note: This is the Jiangnan (“south of the river”) region — the economic powerhouse of the Ming. By the mid-Ming, it had become the most commercialized, urbanized, and culturally sophisticated part of China. The Grand Canal linked it directly to the capital in Beijing, making it the hub of both internal and overseas trade.</a:t>
+            </a:r>
+          </a:p>
+          <a:p>
+            <a:r>
+              <a:rPr lang="en-US" b="1" dirty="0"/>
+              <a:t>Center of Ming commercial boom and urban culture (16th–early 17th centuries)</a:t>
+            </a:r>
+            <a:r>
+              <a:rPr lang="en-US" dirty="0"/>
+              <a:t> Lecture note: As population grew from roughly 100 to 150 million, Jiangnan led the way in market towns, specialized handicraft production, and long-distance trade. Cities like Suzhou and Hangzhou exploded in size; wealthy merchant families and gentry built lavish urban estates. This created a vibrant consumer culture that the rest of China looked to for fashion, entertainment, and new ideas.</a:t>
+            </a:r>
+          </a:p>
+          <a:p>
+            <a:r>
+              <a:rPr lang="en-US" b="1" dirty="0"/>
+              <a:t>Rapid commercialization, market towns, and wealthy merchant elite</a:t>
+            </a:r>
+            <a:r>
+              <a:rPr lang="en-US" dirty="0"/>
+              <a:t> Lecture note: The Ming government’s relaxation of some early restrictions, combined with massive inflows of New World silver, fueled a commercial explosion. Hundreds of new market towns sprang up along rivers and canals. Merchant families accumulated fortunes in silk, cotton, porcelain, salt, and tea — some rivaling the wealth of the old landowning gentry.</a:t>
+            </a:r>
+          </a:p>
+          <a:p>
+            <a:r>
+              <a:rPr lang="en-US" b="1" dirty="0"/>
+              <a:t>Shift from rural agrarian focus to vibrant urban consumer society</a:t>
+            </a:r>
+            <a:r>
+              <a:rPr lang="en-US" dirty="0"/>
+              <a:t> Lecture note: While the official Confucian ideology still celebrated farming, daily life in Jiangnan was increasingly urban and commercial. People bought ready-made clothes, ate in restaurants, attended theaters, and collected art. Regional disparities grew: Jiangnan stayed several steps ahead of the rest of the empire in literacy, publishing, and fashionable consumption.</a:t>
+            </a:r>
+          </a:p>
+          <a:p>
             <a:endParaRPr lang="en-US" dirty="0"/>
           </a:p>
         </p:txBody>
@@ -2949,7 +2407,7 @@
             <a:spLocks noGrp="1"/>
           </p:cNvSpPr>
           <p:nvPr>
-            <p:ph type="sldNum" sz="quarter" idx="10"/>
+            <p:ph type="sldNum" sz="quarter" idx="5"/>
           </p:nvPr>
         </p:nvSpPr>
         <p:spPr/>
@@ -2960,7 +2418,7 @@
             <a:fld id="{C0D6F3DB-BC9C-4B9B-80E8-C50B0E30F7B6}" type="slidenum">
               <a:rPr lang="en-US" smtClean="0"/>
               <a:pPr/>
-              <a:t>35</a:t>
+              <a:t>28</a:t>
             </a:fld>
             <a:endParaRPr lang="en-US"/>
           </a:p>
@@ -2969,7 +2427,7 @@
     </p:spTree>
     <p:extLst>
       <p:ext uri="{BB962C8B-B14F-4D97-AF65-F5344CB8AC3E}">
-        <p14:creationId xmlns:p14="http://schemas.microsoft.com/office/powerpoint/2010/main" val="4218288580"/>
+        <p14:creationId xmlns:p14="http://schemas.microsoft.com/office/powerpoint/2010/main" val="1481963831"/>
       </p:ext>
     </p:extLst>
   </p:cSld>
@@ -3006,12 +2464,7 @@
             <p:ph type="sldImg"/>
           </p:nvPr>
         </p:nvSpPr>
-        <p:spPr>
-          <a:xfrm>
-            <a:off x="381000" y="685800"/>
-            <a:ext cx="6096000" cy="3429000"/>
-          </a:xfrm>
-        </p:spPr>
+        <p:spPr/>
       </p:sp>
       <p:sp>
         <p:nvSpPr>
@@ -3029,21 +2482,61 @@
           <a:lstStyle/>
           <a:p>
             <a:r>
-              <a:rPr lang="en-US" dirty="0"/>
-              <a:t>Tsai, Shih-Shan</a:t>
-            </a:r>
-            <a:r>
-              <a:rPr lang="en-US" baseline="0" dirty="0"/>
-              <a:t> Henry.  </a:t>
-            </a:r>
-            <a:r>
-              <a:rPr lang="en-US" i="1" baseline="0" dirty="0"/>
-              <a:t>The Eunuchs of the Ming Dynasty</a:t>
-            </a:r>
-            <a:r>
-              <a:rPr lang="en-US" baseline="0" dirty="0"/>
-              <a:t>.</a:t>
-            </a:r>
+              <a:rPr lang="en-US" b="1" dirty="0"/>
+              <a:t>Slide 2: Rise of Jiangnan Merchants</a:t>
+            </a:r>
+          </a:p>
+          <a:p>
+            <a:r>
+              <a:rPr lang="en-US" b="1" dirty="0"/>
+              <a:t>Long-distance trade in silk, cotton, porcelain, salt, and tea created enormous merchant wealth</a:t>
+            </a:r>
+            <a:r>
+              <a:rPr lang="en-US" dirty="0"/>
+              <a:t> Lecture note: Jiangnan merchants dominated the most profitable trades. Silk from Suzhou, cotton from the Yangzi delta, Jingdezhen porcelain, Huai River salt, and Fujian tea were shipped nationwide and even overseas. Profits were so high that some merchant families became multi-generational enterprises with branches in dozens of cities.</a:t>
+            </a:r>
+          </a:p>
+          <a:p>
+            <a:r>
+              <a:rPr lang="en-US" b="1" dirty="0"/>
+              <a:t>Some merchants rivaled or surpassed traditional gentry in economic power</a:t>
+            </a:r>
+            <a:r>
+              <a:rPr lang="en-US" dirty="0"/>
+              <a:t> Lecture note: By the late Ming, the richest Jiangnan merchants could outspend many degree-holding gentry families. They loaned money to officials, invested in land, and sponsored public works. This economic clout began to erode the old Confucian ranking that placed merchants at the bottom of the four occupations (scholar, farmer, artisan, merchant).</a:t>
+            </a:r>
+          </a:p>
+          <a:p>
+            <a:r>
+              <a:rPr lang="en-US" b="1" dirty="0"/>
+              <a:t>Tension with Confucian social hierarchy (merchants ranked lowest of the four occupations)</a:t>
+            </a:r>
+            <a:r>
+              <a:rPr lang="en-US" dirty="0"/>
+              <a:t> Lecture note: Officially, merchants were still looked down upon as profit-seekers. In reality, many bought official titles, educated their sons for the exams, and patronized Confucian scholars. This created social tension and cultural anxiety that is reflected in late-Ming literature and art.</a:t>
+            </a:r>
+          </a:p>
+          <a:p>
+            <a:r>
+              <a:rPr lang="en-US" b="1" dirty="0"/>
+              <a:t>Many merchants invested in education, arts patronage, and lavish lifestyles</a:t>
+            </a:r>
+            <a:r>
+              <a:rPr lang="en-US" dirty="0"/>
+              <a:t> Lecture note: Wealthy merchants became major patrons of painters, poets, playwrights, and garden designers. They built private academies, sponsored printing projects, and competed with the gentry in displaying refined taste — turning merchant wealth into cultural capital.</a:t>
+            </a:r>
+          </a:p>
+          <a:p>
+            <a:r>
+              <a:rPr lang="en-US" b="1" dirty="0"/>
+              <a:t>Rise of a distinctive “merchant culture” that challenged scholar-official ideals</a:t>
+            </a:r>
+            <a:r>
+              <a:rPr lang="en-US" dirty="0"/>
+              <a:t> Lecture note: Merchant culture celebrated practicality, risk-taking, and enjoyment of life rather than the scholar’s ideal of detached moral cultivation. This new attitude helped fuel the intellectual ferment of the late Ming, including challenges to strict Neo-Confucian orthodoxy.</a:t>
+            </a:r>
+          </a:p>
+          <a:p>
             <a:endParaRPr lang="en-US" dirty="0"/>
           </a:p>
         </p:txBody>
@@ -3055,7 +2548,7 @@
             <a:spLocks noGrp="1"/>
           </p:cNvSpPr>
           <p:nvPr>
-            <p:ph type="sldNum" sz="quarter" idx="10"/>
+            <p:ph type="sldNum" sz="quarter" idx="5"/>
           </p:nvPr>
         </p:nvSpPr>
         <p:spPr/>
@@ -3066,7 +2559,7 @@
             <a:fld id="{C0D6F3DB-BC9C-4B9B-80E8-C50B0E30F7B6}" type="slidenum">
               <a:rPr lang="en-US" smtClean="0"/>
               <a:pPr/>
-              <a:t>36</a:t>
+              <a:t>29</a:t>
             </a:fld>
             <a:endParaRPr lang="en-US"/>
           </a:p>
@@ -3075,7 +2568,7 @@
     </p:spTree>
     <p:extLst>
       <p:ext uri="{BB962C8B-B14F-4D97-AF65-F5344CB8AC3E}">
-        <p14:creationId xmlns:p14="http://schemas.microsoft.com/office/powerpoint/2010/main" val="1169848130"/>
+        <p14:creationId xmlns:p14="http://schemas.microsoft.com/office/powerpoint/2010/main" val="1370868194"/>
       </p:ext>
     </p:extLst>
   </p:cSld>
@@ -8950,6 +8443,13 @@
             <a:schemeClr val="lt1"/>
           </a:fontRef>
         </p:style>
+        <p:txBody>
+          <a:bodyPr/>
+          <a:lstStyle/>
+          <a:p>
+            <a:endParaRPr lang="en-US"/>
+          </a:p>
+        </p:txBody>
       </p:sp>
       <p:pic>
         <p:nvPicPr>
@@ -9044,6 +8544,13 @@
             <a:schemeClr val="lt1"/>
           </a:fontRef>
         </p:style>
+        <p:txBody>
+          <a:bodyPr/>
+          <a:lstStyle/>
+          <a:p>
+            <a:endParaRPr lang="en-US"/>
+          </a:p>
+        </p:txBody>
       </p:sp>
       <p:sp>
         <p:nvSpPr>
@@ -11724,7 +11231,13 @@
       </p:grpSpPr>
       <p:sp>
         <p:nvSpPr>
-          <p:cNvPr id="4" name="Title 3"/>
+          <p:cNvPr id="2" name="Title 1">
+            <a:extLst>
+              <a:ext uri="{FF2B5EF4-FFF2-40B4-BE49-F238E27FC236}">
+                <a16:creationId xmlns:a16="http://schemas.microsoft.com/office/drawing/2014/main" id="{60E3499A-BC2F-9C6A-8BBF-A29EA8CC91FC}"/>
+              </a:ext>
+            </a:extLst>
+          </p:cNvPr>
           <p:cNvSpPr>
             <a:spLocks noGrp="1"/>
           </p:cNvSpPr>
@@ -11739,34 +11252,65 @@
           <a:p>
             <a:r>
               <a:rPr lang="en-US" dirty="0"/>
-              <a:t>Challenge to Confucian Orthodoxy</a:t>
-            </a:r>
-          </a:p>
-        </p:txBody>
-      </p:sp>
-      <p:sp>
-        <p:nvSpPr>
-          <p:cNvPr id="5" name="Text Placeholder 4"/>
-          <p:cNvSpPr>
-            <a:spLocks noGrp="1"/>
-          </p:cNvSpPr>
-          <p:nvPr>
-            <p:ph type="body" idx="1"/>
-          </p:nvPr>
-        </p:nvSpPr>
-        <p:spPr/>
-        <p:txBody>
-          <a:bodyPr/>
-          <a:lstStyle/>
-          <a:p>
+              <a:t>Jiangnan: The Economic &amp; Cultural Heartland</a:t>
+            </a:r>
+            <a:br>
+              <a:rPr lang="en-US" dirty="0"/>
+            </a:br>
             <a:endParaRPr lang="en-US" dirty="0"/>
+          </a:p>
+        </p:txBody>
+      </p:sp>
+      <p:sp>
+        <p:nvSpPr>
+          <p:cNvPr id="3" name="Content Placeholder 2">
+            <a:extLst>
+              <a:ext uri="{FF2B5EF4-FFF2-40B4-BE49-F238E27FC236}">
+                <a16:creationId xmlns:a16="http://schemas.microsoft.com/office/drawing/2014/main" id="{BF2AF144-A1B0-B6E0-A1DC-3BC1897079BA}"/>
+              </a:ext>
+            </a:extLst>
+          </p:cNvPr>
+          <p:cNvSpPr>
+            <a:spLocks noGrp="1"/>
+          </p:cNvSpPr>
+          <p:nvPr>
+            <p:ph idx="1"/>
+          </p:nvPr>
+        </p:nvSpPr>
+        <p:spPr/>
+        <p:txBody>
+          <a:bodyPr/>
+          <a:lstStyle/>
+          <a:p>
+            <a:r>
+              <a:rPr lang="en-US" dirty="0"/>
+              <a:t>Lower Yangzi Delta (modern Shanghai, Suzhou, Nanjing, Hangzhou)</a:t>
+            </a:r>
+          </a:p>
+          <a:p>
+            <a:r>
+              <a:rPr lang="en-US" dirty="0"/>
+              <a:t>Center of Ming commercial boom and urban culture (16th–early 17th centuries)</a:t>
+            </a:r>
+          </a:p>
+          <a:p>
+            <a:r>
+              <a:rPr lang="en-US" dirty="0"/>
+              <a:t>Rapid commercialization, market towns, and wealthy merchant elite</a:t>
+            </a:r>
+          </a:p>
+          <a:p>
+            <a:r>
+              <a:rPr lang="en-US" dirty="0"/>
+              <a:t>Shift from rural agrarian focus to vibrant urban consumer society</a:t>
+            </a:r>
           </a:p>
         </p:txBody>
       </p:sp>
     </p:spTree>
     <p:extLst>
       <p:ext uri="{BB962C8B-B14F-4D97-AF65-F5344CB8AC3E}">
-        <p14:creationId xmlns:p14="http://schemas.microsoft.com/office/powerpoint/2010/main" val="3147541074"/>
+        <p14:creationId xmlns:p14="http://schemas.microsoft.com/office/powerpoint/2010/main" val="2940302298"/>
       </p:ext>
     </p:extLst>
   </p:cSld>
@@ -11795,93 +11339,293 @@
       </p:grpSpPr>
       <p:sp>
         <p:nvSpPr>
-          <p:cNvPr id="54274" name="Rectangle 2"/>
+          <p:cNvPr id="2" name="Title 1">
+            <a:extLst>
+              <a:ext uri="{FF2B5EF4-FFF2-40B4-BE49-F238E27FC236}">
+                <a16:creationId xmlns:a16="http://schemas.microsoft.com/office/drawing/2014/main" id="{A1D186DC-C639-D176-FE95-29038E9B524A}"/>
+              </a:ext>
+            </a:extLst>
+          </p:cNvPr>
+          <p:cNvSpPr>
+            <a:spLocks noGrp="1"/>
+          </p:cNvSpPr>
+          <p:nvPr>
+            <p:ph type="title"/>
+          </p:nvPr>
+        </p:nvSpPr>
+        <p:spPr/>
+        <p:txBody>
+          <a:bodyPr/>
+          <a:lstStyle/>
+          <a:p>
+            <a:r>
+              <a:rPr lang="en-US" dirty="0"/>
+              <a:t>Rise of Jiangnan Merchants</a:t>
+            </a:r>
+            <a:br>
+              <a:rPr lang="en-US" dirty="0"/>
+            </a:br>
+            <a:endParaRPr lang="en-US" dirty="0"/>
+          </a:p>
+        </p:txBody>
+      </p:sp>
+      <p:sp>
+        <p:nvSpPr>
+          <p:cNvPr id="4" name="Rectangle 1">
+            <a:extLst>
+              <a:ext uri="{FF2B5EF4-FFF2-40B4-BE49-F238E27FC236}">
+                <a16:creationId xmlns:a16="http://schemas.microsoft.com/office/drawing/2014/main" id="{AC7D67E1-B1F9-C769-660F-F6D3F6DBCD12}"/>
+              </a:ext>
+            </a:extLst>
+          </p:cNvPr>
           <p:cNvSpPr>
             <a:spLocks noGrp="1" noChangeArrowheads="1"/>
           </p:cNvSpPr>
           <p:nvPr>
-            <p:ph type="title"/>
-          </p:nvPr>
-        </p:nvSpPr>
-        <p:spPr/>
-        <p:txBody>
-          <a:bodyPr/>
-          <a:lstStyle/>
-          <a:p>
-            <a:r>
-              <a:rPr lang="en-US" dirty="0"/>
-              <a:t>Wang </a:t>
-            </a:r>
-            <a:r>
-              <a:rPr lang="en-US" dirty="0" err="1"/>
-              <a:t>Yangming</a:t>
-            </a:r>
-            <a:endParaRPr lang="en-US" dirty="0"/>
-          </a:p>
-        </p:txBody>
-      </p:sp>
-      <p:sp>
-        <p:nvSpPr>
-          <p:cNvPr id="54275" name="Rectangle 3"/>
-          <p:cNvSpPr>
-            <a:spLocks noGrp="1" noChangeArrowheads="1"/>
-          </p:cNvSpPr>
-          <p:nvPr>
             <p:ph idx="1"/>
           </p:nvPr>
         </p:nvSpPr>
-        <p:spPr/>
-        <p:txBody>
-          <a:bodyPr>
-            <a:normAutofit lnSpcReduction="10000"/>
+        <p:spPr bwMode="auto">
+          <a:xfrm>
+            <a:off x="646111" y="1680766"/>
+            <a:ext cx="10515600" cy="3323987"/>
+          </a:xfrm>
+          <a:prstGeom prst="rect">
+            <a:avLst/>
+          </a:prstGeom>
+          <a:noFill/>
+          <a:ln>
+            <a:noFill/>
+          </a:ln>
+          <a:effectLst/>
+          <a:extLst>
+            <a:ext uri="{909E8E84-426E-40DD-AFC4-6F175D3DCCD1}">
+              <a14:hiddenFill xmlns:a14="http://schemas.microsoft.com/office/drawing/2010/main">
+                <a:solidFill>
+                  <a:schemeClr val="accent1"/>
+                </a:solidFill>
+              </a14:hiddenFill>
+            </a:ext>
+            <a:ext uri="{91240B29-F687-4F45-9708-019B960494DF}">
+              <a14:hiddenLine xmlns:a14="http://schemas.microsoft.com/office/drawing/2010/main" w="9525">
+                <a:solidFill>
+                  <a:schemeClr val="tx1"/>
+                </a:solidFill>
+                <a:miter lim="800000"/>
+                <a:headEnd/>
+                <a:tailEnd/>
+              </a14:hiddenLine>
+            </a:ext>
+            <a:ext uri="{AF507438-7753-43E0-B8FC-AC1667EBCBE1}">
+              <a14:hiddenEffects xmlns:a14="http://schemas.microsoft.com/office/drawing/2010/main">
+                <a:effectLst>
+                  <a:outerShdw dist="35921" dir="2700000" algn="ctr" rotWithShape="0">
+                    <a:schemeClr val="bg2"/>
+                  </a:outerShdw>
+                </a:effectLst>
+              </a14:hiddenEffects>
+            </a:ext>
+          </a:extLst>
+        </p:spPr>
+        <p:txBody>
+          <a:bodyPr vert="horz" wrap="square" lIns="91440" tIns="45720" rIns="91440" bIns="45720" numCol="1" anchor="ctr" anchorCtr="0" compatLnSpc="1">
+            <a:prstTxWarp prst="textNoShape">
+              <a:avLst/>
+            </a:prstTxWarp>
+            <a:spAutoFit/>
           </a:bodyPr>
           <a:lstStyle/>
           <a:p>
-            <a:r>
-              <a:rPr lang="en-US" sz="3200" dirty="0"/>
-              <a:t>Son of Official; exposed to elite culture</a:t>
-            </a:r>
-          </a:p>
-          <a:p>
-            <a:r>
-              <a:rPr lang="en-US" sz="3200" dirty="0"/>
-              <a:t>Passed </a:t>
-            </a:r>
-            <a:r>
-              <a:rPr lang="en-US" sz="3200" dirty="0" err="1"/>
-              <a:t>Jinshi</a:t>
-            </a:r>
-            <a:r>
-              <a:rPr lang="en-US" sz="3200" dirty="0"/>
-              <a:t> exam on third attempt</a:t>
-            </a:r>
-          </a:p>
-          <a:p>
-            <a:r>
-              <a:rPr lang="en-US" sz="3200" dirty="0"/>
-              <a:t>Ran afoul of Eunuchs; banished to </a:t>
-            </a:r>
-            <a:r>
-              <a:rPr lang="en-US" sz="3200" dirty="0" err="1"/>
-              <a:t>Guizhou</a:t>
-            </a:r>
-            <a:endParaRPr lang="en-US" sz="3200" dirty="0"/>
-          </a:p>
-          <a:p>
-            <a:r>
-              <a:rPr lang="en-US" sz="3200" dirty="0"/>
-              <a:t>Later accepted high office in Beijing and Nanjing</a:t>
-            </a:r>
-          </a:p>
-          <a:p>
-            <a:r>
-              <a:rPr lang="en-US" sz="3200" dirty="0"/>
-              <a:t>Led military campaigns against non-Chinese tribes in Guangxi</a:t>
+            <a:pPr marL="0" marR="0" lvl="0" indent="0" algn="l" defTabSz="914400" rtl="0" eaLnBrk="0" fontAlgn="base" latinLnBrk="0" hangingPunct="0">
+              <a:lnSpc>
+                <a:spcPct val="100000"/>
+              </a:lnSpc>
+              <a:spcBef>
+                <a:spcPct val="0"/>
+              </a:spcBef>
+              <a:spcAft>
+                <a:spcPct val="0"/>
+              </a:spcAft>
+              <a:buClrTx/>
+              <a:buSzTx/>
+              <a:buFontTx/>
+              <a:buNone/>
+              <a:tabLst/>
+            </a:pPr>
+            <a:endParaRPr kumimoji="0" lang="en-US" altLang="en-US" sz="1800" b="0" i="0" u="none" strike="noStrike" cap="none" normalizeH="0" baseline="0" dirty="0">
+              <a:ln>
+                <a:noFill/>
+              </a:ln>
+              <a:solidFill>
+                <a:schemeClr val="tx1"/>
+              </a:solidFill>
+              <a:effectLst/>
+              <a:latin typeface="Arial" panose="020B0604020202020204" pitchFamily="34" charset="0"/>
+            </a:endParaRPr>
+          </a:p>
+          <a:p>
+            <a:pPr marL="0" marR="0" lvl="0" indent="0" algn="l" defTabSz="914400" rtl="0" eaLnBrk="0" fontAlgn="base" latinLnBrk="0" hangingPunct="0">
+              <a:lnSpc>
+                <a:spcPct val="100000"/>
+              </a:lnSpc>
+              <a:spcBef>
+                <a:spcPct val="0"/>
+              </a:spcBef>
+              <a:spcAft>
+                <a:spcPct val="0"/>
+              </a:spcAft>
+              <a:buClrTx/>
+              <a:buSzTx/>
+              <a:buFontTx/>
+              <a:buChar char="•"/>
+              <a:tabLst/>
+            </a:pPr>
+            <a:r>
+              <a:rPr kumimoji="0" lang="en-US" altLang="en-US" sz="2400" b="0" i="0" u="none" strike="noStrike" cap="none" normalizeH="0" baseline="0" dirty="0">
+                <a:ln>
+                  <a:noFill/>
+                </a:ln>
+                <a:solidFill>
+                  <a:schemeClr val="tx1"/>
+                </a:solidFill>
+                <a:effectLst/>
+                <a:latin typeface="Arial" panose="020B0604020202020204" pitchFamily="34" charset="0"/>
+              </a:rPr>
+              <a:t>Long-distance trade in silk, cotton, porcelain, salt, and tea created enormous merchant wealth </a:t>
+            </a:r>
+          </a:p>
+          <a:p>
+            <a:pPr marL="0" marR="0" lvl="0" indent="0" algn="l" defTabSz="914400" rtl="0" eaLnBrk="0" fontAlgn="base" latinLnBrk="0" hangingPunct="0">
+              <a:lnSpc>
+                <a:spcPct val="100000"/>
+              </a:lnSpc>
+              <a:spcBef>
+                <a:spcPct val="0"/>
+              </a:spcBef>
+              <a:spcAft>
+                <a:spcPct val="0"/>
+              </a:spcAft>
+              <a:buClrTx/>
+              <a:buSzTx/>
+              <a:buFontTx/>
+              <a:buChar char="•"/>
+              <a:tabLst/>
+            </a:pPr>
+            <a:r>
+              <a:rPr kumimoji="0" lang="en-US" altLang="en-US" sz="2400" b="0" i="0" u="none" strike="noStrike" cap="none" normalizeH="0" baseline="0" dirty="0">
+                <a:ln>
+                  <a:noFill/>
+                </a:ln>
+                <a:solidFill>
+                  <a:schemeClr val="tx1"/>
+                </a:solidFill>
+                <a:effectLst/>
+                <a:latin typeface="Arial" panose="020B0604020202020204" pitchFamily="34" charset="0"/>
+              </a:rPr>
+              <a:t>Some merchants rivaled or surpassed traditional gentry in economic power </a:t>
+            </a:r>
+          </a:p>
+          <a:p>
+            <a:pPr marL="0" marR="0" lvl="0" indent="0" algn="l" defTabSz="914400" rtl="0" eaLnBrk="0" fontAlgn="base" latinLnBrk="0" hangingPunct="0">
+              <a:lnSpc>
+                <a:spcPct val="100000"/>
+              </a:lnSpc>
+              <a:spcBef>
+                <a:spcPct val="0"/>
+              </a:spcBef>
+              <a:spcAft>
+                <a:spcPct val="0"/>
+              </a:spcAft>
+              <a:buClrTx/>
+              <a:buSzTx/>
+              <a:buFontTx/>
+              <a:buChar char="•"/>
+              <a:tabLst/>
+            </a:pPr>
+            <a:r>
+              <a:rPr kumimoji="0" lang="en-US" altLang="en-US" sz="2400" b="0" i="0" u="none" strike="noStrike" cap="none" normalizeH="0" baseline="0" dirty="0">
+                <a:ln>
+                  <a:noFill/>
+                </a:ln>
+                <a:solidFill>
+                  <a:schemeClr val="tx1"/>
+                </a:solidFill>
+                <a:effectLst/>
+                <a:latin typeface="Arial" panose="020B0604020202020204" pitchFamily="34" charset="0"/>
+              </a:rPr>
+              <a:t>Tension with Confucian social hierarchy (merchants ranked lowest of the four occupations) </a:t>
+            </a:r>
+          </a:p>
+          <a:p>
+            <a:pPr marL="0" marR="0" lvl="0" indent="0" algn="l" defTabSz="914400" rtl="0" eaLnBrk="0" fontAlgn="base" latinLnBrk="0" hangingPunct="0">
+              <a:lnSpc>
+                <a:spcPct val="100000"/>
+              </a:lnSpc>
+              <a:spcBef>
+                <a:spcPct val="0"/>
+              </a:spcBef>
+              <a:spcAft>
+                <a:spcPct val="0"/>
+              </a:spcAft>
+              <a:buClrTx/>
+              <a:buSzTx/>
+              <a:buFontTx/>
+              <a:buChar char="•"/>
+              <a:tabLst/>
+            </a:pPr>
+            <a:r>
+              <a:rPr kumimoji="0" lang="en-US" altLang="en-US" sz="2400" b="0" i="0" u="none" strike="noStrike" cap="none" normalizeH="0" baseline="0" dirty="0">
+                <a:ln>
+                  <a:noFill/>
+                </a:ln>
+                <a:solidFill>
+                  <a:schemeClr val="tx1"/>
+                </a:solidFill>
+                <a:effectLst/>
+                <a:latin typeface="Arial" panose="020B0604020202020204" pitchFamily="34" charset="0"/>
+              </a:rPr>
+              <a:t>Many merchants invested in education, arts patronage, and lavish lifestyles </a:t>
+            </a:r>
+          </a:p>
+          <a:p>
+            <a:pPr marL="0" marR="0" lvl="0" indent="0" algn="l" defTabSz="914400" rtl="0" eaLnBrk="0" fontAlgn="base" latinLnBrk="0" hangingPunct="0">
+              <a:lnSpc>
+                <a:spcPct val="100000"/>
+              </a:lnSpc>
+              <a:spcBef>
+                <a:spcPct val="0"/>
+              </a:spcBef>
+              <a:spcAft>
+                <a:spcPct val="0"/>
+              </a:spcAft>
+              <a:buClrTx/>
+              <a:buSzTx/>
+              <a:buFontTx/>
+              <a:buChar char="•"/>
+              <a:tabLst/>
+            </a:pPr>
+            <a:r>
+              <a:rPr kumimoji="0" lang="en-US" altLang="en-US" sz="2400" b="0" i="0" u="none" strike="noStrike" cap="none" normalizeH="0" baseline="0" dirty="0">
+                <a:ln>
+                  <a:noFill/>
+                </a:ln>
+                <a:solidFill>
+                  <a:schemeClr val="tx1"/>
+                </a:solidFill>
+                <a:effectLst/>
+                <a:latin typeface="Arial" panose="020B0604020202020204" pitchFamily="34" charset="0"/>
+              </a:rPr>
+              <a:t>Rise of a distinctive “merchant culture” that challenged scholar-official ideals </a:t>
             </a:r>
           </a:p>
         </p:txBody>
       </p:sp>
     </p:spTree>
+    <p:extLst>
+      <p:ext uri="{BB962C8B-B14F-4D97-AF65-F5344CB8AC3E}">
+        <p14:creationId xmlns:p14="http://schemas.microsoft.com/office/powerpoint/2010/main" val="2506547713"/>
+      </p:ext>
+    </p:extLst>
   </p:cSld>
   <p:clrMapOvr>
     <a:masterClrMapping/>
@@ -12023,7 +11767,13 @@
       </p:grpSpPr>
       <p:sp>
         <p:nvSpPr>
-          <p:cNvPr id="2" name="Title 1"/>
+          <p:cNvPr id="2" name="Title 1">
+            <a:extLst>
+              <a:ext uri="{FF2B5EF4-FFF2-40B4-BE49-F238E27FC236}">
+                <a16:creationId xmlns:a16="http://schemas.microsoft.com/office/drawing/2014/main" id="{892812E6-60BE-5F76-3DE5-CDDFC3438A1A}"/>
+              </a:ext>
+            </a:extLst>
+          </p:cNvPr>
           <p:cNvSpPr>
             <a:spLocks noGrp="1"/>
           </p:cNvSpPr>
@@ -12037,69 +11787,92 @@
           <a:lstStyle/>
           <a:p>
             <a:r>
+              <a:rPr lang="en-US" dirty="0"/>
+              <a:t>Boom in Vernacular Literature</a:t>
+            </a:r>
+          </a:p>
+        </p:txBody>
+      </p:sp>
+      <p:sp>
+        <p:nvSpPr>
+          <p:cNvPr id="3" name="Content Placeholder 2">
+            <a:extLst>
+              <a:ext uri="{FF2B5EF4-FFF2-40B4-BE49-F238E27FC236}">
+                <a16:creationId xmlns:a16="http://schemas.microsoft.com/office/drawing/2014/main" id="{7666E8B4-CEE8-21F3-BEF4-889DE8E5CB17}"/>
+              </a:ext>
+            </a:extLst>
+          </p:cNvPr>
+          <p:cNvSpPr>
+            <a:spLocks noGrp="1"/>
+          </p:cNvSpPr>
+          <p:nvPr>
+            <p:ph idx="1"/>
+          </p:nvPr>
+        </p:nvSpPr>
+        <p:spPr/>
+        <p:txBody>
+          <a:bodyPr>
+            <a:normAutofit lnSpcReduction="10000"/>
+          </a:bodyPr>
+          <a:lstStyle/>
+          <a:p>
+            <a:r>
+              <a:rPr lang="en-US" dirty="0"/>
+              <a:t>Popular literature written in colloquial </a:t>
+            </a:r>
+            <a:r>
               <a:rPr lang="en-US" dirty="0" err="1"/>
-              <a:t>Xinxue</a:t>
-            </a:r>
-            <a:r>
-              <a:rPr lang="en-US" dirty="0"/>
-              <a:t> (School of Mind/Heart)</a:t>
-            </a:r>
-          </a:p>
-        </p:txBody>
-      </p:sp>
-      <p:sp>
-        <p:nvSpPr>
-          <p:cNvPr id="3" name="Content Placeholder 2"/>
-          <p:cNvSpPr>
-            <a:spLocks noGrp="1"/>
-          </p:cNvSpPr>
-          <p:nvPr>
-            <p:ph idx="1"/>
-          </p:nvPr>
-        </p:nvSpPr>
-        <p:spPr/>
-        <p:txBody>
-          <a:bodyPr>
-            <a:normAutofit/>
-          </a:bodyPr>
-          <a:lstStyle/>
-          <a:p>
-            <a:r>
-              <a:rPr lang="en-US" sz="3200" dirty="0"/>
-              <a:t>Challenge to Zhu Xi Orthodoxy</a:t>
+              <a:t>baihua</a:t>
+            </a:r>
+            <a:r>
+              <a:rPr lang="en-US" dirty="0"/>
+              <a:t> (everyday spoken language) instead of classical Chinese</a:t>
+            </a:r>
+          </a:p>
+          <a:p>
+            <a:r>
+              <a:rPr lang="en-US" dirty="0"/>
+              <a:t>Four great Ming novels:</a:t>
             </a:r>
           </a:p>
           <a:p>
             <a:pPr lvl="1"/>
             <a:r>
-              <a:rPr lang="en-US" sz="3200" dirty="0"/>
-              <a:t>Extension of Knowledge by intuitive mind</a:t>
-            </a:r>
-          </a:p>
-          <a:p>
-            <a:r>
-              <a:rPr lang="en-US" sz="3200" dirty="0"/>
-              <a:t>Wang argues knowledge comes from within</a:t>
-            </a:r>
-          </a:p>
-          <a:p>
-            <a:r>
-              <a:rPr lang="en-US" sz="3200" dirty="0"/>
-              <a:t>Unification of Knowledge and Action</a:t>
-            </a:r>
-          </a:p>
-          <a:p>
-            <a:r>
-              <a:rPr lang="en-US" sz="3200" dirty="0"/>
-              <a:t>Pursue </a:t>
-            </a:r>
-            <a:r>
-              <a:rPr lang="en-US" sz="3200" dirty="0" err="1"/>
-              <a:t>sagehood</a:t>
-            </a:r>
-            <a:r>
-              <a:rPr lang="en-US" sz="3200" dirty="0"/>
-              <a:t> in the midst of everyday life </a:t>
+              <a:rPr lang="en-US" dirty="0"/>
+              <a:t>Romance of the Three Kingdoms</a:t>
+            </a:r>
+          </a:p>
+          <a:p>
+            <a:pPr lvl="1"/>
+            <a:r>
+              <a:rPr lang="en-US" dirty="0"/>
+              <a:t>Water Margin (Outlaws of the Marsh)</a:t>
+            </a:r>
+          </a:p>
+          <a:p>
+            <a:pPr lvl="1"/>
+            <a:r>
+              <a:rPr lang="en-US" dirty="0"/>
+              <a:t>Journey to the West</a:t>
+            </a:r>
+          </a:p>
+          <a:p>
+            <a:pPr lvl="1"/>
+            <a:r>
+              <a:rPr lang="en-US" dirty="0"/>
+              <a:t>Plum in the Golden Vase (Jin Ping Mei)</a:t>
+            </a:r>
+          </a:p>
+          <a:p>
+            <a:r>
+              <a:rPr lang="en-US" dirty="0"/>
+              <a:t>Drama flourished: most famous example is The Peony Pavilion by Tang Xianzu (1598) – story of love, dreams, and female agency</a:t>
+            </a:r>
+          </a:p>
+          <a:p>
+            <a:r>
+              <a:rPr lang="en-US" dirty="0"/>
+              <a:t>Reflected urban tastes, romance, adventure, satire, and social criticism</a:t>
             </a:r>
           </a:p>
         </p:txBody>
@@ -12107,7 +11880,7 @@
     </p:spTree>
     <p:extLst>
       <p:ext uri="{BB962C8B-B14F-4D97-AF65-F5344CB8AC3E}">
-        <p14:creationId xmlns:p14="http://schemas.microsoft.com/office/powerpoint/2010/main" val="152965521"/>
+        <p14:creationId xmlns:p14="http://schemas.microsoft.com/office/powerpoint/2010/main" val="731135128"/>
       </p:ext>
     </p:extLst>
   </p:cSld>
@@ -12136,7 +11909,13 @@
       </p:grpSpPr>
       <p:sp>
         <p:nvSpPr>
-          <p:cNvPr id="4" name="Title 3"/>
+          <p:cNvPr id="2" name="Title 1">
+            <a:extLst>
+              <a:ext uri="{FF2B5EF4-FFF2-40B4-BE49-F238E27FC236}">
+                <a16:creationId xmlns:a16="http://schemas.microsoft.com/office/drawing/2014/main" id="{9FD6D353-D632-9B57-ED91-7858D954A466}"/>
+              </a:ext>
+            </a:extLst>
+          </p:cNvPr>
           <p:cNvSpPr>
             <a:spLocks noGrp="1"/>
           </p:cNvSpPr>
@@ -12151,42 +11930,87 @@
           <a:p>
             <a:r>
               <a:rPr lang="en-US" dirty="0"/>
-              <a:t>Late </a:t>
+              <a:t>Women’s Roles in Ming Society</a:t>
+            </a:r>
+            <a:br>
+              <a:rPr lang="en-US" dirty="0"/>
+            </a:br>
+            <a:endParaRPr lang="en-US" dirty="0"/>
+          </a:p>
+        </p:txBody>
+      </p:sp>
+      <p:sp>
+        <p:nvSpPr>
+          <p:cNvPr id="3" name="Content Placeholder 2">
+            <a:extLst>
+              <a:ext uri="{FF2B5EF4-FFF2-40B4-BE49-F238E27FC236}">
+                <a16:creationId xmlns:a16="http://schemas.microsoft.com/office/drawing/2014/main" id="{1D177330-EB40-CC02-6BE2-070D5AA5DFCA}"/>
+              </a:ext>
+            </a:extLst>
+          </p:cNvPr>
+          <p:cNvSpPr>
+            <a:spLocks noGrp="1"/>
+          </p:cNvSpPr>
+          <p:nvPr>
+            <p:ph idx="1"/>
+          </p:nvPr>
+        </p:nvSpPr>
+        <p:spPr/>
+        <p:txBody>
+          <a:bodyPr/>
+          <a:lstStyle/>
+          <a:p>
+            <a:r>
+              <a:rPr lang="en-US" dirty="0"/>
+              <a:t>Increased literacy and cultural participation among elite women in Jiangnan</a:t>
+            </a:r>
+          </a:p>
+          <a:p>
+            <a:r>
+              <a:rPr lang="en-US" dirty="0"/>
+              <a:t>Some women published poetry collections and gained literary recognition</a:t>
+            </a:r>
+          </a:p>
+          <a:p>
+            <a:r>
+              <a:rPr lang="en-US" dirty="0"/>
+              <a:t>Biography highlight: Tan </a:t>
             </a:r>
             <a:r>
               <a:rPr lang="en-US" dirty="0" err="1"/>
-              <a:t>ming</a:t>
-            </a:r>
-            <a:r>
-              <a:rPr lang="en-US" dirty="0"/>
-              <a:t> Government</a:t>
-            </a:r>
-          </a:p>
-        </p:txBody>
-      </p:sp>
-      <p:sp>
-        <p:nvSpPr>
-          <p:cNvPr id="5" name="Text Placeholder 4"/>
-          <p:cNvSpPr>
-            <a:spLocks noGrp="1"/>
-          </p:cNvSpPr>
-          <p:nvPr>
-            <p:ph type="body" idx="1"/>
-          </p:nvPr>
-        </p:nvSpPr>
-        <p:spPr/>
-        <p:txBody>
-          <a:bodyPr/>
-          <a:lstStyle/>
-          <a:p>
-            <a:endParaRPr lang="en-US"/>
+              <a:t>Yunxian</a:t>
+            </a:r>
+            <a:r>
+              <a:rPr lang="en-US" dirty="0"/>
+              <a:t> (15th–16th c.), female physician who treated women’s illnesses</a:t>
+            </a:r>
+          </a:p>
+          <a:p>
+            <a:r>
+              <a:rPr lang="en-US" dirty="0"/>
+              <a:t>Persistent Confucian expectations: </a:t>
+            </a:r>
+            <a:r>
+              <a:rPr lang="en-US" dirty="0" err="1"/>
+              <a:t>footbinding</a:t>
+            </a:r>
+            <a:r>
+              <a:rPr lang="en-US" dirty="0"/>
+              <a:t> became more widespread; emphasis on chastity and widow fidelity</a:t>
+            </a:r>
+          </a:p>
+          <a:p>
+            <a:r>
+              <a:rPr lang="en-US" dirty="0"/>
+              <a:t>Vibrant urban courtesan culture in Jiangnan cities</a:t>
+            </a:r>
           </a:p>
         </p:txBody>
       </p:sp>
     </p:spTree>
     <p:extLst>
       <p:ext uri="{BB962C8B-B14F-4D97-AF65-F5344CB8AC3E}">
-        <p14:creationId xmlns:p14="http://schemas.microsoft.com/office/powerpoint/2010/main" val="1049256810"/>
+        <p14:creationId xmlns:p14="http://schemas.microsoft.com/office/powerpoint/2010/main" val="3949666251"/>
       </p:ext>
     </p:extLst>
   </p:cSld>
@@ -12215,9 +12039,15 @@
       </p:grpSpPr>
       <p:sp>
         <p:nvSpPr>
-          <p:cNvPr id="55298" name="Rectangle 2"/>
-          <p:cNvSpPr>
-            <a:spLocks noGrp="1" noChangeArrowheads="1"/>
+          <p:cNvPr id="2" name="Title 1">
+            <a:extLst>
+              <a:ext uri="{FF2B5EF4-FFF2-40B4-BE49-F238E27FC236}">
+                <a16:creationId xmlns:a16="http://schemas.microsoft.com/office/drawing/2014/main" id="{A5326D7C-C433-5EE4-1938-9261FF1B6C74}"/>
+              </a:ext>
+            </a:extLst>
+          </p:cNvPr>
+          <p:cNvSpPr>
+            <a:spLocks noGrp="1"/>
           </p:cNvSpPr>
           <p:nvPr>
             <p:ph type="title"/>
@@ -12225,92 +12055,74 @@
         </p:nvSpPr>
         <p:spPr/>
         <p:txBody>
-          <a:bodyPr>
-            <a:normAutofit/>
-          </a:bodyPr>
-          <a:lstStyle/>
-          <a:p>
-            <a:r>
-              <a:rPr lang="en-US" sz="4000"/>
-              <a:t>Late Ming Government </a:t>
-            </a:r>
-            <a:br>
-              <a:rPr lang="en-US" sz="4000"/>
-            </a:br>
-            <a:r>
-              <a:rPr lang="en-US" sz="4000"/>
-              <a:t>(1590-1644)</a:t>
-            </a:r>
-          </a:p>
-        </p:txBody>
-      </p:sp>
-      <p:sp>
-        <p:nvSpPr>
-          <p:cNvPr id="55299" name="Rectangle 3"/>
-          <p:cNvSpPr>
-            <a:spLocks noGrp="1" noChangeArrowheads="1"/>
+          <a:bodyPr/>
+          <a:lstStyle/>
+          <a:p>
+            <a:r>
+              <a:rPr lang="en-US" dirty="0"/>
+              <a:t>Suzhou Gardens</a:t>
+            </a:r>
+          </a:p>
+        </p:txBody>
+      </p:sp>
+      <p:sp>
+        <p:nvSpPr>
+          <p:cNvPr id="3" name="Content Placeholder 2">
+            <a:extLst>
+              <a:ext uri="{FF2B5EF4-FFF2-40B4-BE49-F238E27FC236}">
+                <a16:creationId xmlns:a16="http://schemas.microsoft.com/office/drawing/2014/main" id="{85CCBF3D-7356-83D4-C28C-D546DEEC36DE}"/>
+              </a:ext>
+            </a:extLst>
+          </p:cNvPr>
+          <p:cNvSpPr>
+            <a:spLocks noGrp="1"/>
           </p:cNvSpPr>
           <p:nvPr>
             <p:ph idx="1"/>
           </p:nvPr>
         </p:nvSpPr>
-        <p:spPr>
-          <a:xfrm>
-            <a:off x="2209800" y="1657350"/>
-            <a:ext cx="7772400" cy="4667250"/>
-          </a:xfrm>
-        </p:spPr>
-        <p:txBody>
-          <a:bodyPr>
-            <a:normAutofit/>
-          </a:bodyPr>
-          <a:lstStyle/>
-          <a:p>
-            <a:r>
-              <a:rPr lang="en-US" sz="3600" dirty="0"/>
-              <a:t>Incompetent Emperors</a:t>
-            </a:r>
-          </a:p>
-          <a:p>
-            <a:r>
-              <a:rPr lang="en-US" sz="3600" dirty="0"/>
-              <a:t>Eunuch Influence and Power</a:t>
-            </a:r>
-          </a:p>
-          <a:p>
-            <a:r>
-              <a:rPr lang="en-US" sz="3600" dirty="0" err="1"/>
-              <a:t>Donglin</a:t>
-            </a:r>
-            <a:r>
-              <a:rPr lang="en-US" sz="3600" dirty="0"/>
-              <a:t> Academy </a:t>
-            </a:r>
-          </a:p>
-          <a:p>
-            <a:r>
-              <a:rPr lang="en-US" sz="3600" dirty="0" err="1"/>
-              <a:t>Hideyoshi</a:t>
-            </a:r>
-            <a:r>
-              <a:rPr lang="en-US" sz="3600" dirty="0"/>
-              <a:t> Invasions of Korea</a:t>
-            </a:r>
-          </a:p>
-          <a:p>
-            <a:r>
-              <a:rPr lang="en-US" sz="3600" dirty="0"/>
-              <a:t>Rise of Manchus – </a:t>
-            </a:r>
-            <a:r>
-              <a:rPr lang="en-US" sz="3600" dirty="0" err="1"/>
-              <a:t>Nurgaci</a:t>
-            </a:r>
-            <a:endParaRPr lang="en-US" sz="3600" dirty="0"/>
+        <p:spPr/>
+        <p:txBody>
+          <a:bodyPr/>
+          <a:lstStyle/>
+          <a:p>
+            <a:r>
+              <a:rPr lang="en-US" dirty="0"/>
+              <a:t>Private gardens built by wealthy gentry and merchants in Suzhou</a:t>
+            </a:r>
+          </a:p>
+          <a:p>
+            <a:r>
+              <a:rPr lang="en-US" dirty="0"/>
+              <a:t>Masterpieces of landscape architecture blending nature, rocks, water, pavilions, and plants</a:t>
+            </a:r>
+          </a:p>
+          <a:p>
+            <a:r>
+              <a:rPr lang="en-US" dirty="0"/>
+              <a:t>Symbol of refined taste, social status, and escape from official life</a:t>
+            </a:r>
+          </a:p>
+          <a:p>
+            <a:r>
+              <a:rPr lang="en-US" dirty="0"/>
+              <a:t>Represented the fusion of merchant wealth and literati aesthetics</a:t>
+            </a:r>
+          </a:p>
+          <a:p>
+            <a:r>
+              <a:rPr lang="en-US" dirty="0"/>
+              <a:t>Many famous examples survive today (e.g., Humble Administrator’s Garden, Lingering Garden)</a:t>
+            </a:r>
           </a:p>
         </p:txBody>
       </p:sp>
     </p:spTree>
+    <p:extLst>
+      <p:ext uri="{BB962C8B-B14F-4D97-AF65-F5344CB8AC3E}">
+        <p14:creationId xmlns:p14="http://schemas.microsoft.com/office/powerpoint/2010/main" val="3890030347"/>
+      </p:ext>
+    </p:extLst>
   </p:cSld>
   <p:clrMapOvr>
     <a:masterClrMapping/>
@@ -12337,9 +12149,9 @@
       </p:grpSpPr>
       <p:sp>
         <p:nvSpPr>
-          <p:cNvPr id="56322" name="Rectangle 2"/>
-          <p:cNvSpPr>
-            <a:spLocks noGrp="1" noChangeArrowheads="1"/>
+          <p:cNvPr id="4" name="Title 3"/>
+          <p:cNvSpPr>
+            <a:spLocks noGrp="1"/>
           </p:cNvSpPr>
           <p:nvPr>
             <p:ph type="title"/>
@@ -12351,92 +12163,37 @@
           <a:lstStyle/>
           <a:p>
             <a:r>
-              <a:rPr lang="en-US"/>
-              <a:t>Incompetent Emperors</a:t>
-            </a:r>
-          </a:p>
-        </p:txBody>
-      </p:sp>
-      <p:sp>
-        <p:nvSpPr>
-          <p:cNvPr id="56323" name="Rectangle 3"/>
-          <p:cNvSpPr>
-            <a:spLocks noGrp="1" noChangeArrowheads="1"/>
-          </p:cNvSpPr>
-          <p:nvPr>
-            <p:ph idx="1"/>
-          </p:nvPr>
-        </p:nvSpPr>
-        <p:spPr/>
-        <p:txBody>
-          <a:bodyPr/>
-          <a:lstStyle/>
-          <a:p>
-            <a:r>
-              <a:rPr lang="en-US" dirty="0" err="1"/>
-              <a:t>Shenzong</a:t>
-            </a:r>
-            <a:r>
-              <a:rPr lang="en-US" dirty="0"/>
-              <a:t> (</a:t>
-            </a:r>
-            <a:r>
-              <a:rPr lang="en-US" dirty="0" err="1"/>
-              <a:t>Wanli</a:t>
-            </a:r>
-            <a:r>
-              <a:rPr lang="en-US" dirty="0"/>
-              <a:t>)</a:t>
-            </a:r>
-          </a:p>
-          <a:p>
-            <a:pPr lvl="1"/>
-            <a:r>
-              <a:rPr lang="en-US" dirty="0"/>
-              <a:t>Abandoned public life; 25 years without holding audience</a:t>
-            </a:r>
-          </a:p>
-          <a:p>
-            <a:pPr lvl="1"/>
-            <a:r>
-              <a:rPr lang="en-US" dirty="0"/>
-              <a:t>Government business left undone; offices unstaffed</a:t>
-            </a:r>
-          </a:p>
-          <a:p>
-            <a:r>
-              <a:rPr lang="en-US" dirty="0" err="1"/>
-              <a:t>Xizong</a:t>
-            </a:r>
-            <a:r>
-              <a:rPr lang="en-US" dirty="0"/>
-              <a:t> (</a:t>
-            </a:r>
-            <a:r>
-              <a:rPr lang="en-US" dirty="0" err="1"/>
-              <a:t>Tainqi</a:t>
-            </a:r>
-            <a:r>
-              <a:rPr lang="en-US" dirty="0"/>
-              <a:t>)</a:t>
-            </a:r>
-          </a:p>
-          <a:p>
-            <a:pPr lvl="1"/>
-            <a:r>
-              <a:rPr lang="en-US" dirty="0"/>
-              <a:t>Illiterate carpenter</a:t>
-            </a:r>
-          </a:p>
-          <a:p>
-            <a:r>
-              <a:rPr lang="en-US" dirty="0"/>
-              <a:t>Factionalism flourished; eunuchs gain power</a:t>
-            </a:r>
+              <a:rPr lang="en-US" dirty="0"/>
+              <a:t>Challenge to Confucian Orthodoxy</a:t>
+            </a:r>
+          </a:p>
+        </p:txBody>
+      </p:sp>
+      <p:sp>
+        <p:nvSpPr>
+          <p:cNvPr id="5" name="Text Placeholder 4"/>
+          <p:cNvSpPr>
+            <a:spLocks noGrp="1"/>
+          </p:cNvSpPr>
+          <p:nvPr>
+            <p:ph type="body" idx="1"/>
+          </p:nvPr>
+        </p:nvSpPr>
+        <p:spPr/>
+        <p:txBody>
+          <a:bodyPr/>
+          <a:lstStyle/>
+          <a:p>
+            <a:endParaRPr lang="en-US" dirty="0"/>
           </a:p>
         </p:txBody>
       </p:sp>
     </p:spTree>
+    <p:extLst>
+      <p:ext uri="{BB962C8B-B14F-4D97-AF65-F5344CB8AC3E}">
+        <p14:creationId xmlns:p14="http://schemas.microsoft.com/office/powerpoint/2010/main" val="3147541074"/>
+      </p:ext>
+    </p:extLst>
   </p:cSld>
   <p:clrMapOvr>
     <a:masterClrMapping/>
@@ -12463,7 +12220,7 @@
       </p:grpSpPr>
       <p:sp>
         <p:nvSpPr>
-          <p:cNvPr id="62466" name="Rectangle 2"/>
+          <p:cNvPr id="54274" name="Rectangle 2"/>
           <p:cNvSpPr>
             <a:spLocks noGrp="1" noChangeArrowheads="1"/>
           </p:cNvSpPr>
@@ -12477,15 +12234,20 @@
           <a:lstStyle/>
           <a:p>
             <a:r>
-              <a:rPr lang="en-US"/>
-              <a:t>Donglin Academy</a:t>
-            </a:r>
-          </a:p>
-        </p:txBody>
-      </p:sp>
-      <p:sp>
-        <p:nvSpPr>
-          <p:cNvPr id="62467" name="Rectangle 3"/>
+              <a:rPr lang="en-US" dirty="0"/>
+              <a:t>Wang </a:t>
+            </a:r>
+            <a:r>
+              <a:rPr lang="en-US" dirty="0" err="1"/>
+              <a:t>Yangming</a:t>
+            </a:r>
+            <a:endParaRPr lang="en-US" dirty="0"/>
+          </a:p>
+        </p:txBody>
+      </p:sp>
+      <p:sp>
+        <p:nvSpPr>
+          <p:cNvPr id="54275" name="Rectangle 3"/>
           <p:cNvSpPr>
             <a:spLocks noGrp="1" noChangeArrowheads="1"/>
           </p:cNvSpPr>
@@ -12495,30 +12257,51 @@
         </p:nvSpPr>
         <p:spPr/>
         <p:txBody>
-          <a:bodyPr/>
-          <a:lstStyle/>
-          <a:p>
-            <a:r>
-              <a:rPr lang="en-US"/>
-              <a:t>Founded in 1604</a:t>
-            </a:r>
-          </a:p>
-          <a:p>
-            <a:r>
-              <a:rPr lang="en-US"/>
-              <a:t>Confucian saw their duty to protest against political abuse and un-Confucian behavior</a:t>
-            </a:r>
-          </a:p>
-          <a:p>
-            <a:r>
-              <a:rPr lang="en-US"/>
-              <a:t>Center for “pure-criticism”</a:t>
-            </a:r>
-          </a:p>
-          <a:p>
-            <a:r>
-              <a:rPr lang="en-US"/>
-              <a:t>Contributed to factionalism of Late Ming</a:t>
+          <a:bodyPr>
+            <a:normAutofit lnSpcReduction="10000"/>
+          </a:bodyPr>
+          <a:lstStyle/>
+          <a:p>
+            <a:r>
+              <a:rPr lang="en-US" sz="3200" dirty="0"/>
+              <a:t>Son of Official; exposed to elite culture</a:t>
+            </a:r>
+          </a:p>
+          <a:p>
+            <a:r>
+              <a:rPr lang="en-US" sz="3200" dirty="0"/>
+              <a:t>Passed </a:t>
+            </a:r>
+            <a:r>
+              <a:rPr lang="en-US" sz="3200" dirty="0" err="1"/>
+              <a:t>Jinshi</a:t>
+            </a:r>
+            <a:r>
+              <a:rPr lang="en-US" sz="3200" dirty="0"/>
+              <a:t> exam on third attempt</a:t>
+            </a:r>
+          </a:p>
+          <a:p>
+            <a:r>
+              <a:rPr lang="en-US" sz="3200" dirty="0"/>
+              <a:t>Ran afoul of Eunuchs; banished to </a:t>
+            </a:r>
+            <a:r>
+              <a:rPr lang="en-US" sz="3200" dirty="0" err="1"/>
+              <a:t>Guizhou</a:t>
+            </a:r>
+            <a:endParaRPr lang="en-US" sz="3200" dirty="0"/>
+          </a:p>
+          <a:p>
+            <a:r>
+              <a:rPr lang="en-US" sz="3200" dirty="0"/>
+              <a:t>Later accepted high office in Beijing and Nanjing</a:t>
+            </a:r>
+          </a:p>
+          <a:p>
+            <a:r>
+              <a:rPr lang="en-US" sz="3200" dirty="0"/>
+              <a:t>Led military campaigns against non-Chinese tribes in Guangxi</a:t>
             </a:r>
           </a:p>
         </p:txBody>
@@ -12564,8 +12347,12 @@
           <a:lstStyle/>
           <a:p>
             <a:r>
-              <a:rPr lang="en-US" dirty="0"/>
-              <a:t>Eunuchs in the Ming Dynasty</a:t>
+              <a:rPr lang="en-US" dirty="0" err="1"/>
+              <a:t>Xinxue</a:t>
+            </a:r>
+            <a:r>
+              <a:rPr lang="en-US" dirty="0"/>
+              <a:t> (School of Mind/Heart)</a:t>
             </a:r>
           </a:p>
         </p:txBody>
@@ -12588,80 +12375,49 @@
           <a:lstStyle/>
           <a:p>
             <a:r>
-              <a:rPr lang="en-US" dirty="0"/>
-              <a:t>Two paths to power and influence</a:t>
-            </a:r>
-          </a:p>
-          <a:p>
-            <a:r>
-              <a:rPr lang="en-US" dirty="0"/>
-              <a:t>Demand and Supply</a:t>
-            </a:r>
-          </a:p>
-          <a:p>
-            <a:r>
-              <a:rPr lang="en-US" dirty="0"/>
-              <a:t>Institutionalization of Eunuchs</a:t>
+              <a:rPr lang="en-US" sz="3200" dirty="0"/>
+              <a:t>Challenge to Zhu Xi Orthodoxy</a:t>
             </a:r>
           </a:p>
           <a:p>
             <a:pPr lvl="1"/>
             <a:r>
-              <a:rPr lang="en-US" dirty="0"/>
-              <a:t>Military</a:t>
-            </a:r>
-          </a:p>
-          <a:p>
-            <a:pPr lvl="1"/>
-            <a:r>
-              <a:rPr lang="en-US" dirty="0"/>
-              <a:t>Intelligence</a:t>
-            </a:r>
-          </a:p>
-          <a:p>
-            <a:pPr lvl="1"/>
-            <a:r>
-              <a:rPr lang="en-US" dirty="0"/>
-              <a:t>Diplomacy</a:t>
-            </a:r>
-          </a:p>
-          <a:p>
-            <a:r>
-              <a:rPr lang="en-US" dirty="0"/>
-              <a:t>Estimated 1 million eunuchs over 250 years of Ming Dynasty</a:t>
-            </a:r>
-          </a:p>
-          <a:p>
-            <a:pPr lvl="1"/>
-            <a:r>
-              <a:rPr lang="en-US" dirty="0"/>
-              <a:t>Between 20,000 – 80,000 at any one time</a:t>
-            </a:r>
-          </a:p>
-          <a:p>
-            <a:r>
-              <a:rPr lang="en-US" dirty="0"/>
-              <a:t>Traditional Confucian Accounts vs. Modern Interpretation</a:t>
-            </a:r>
-          </a:p>
-          <a:p>
-            <a:pPr lvl="1"/>
-            <a:r>
-              <a:rPr lang="en-US" dirty="0"/>
-              <a:t>Wei </a:t>
-            </a:r>
-            <a:r>
-              <a:rPr lang="en-US" dirty="0" err="1"/>
-              <a:t>Zhongxian</a:t>
-            </a:r>
-            <a:endParaRPr lang="en-US" dirty="0"/>
+              <a:rPr lang="en-US" sz="3200" dirty="0"/>
+              <a:t>Extension of Knowledge by intuitive mind</a:t>
+            </a:r>
+          </a:p>
+          <a:p>
+            <a:r>
+              <a:rPr lang="en-US" sz="3200" dirty="0"/>
+              <a:t>Wang argues knowledge comes from within</a:t>
+            </a:r>
+          </a:p>
+          <a:p>
+            <a:r>
+              <a:rPr lang="en-US" sz="3200" dirty="0"/>
+              <a:t>Unification of Knowledge and Action</a:t>
+            </a:r>
+          </a:p>
+          <a:p>
+            <a:r>
+              <a:rPr lang="en-US" sz="3200" dirty="0"/>
+              <a:t>Pursue </a:t>
+            </a:r>
+            <a:r>
+              <a:rPr lang="en-US" sz="3200" dirty="0" err="1"/>
+              <a:t>sagehood</a:t>
+            </a:r>
+            <a:r>
+              <a:rPr lang="en-US" sz="3200" dirty="0"/>
+              <a:t> in the midst of everyday life </a:t>
+            </a:r>
           </a:p>
         </p:txBody>
       </p:sp>
     </p:spTree>
     <p:extLst>
       <p:ext uri="{BB962C8B-B14F-4D97-AF65-F5344CB8AC3E}">
-        <p14:creationId xmlns:p14="http://schemas.microsoft.com/office/powerpoint/2010/main" val="2191714699"/>
+        <p14:creationId xmlns:p14="http://schemas.microsoft.com/office/powerpoint/2010/main" val="152965521"/>
       </p:ext>
     </p:extLst>
   </p:cSld>
@@ -12690,7 +12446,7 @@
       </p:grpSpPr>
       <p:sp>
         <p:nvSpPr>
-          <p:cNvPr id="2" name="Title 1"/>
+          <p:cNvPr id="4" name="Title 3"/>
           <p:cNvSpPr>
             <a:spLocks noGrp="1"/>
           </p:cNvSpPr>
@@ -12705,110 +12461,42 @@
           <a:p>
             <a:r>
               <a:rPr lang="en-US" dirty="0"/>
-              <a:t>Eunuchs in the Ming Dynasty</a:t>
-            </a:r>
-          </a:p>
-        </p:txBody>
-      </p:sp>
-      <p:sp>
-        <p:nvSpPr>
-          <p:cNvPr id="3" name="Content Placeholder 2"/>
-          <p:cNvSpPr>
-            <a:spLocks noGrp="1"/>
-          </p:cNvSpPr>
-          <p:nvPr>
-            <p:ph idx="1"/>
-          </p:nvPr>
-        </p:nvSpPr>
-        <p:spPr/>
-        <p:txBody>
-          <a:bodyPr>
-            <a:normAutofit fontScale="92500" lnSpcReduction="10000"/>
-          </a:bodyPr>
-          <a:lstStyle/>
-          <a:p>
-            <a:r>
-              <a:rPr lang="en-US" dirty="0"/>
-              <a:t>Two paths to power and influence</a:t>
-            </a:r>
-          </a:p>
-          <a:p>
-            <a:r>
-              <a:rPr lang="en-US" dirty="0"/>
-              <a:t>Demand and Supply</a:t>
-            </a:r>
-          </a:p>
-          <a:p>
-            <a:r>
-              <a:rPr lang="en-US" dirty="0"/>
-              <a:t>Institutionalization of Eunuchs</a:t>
-            </a:r>
-          </a:p>
-          <a:p>
-            <a:pPr lvl="1"/>
-            <a:r>
-              <a:rPr lang="en-US" dirty="0"/>
-              <a:t>Dual nature of Ming Dynastic Government</a:t>
-            </a:r>
-          </a:p>
-          <a:p>
-            <a:pPr lvl="1"/>
-            <a:r>
-              <a:rPr lang="en-US" dirty="0"/>
-              <a:t>Military</a:t>
-            </a:r>
-          </a:p>
-          <a:p>
-            <a:pPr lvl="1"/>
-            <a:r>
-              <a:rPr lang="en-US" dirty="0"/>
-              <a:t>Intelligence</a:t>
-            </a:r>
-          </a:p>
-          <a:p>
-            <a:pPr lvl="1"/>
-            <a:r>
-              <a:rPr lang="en-US" dirty="0"/>
-              <a:t>Diplomacy</a:t>
-            </a:r>
-          </a:p>
-          <a:p>
-            <a:r>
-              <a:rPr lang="en-US" dirty="0"/>
-              <a:t>Estimated 1 million eunuchs over 250 years of Ming Dynasty</a:t>
-            </a:r>
-          </a:p>
-          <a:p>
-            <a:pPr lvl="1"/>
-            <a:r>
-              <a:rPr lang="en-US" dirty="0"/>
-              <a:t>Between 20,000 – 80,000 at any one time</a:t>
-            </a:r>
-          </a:p>
-          <a:p>
-            <a:r>
-              <a:rPr lang="en-US" dirty="0"/>
-              <a:t>Traditional Confucian Accounts vs. Modern Interpretation</a:t>
-            </a:r>
-          </a:p>
-          <a:p>
-            <a:pPr lvl="1"/>
-            <a:r>
-              <a:rPr lang="en-US" dirty="0"/>
-              <a:t>Wei </a:t>
+              <a:t>Late </a:t>
             </a:r>
             <a:r>
               <a:rPr lang="en-US" dirty="0" err="1"/>
-              <a:t>Zhongxian</a:t>
-            </a:r>
-            <a:endParaRPr lang="en-US" dirty="0"/>
+              <a:t>ming</a:t>
+            </a:r>
+            <a:r>
+              <a:rPr lang="en-US" dirty="0"/>
+              <a:t> Government</a:t>
+            </a:r>
+          </a:p>
+        </p:txBody>
+      </p:sp>
+      <p:sp>
+        <p:nvSpPr>
+          <p:cNvPr id="5" name="Text Placeholder 4"/>
+          <p:cNvSpPr>
+            <a:spLocks noGrp="1"/>
+          </p:cNvSpPr>
+          <p:nvPr>
+            <p:ph type="body" idx="1"/>
+          </p:nvPr>
+        </p:nvSpPr>
+        <p:spPr/>
+        <p:txBody>
+          <a:bodyPr/>
+          <a:lstStyle/>
+          <a:p>
+            <a:endParaRPr lang="en-US"/>
           </a:p>
         </p:txBody>
       </p:sp>
     </p:spTree>
     <p:extLst>
       <p:ext uri="{BB962C8B-B14F-4D97-AF65-F5344CB8AC3E}">
-        <p14:creationId xmlns:p14="http://schemas.microsoft.com/office/powerpoint/2010/main" val="3736608000"/>
+        <p14:creationId xmlns:p14="http://schemas.microsoft.com/office/powerpoint/2010/main" val="1049256810"/>
       </p:ext>
     </p:extLst>
   </p:cSld>
@@ -12837,7 +12525,7 @@
       </p:grpSpPr>
       <p:sp>
         <p:nvSpPr>
-          <p:cNvPr id="61442" name="Rectangle 2"/>
+          <p:cNvPr id="55298" name="Rectangle 2"/>
           <p:cNvSpPr>
             <a:spLocks noGrp="1" noChangeArrowheads="1"/>
           </p:cNvSpPr>
@@ -12847,69 +12535,88 @@
         </p:nvSpPr>
         <p:spPr/>
         <p:txBody>
-          <a:bodyPr/>
-          <a:lstStyle/>
-          <a:p>
-            <a:r>
-              <a:rPr lang="en-US"/>
+          <a:bodyPr>
+            <a:normAutofit/>
+          </a:bodyPr>
+          <a:lstStyle/>
+          <a:p>
+            <a:r>
+              <a:rPr lang="en-US" sz="4000"/>
+              <a:t>Late Ming Government </a:t>
+            </a:r>
+            <a:br>
+              <a:rPr lang="en-US" sz="4000"/>
+            </a:br>
+            <a:r>
+              <a:rPr lang="en-US" sz="4000"/>
+              <a:t>(1590-1644)</a:t>
+            </a:r>
+          </a:p>
+        </p:txBody>
+      </p:sp>
+      <p:sp>
+        <p:nvSpPr>
+          <p:cNvPr id="55299" name="Rectangle 3"/>
+          <p:cNvSpPr>
+            <a:spLocks noGrp="1" noChangeArrowheads="1"/>
+          </p:cNvSpPr>
+          <p:nvPr>
+            <p:ph idx="1"/>
+          </p:nvPr>
+        </p:nvSpPr>
+        <p:spPr>
+          <a:xfrm>
+            <a:off x="2209800" y="1657350"/>
+            <a:ext cx="7772400" cy="4667250"/>
+          </a:xfrm>
+        </p:spPr>
+        <p:txBody>
+          <a:bodyPr>
+            <a:normAutofit/>
+          </a:bodyPr>
+          <a:lstStyle/>
+          <a:p>
+            <a:r>
+              <a:rPr lang="en-US" sz="3600" dirty="0"/>
+              <a:t>Incompetent Emperors</a:t>
+            </a:r>
+          </a:p>
+          <a:p>
+            <a:r>
+              <a:rPr lang="en-US" sz="3600" dirty="0"/>
               <a:t>Eunuch Influence and Power</a:t>
             </a:r>
           </a:p>
-        </p:txBody>
-      </p:sp>
-      <p:sp>
-        <p:nvSpPr>
-          <p:cNvPr id="61443" name="Rectangle 3"/>
-          <p:cNvSpPr>
-            <a:spLocks noGrp="1" noChangeArrowheads="1"/>
-          </p:cNvSpPr>
-          <p:nvPr>
-            <p:ph idx="1"/>
-          </p:nvPr>
-        </p:nvSpPr>
-        <p:spPr/>
-        <p:txBody>
-          <a:bodyPr/>
-          <a:lstStyle/>
-          <a:p>
-            <a:r>
-              <a:rPr lang="en-US"/>
-              <a:t>Wei Zhongxian (1568-1627)</a:t>
-            </a:r>
-          </a:p>
-          <a:p>
-            <a:pPr lvl="1"/>
-            <a:r>
-              <a:rPr lang="en-US"/>
-              <a:t>Purged all opponents; including Donglin Acadamy</a:t>
-            </a:r>
-          </a:p>
-          <a:p>
-            <a:pPr lvl="1"/>
-            <a:r>
-              <a:rPr lang="en-US"/>
-              <a:t>Granted himself honors and title</a:t>
-            </a:r>
-          </a:p>
-          <a:p>
-            <a:pPr lvl="1"/>
-            <a:r>
-              <a:rPr lang="en-US"/>
-              <a:t>Had nephew performs rites limited to emperor</a:t>
-            </a:r>
-          </a:p>
-          <a:p>
-            <a:pPr lvl="1"/>
-            <a:r>
-              <a:rPr lang="en-US"/>
-              <a:t>Temples housing his image</a:t>
-            </a:r>
-          </a:p>
-          <a:p>
-            <a:r>
-              <a:rPr lang="en-US"/>
-              <a:t>Did not survive death of Xizong Emperor</a:t>
-            </a:r>
+          <a:p>
+            <a:r>
+              <a:rPr lang="en-US" sz="3600" dirty="0" err="1"/>
+              <a:t>Donglin</a:t>
+            </a:r>
+            <a:r>
+              <a:rPr lang="en-US" sz="3600" dirty="0"/>
+              <a:t> Academy </a:t>
+            </a:r>
+          </a:p>
+          <a:p>
+            <a:r>
+              <a:rPr lang="en-US" sz="3600" dirty="0" err="1"/>
+              <a:t>Hideyoshi</a:t>
+            </a:r>
+            <a:r>
+              <a:rPr lang="en-US" sz="3600" dirty="0"/>
+              <a:t> Invasions of Korea</a:t>
+            </a:r>
+          </a:p>
+          <a:p>
+            <a:r>
+              <a:rPr lang="en-US" sz="3600" dirty="0"/>
+              <a:t>Rise of Manchus – </a:t>
+            </a:r>
+            <a:r>
+              <a:rPr lang="en-US" sz="3600" dirty="0" err="1"/>
+              <a:t>Nurgaci</a:t>
+            </a:r>
+            <a:endParaRPr lang="en-US" sz="3600" dirty="0"/>
           </a:p>
         </p:txBody>
       </p:sp>
@@ -12940,7 +12647,7 @@
       </p:grpSpPr>
       <p:sp>
         <p:nvSpPr>
-          <p:cNvPr id="57346" name="Rectangle 2"/>
+          <p:cNvPr id="56322" name="Rectangle 2"/>
           <p:cNvSpPr>
             <a:spLocks noGrp="1" noChangeArrowheads="1"/>
           </p:cNvSpPr>
@@ -12955,130 +12662,90 @@
           <a:p>
             <a:r>
               <a:rPr lang="en-US"/>
-              <a:t>Hideyoshi Invasions of Korea</a:t>
-            </a:r>
-          </a:p>
-        </p:txBody>
-      </p:sp>
-      <p:sp>
-        <p:nvSpPr>
-          <p:cNvPr id="57347" name="Rectangle 3"/>
+              <a:t>Incompetent Emperors</a:t>
+            </a:r>
+          </a:p>
+        </p:txBody>
+      </p:sp>
+      <p:sp>
+        <p:nvSpPr>
+          <p:cNvPr id="56323" name="Rectangle 3"/>
           <p:cNvSpPr>
             <a:spLocks noGrp="1" noChangeArrowheads="1"/>
           </p:cNvSpPr>
           <p:nvPr>
-            <p:ph type="body" sz="half" idx="1"/>
-          </p:nvPr>
-        </p:nvSpPr>
-        <p:spPr>
-          <a:xfrm>
-            <a:off x="1524000" y="1657350"/>
-            <a:ext cx="4495800" cy="4743450"/>
-          </a:xfrm>
-        </p:spPr>
-        <p:txBody>
-          <a:bodyPr>
-            <a:normAutofit fontScale="92500"/>
-          </a:bodyPr>
-          <a:lstStyle/>
-          <a:p>
-            <a:pPr>
-              <a:lnSpc>
-                <a:spcPct val="90000"/>
-              </a:lnSpc>
-            </a:pPr>
-            <a:r>
-              <a:rPr lang="en-US" sz="2400"/>
-              <a:t>1592 – Hideyoshi demands passage to China; attacks Korea armed with Portuguese muskets</a:t>
-            </a:r>
-          </a:p>
-          <a:p>
-            <a:pPr>
-              <a:lnSpc>
-                <a:spcPct val="90000"/>
-              </a:lnSpc>
-            </a:pPr>
-            <a:r>
-              <a:rPr lang="en-US" sz="2400"/>
-              <a:t>Land forces suffer defeats; but navy scores victory under Admiral Yi Sunshin and his turtle boats</a:t>
-            </a:r>
-          </a:p>
-          <a:p>
-            <a:pPr>
-              <a:lnSpc>
-                <a:spcPct val="90000"/>
-              </a:lnSpc>
-            </a:pPr>
-            <a:r>
-              <a:rPr lang="en-US" sz="2400"/>
-              <a:t>Ming sends troops to defend its vassal</a:t>
-            </a:r>
-          </a:p>
-          <a:p>
-            <a:pPr>
-              <a:lnSpc>
-                <a:spcPct val="90000"/>
-              </a:lnSpc>
-            </a:pPr>
-            <a:r>
-              <a:rPr lang="en-US" sz="2400"/>
-              <a:t>1597 – 2</a:t>
-            </a:r>
-            <a:r>
-              <a:rPr lang="en-US" sz="2400" baseline="30000"/>
-              <a:t>nd</a:t>
-            </a:r>
-            <a:r>
-              <a:rPr lang="en-US" sz="2400"/>
-              <a:t> wave of invasion</a:t>
-            </a:r>
-          </a:p>
-          <a:p>
-            <a:pPr>
-              <a:lnSpc>
-                <a:spcPct val="90000"/>
-              </a:lnSpc>
-            </a:pPr>
-            <a:r>
-              <a:rPr lang="en-US" sz="2400"/>
-              <a:t>1598 – Hideyoshi dies; troops withdraw from Korea</a:t>
-            </a:r>
-          </a:p>
-          <a:p>
-            <a:pPr>
-              <a:lnSpc>
-                <a:spcPct val="90000"/>
-              </a:lnSpc>
-            </a:pPr>
-            <a:endParaRPr lang="en-US" sz="2400"/>
-          </a:p>
-        </p:txBody>
-      </p:sp>
-      <p:pic>
-        <p:nvPicPr>
-          <p:cNvPr id="57349" name="Picture 5" descr="turtle boat"/>
-          <p:cNvPicPr>
-            <a:picLocks noGrp="1" noChangeAspect="1" noChangeArrowheads="1"/>
-          </p:cNvPicPr>
-          <p:nvPr>
-            <p:ph sz="half" idx="2"/>
-          </p:nvPr>
-        </p:nvPicPr>
-        <p:blipFill>
-          <a:blip r:embed="rId2" cstate="print"/>
-          <a:stretch>
-            <a:fillRect/>
-          </a:stretch>
-        </p:blipFill>
-        <p:spPr>
-          <a:xfrm>
-            <a:off x="6172200" y="2541721"/>
-            <a:ext cx="3810000" cy="2346059"/>
-          </a:xfrm>
-          <a:noFill/>
-          <a:ln/>
-        </p:spPr>
-      </p:pic>
+            <p:ph idx="1"/>
+          </p:nvPr>
+        </p:nvSpPr>
+        <p:spPr/>
+        <p:txBody>
+          <a:bodyPr/>
+          <a:lstStyle/>
+          <a:p>
+            <a:r>
+              <a:rPr lang="en-US" dirty="0" err="1"/>
+              <a:t>Shenzong</a:t>
+            </a:r>
+            <a:r>
+              <a:rPr lang="en-US" dirty="0"/>
+              <a:t> (</a:t>
+            </a:r>
+            <a:r>
+              <a:rPr lang="en-US" dirty="0" err="1"/>
+              <a:t>Wanli</a:t>
+            </a:r>
+            <a:r>
+              <a:rPr lang="en-US" dirty="0"/>
+              <a:t>)</a:t>
+            </a:r>
+          </a:p>
+          <a:p>
+            <a:pPr lvl="1"/>
+            <a:r>
+              <a:rPr lang="en-US" dirty="0"/>
+              <a:t>Abandoned public life; 25 years without holding audience</a:t>
+            </a:r>
+          </a:p>
+          <a:p>
+            <a:pPr lvl="1"/>
+            <a:r>
+              <a:rPr lang="en-US" dirty="0"/>
+              <a:t>Government business left undone; offices unstaffed</a:t>
+            </a:r>
+          </a:p>
+          <a:p>
+            <a:r>
+              <a:rPr lang="en-US" dirty="0" err="1"/>
+              <a:t>Xizong</a:t>
+            </a:r>
+            <a:r>
+              <a:rPr lang="en-US" dirty="0"/>
+              <a:t> (</a:t>
+            </a:r>
+            <a:r>
+              <a:rPr lang="en-US" dirty="0" err="1"/>
+              <a:t>Tainqi</a:t>
+            </a:r>
+            <a:r>
+              <a:rPr lang="en-US" dirty="0"/>
+              <a:t>)</a:t>
+            </a:r>
+          </a:p>
+          <a:p>
+            <a:pPr lvl="1"/>
+            <a:r>
+              <a:rPr lang="en-US" dirty="0"/>
+              <a:t>Illiterate carpenter</a:t>
+            </a:r>
+          </a:p>
+          <a:p>
+            <a:r>
+              <a:rPr lang="en-US" dirty="0"/>
+              <a:t>Factionalism flourished; eunuchs gain power</a:t>
+            </a:r>
+          </a:p>
+        </p:txBody>
+      </p:sp>
     </p:spTree>
   </p:cSld>
   <p:clrMapOvr>
@@ -13106,7 +12773,7 @@
       </p:grpSpPr>
       <p:sp>
         <p:nvSpPr>
-          <p:cNvPr id="59394" name="Rectangle 2"/>
+          <p:cNvPr id="62466" name="Rectangle 2"/>
           <p:cNvSpPr>
             <a:spLocks noGrp="1" noChangeArrowheads="1"/>
           </p:cNvSpPr>
@@ -13121,88 +12788,47 @@
           <a:p>
             <a:r>
               <a:rPr lang="en-US"/>
-              <a:t>Rise of Manchus</a:t>
-            </a:r>
-          </a:p>
-        </p:txBody>
-      </p:sp>
-      <p:pic>
-        <p:nvPicPr>
-          <p:cNvPr id="59397" name="Picture 5" descr="Nurhaci"/>
-          <p:cNvPicPr>
-            <a:picLocks noGrp="1" noChangeAspect="1" noChangeArrowheads="1"/>
-          </p:cNvPicPr>
-          <p:nvPr>
-            <p:ph sz="half" idx="1"/>
-          </p:nvPr>
-        </p:nvPicPr>
-        <p:blipFill>
-          <a:blip r:embed="rId2" cstate="print"/>
-          <a:stretch>
-            <a:fillRect/>
-          </a:stretch>
-        </p:blipFill>
-        <p:spPr>
-          <a:xfrm>
-            <a:off x="2213102" y="1840230"/>
-            <a:ext cx="2482596" cy="3749040"/>
-          </a:xfrm>
-          <a:noFill/>
-          <a:ln/>
-        </p:spPr>
-      </p:pic>
-      <p:sp>
-        <p:nvSpPr>
-          <p:cNvPr id="59395" name="Rectangle 3"/>
+              <a:t>Donglin Academy</a:t>
+            </a:r>
+          </a:p>
+        </p:txBody>
+      </p:sp>
+      <p:sp>
+        <p:nvSpPr>
+          <p:cNvPr id="62467" name="Rectangle 3"/>
           <p:cNvSpPr>
             <a:spLocks noGrp="1" noChangeArrowheads="1"/>
           </p:cNvSpPr>
           <p:nvPr>
-            <p:ph type="body" sz="half" idx="2"/>
-          </p:nvPr>
-        </p:nvSpPr>
-        <p:spPr>
-          <a:xfrm>
-            <a:off x="6172200" y="1657350"/>
-            <a:ext cx="3810000" cy="4591050"/>
-          </a:xfrm>
-        </p:spPr>
-        <p:txBody>
-          <a:bodyPr>
-            <a:normAutofit fontScale="92500" lnSpcReduction="10000"/>
-          </a:bodyPr>
-          <a:lstStyle/>
-          <a:p>
-            <a:pPr>
-              <a:lnSpc>
-                <a:spcPct val="90000"/>
-              </a:lnSpc>
-            </a:pPr>
-            <a:r>
-              <a:rPr lang="en-US" sz="2800"/>
-              <a:t>Nurgaci (also Nurhaci) – Chieftan of Jurchen tribe;</a:t>
-            </a:r>
-          </a:p>
-          <a:p>
-            <a:pPr>
-              <a:lnSpc>
-                <a:spcPct val="90000"/>
-              </a:lnSpc>
-            </a:pPr>
-            <a:r>
-              <a:rPr lang="en-US" sz="2800"/>
-              <a:t>Parallel to Genghis Khan, organized tribes to unified state and substantial fighting force</a:t>
-            </a:r>
-          </a:p>
-          <a:p>
-            <a:pPr>
-              <a:lnSpc>
-                <a:spcPct val="90000"/>
-              </a:lnSpc>
-            </a:pPr>
-            <a:r>
-              <a:rPr lang="en-US" sz="2800"/>
-              <a:t>1616 – founds the (Later) Jin – later renamed the Qing</a:t>
+            <p:ph idx="1"/>
+          </p:nvPr>
+        </p:nvSpPr>
+        <p:spPr/>
+        <p:txBody>
+          <a:bodyPr/>
+          <a:lstStyle/>
+          <a:p>
+            <a:r>
+              <a:rPr lang="en-US"/>
+              <a:t>Founded in 1604</a:t>
+            </a:r>
+          </a:p>
+          <a:p>
+            <a:r>
+              <a:rPr lang="en-US"/>
+              <a:t>Confucian saw their duty to protest against political abuse and un-Confucian behavior</a:t>
+            </a:r>
+          </a:p>
+          <a:p>
+            <a:r>
+              <a:rPr lang="en-US"/>
+              <a:t>Center for “pure-criticism”</a:t>
+            </a:r>
+          </a:p>
+          <a:p>
+            <a:r>
+              <a:rPr lang="en-US"/>
+              <a:t>Contributed to factionalism of Late Ming</a:t>
             </a:r>
           </a:p>
         </p:txBody>
@@ -13368,7 +12994,294 @@
       </p:grpSpPr>
       <p:sp>
         <p:nvSpPr>
-          <p:cNvPr id="63490" name="Rectangle 2"/>
+          <p:cNvPr id="2" name="Title 1"/>
+          <p:cNvSpPr>
+            <a:spLocks noGrp="1"/>
+          </p:cNvSpPr>
+          <p:nvPr>
+            <p:ph type="title"/>
+          </p:nvPr>
+        </p:nvSpPr>
+        <p:spPr/>
+        <p:txBody>
+          <a:bodyPr/>
+          <a:lstStyle/>
+          <a:p>
+            <a:r>
+              <a:rPr lang="en-US" dirty="0"/>
+              <a:t>Eunuchs in the Ming Dynasty</a:t>
+            </a:r>
+          </a:p>
+        </p:txBody>
+      </p:sp>
+      <p:sp>
+        <p:nvSpPr>
+          <p:cNvPr id="3" name="Content Placeholder 2"/>
+          <p:cNvSpPr>
+            <a:spLocks noGrp="1"/>
+          </p:cNvSpPr>
+          <p:nvPr>
+            <p:ph idx="1"/>
+          </p:nvPr>
+        </p:nvSpPr>
+        <p:spPr/>
+        <p:txBody>
+          <a:bodyPr>
+            <a:normAutofit/>
+          </a:bodyPr>
+          <a:lstStyle/>
+          <a:p>
+            <a:r>
+              <a:rPr lang="en-US" dirty="0"/>
+              <a:t>Two paths to power and influence</a:t>
+            </a:r>
+          </a:p>
+          <a:p>
+            <a:r>
+              <a:rPr lang="en-US" dirty="0"/>
+              <a:t>Demand and Supply</a:t>
+            </a:r>
+          </a:p>
+          <a:p>
+            <a:r>
+              <a:rPr lang="en-US" dirty="0"/>
+              <a:t>Institutionalization of Eunuchs</a:t>
+            </a:r>
+          </a:p>
+          <a:p>
+            <a:pPr lvl="1"/>
+            <a:r>
+              <a:rPr lang="en-US" dirty="0"/>
+              <a:t>Military</a:t>
+            </a:r>
+          </a:p>
+          <a:p>
+            <a:pPr lvl="1"/>
+            <a:r>
+              <a:rPr lang="en-US" dirty="0"/>
+              <a:t>Intelligence</a:t>
+            </a:r>
+          </a:p>
+          <a:p>
+            <a:pPr lvl="1"/>
+            <a:r>
+              <a:rPr lang="en-US" dirty="0"/>
+              <a:t>Diplomacy</a:t>
+            </a:r>
+          </a:p>
+          <a:p>
+            <a:r>
+              <a:rPr lang="en-US" dirty="0"/>
+              <a:t>Estimated 1 million eunuchs over 250 years of Ming Dynasty</a:t>
+            </a:r>
+          </a:p>
+          <a:p>
+            <a:pPr lvl="1"/>
+            <a:r>
+              <a:rPr lang="en-US" dirty="0"/>
+              <a:t>Between 20,000 – 80,000 at any one time</a:t>
+            </a:r>
+          </a:p>
+          <a:p>
+            <a:r>
+              <a:rPr lang="en-US" dirty="0"/>
+              <a:t>Traditional Confucian Accounts vs. Modern Interpretation</a:t>
+            </a:r>
+          </a:p>
+          <a:p>
+            <a:pPr lvl="1"/>
+            <a:r>
+              <a:rPr lang="en-US" dirty="0"/>
+              <a:t>Wei </a:t>
+            </a:r>
+            <a:r>
+              <a:rPr lang="en-US" dirty="0" err="1"/>
+              <a:t>Zhongxian</a:t>
+            </a:r>
+            <a:endParaRPr lang="en-US" dirty="0"/>
+          </a:p>
+        </p:txBody>
+      </p:sp>
+    </p:spTree>
+    <p:extLst>
+      <p:ext uri="{BB962C8B-B14F-4D97-AF65-F5344CB8AC3E}">
+        <p14:creationId xmlns:p14="http://schemas.microsoft.com/office/powerpoint/2010/main" val="2191714699"/>
+      </p:ext>
+    </p:extLst>
+  </p:cSld>
+  <p:clrMapOvr>
+    <a:masterClrMapping/>
+  </p:clrMapOvr>
+</p:sld>
+</file>
+
+<file path=ppt/slides/slide41.xml><?xml version="1.0" encoding="utf-8"?>
+<p:sld xmlns:a="http://schemas.openxmlformats.org/drawingml/2006/main" xmlns:r="http://schemas.openxmlformats.org/officeDocument/2006/relationships" xmlns:p="http://schemas.openxmlformats.org/presentationml/2006/main">
+  <p:cSld>
+    <p:spTree>
+      <p:nvGrpSpPr>
+        <p:cNvPr id="1" name=""/>
+        <p:cNvGrpSpPr/>
+        <p:nvPr/>
+      </p:nvGrpSpPr>
+      <p:grpSpPr>
+        <a:xfrm>
+          <a:off x="0" y="0"/>
+          <a:ext cx="0" cy="0"/>
+          <a:chOff x="0" y="0"/>
+          <a:chExt cx="0" cy="0"/>
+        </a:xfrm>
+      </p:grpSpPr>
+      <p:sp>
+        <p:nvSpPr>
+          <p:cNvPr id="2" name="Title 1"/>
+          <p:cNvSpPr>
+            <a:spLocks noGrp="1"/>
+          </p:cNvSpPr>
+          <p:nvPr>
+            <p:ph type="title"/>
+          </p:nvPr>
+        </p:nvSpPr>
+        <p:spPr/>
+        <p:txBody>
+          <a:bodyPr/>
+          <a:lstStyle/>
+          <a:p>
+            <a:r>
+              <a:rPr lang="en-US" dirty="0"/>
+              <a:t>Eunuchs in the Ming Dynasty</a:t>
+            </a:r>
+          </a:p>
+        </p:txBody>
+      </p:sp>
+      <p:sp>
+        <p:nvSpPr>
+          <p:cNvPr id="3" name="Content Placeholder 2"/>
+          <p:cNvSpPr>
+            <a:spLocks noGrp="1"/>
+          </p:cNvSpPr>
+          <p:nvPr>
+            <p:ph idx="1"/>
+          </p:nvPr>
+        </p:nvSpPr>
+        <p:spPr/>
+        <p:txBody>
+          <a:bodyPr>
+            <a:normAutofit fontScale="92500" lnSpcReduction="10000"/>
+          </a:bodyPr>
+          <a:lstStyle/>
+          <a:p>
+            <a:r>
+              <a:rPr lang="en-US" dirty="0"/>
+              <a:t>Two paths to power and influence</a:t>
+            </a:r>
+          </a:p>
+          <a:p>
+            <a:r>
+              <a:rPr lang="en-US" dirty="0"/>
+              <a:t>Demand and Supply</a:t>
+            </a:r>
+          </a:p>
+          <a:p>
+            <a:r>
+              <a:rPr lang="en-US" dirty="0"/>
+              <a:t>Institutionalization of Eunuchs</a:t>
+            </a:r>
+          </a:p>
+          <a:p>
+            <a:pPr lvl="1"/>
+            <a:r>
+              <a:rPr lang="en-US" dirty="0"/>
+              <a:t>Dual nature of Ming Dynastic Government</a:t>
+            </a:r>
+          </a:p>
+          <a:p>
+            <a:pPr lvl="1"/>
+            <a:r>
+              <a:rPr lang="en-US" dirty="0"/>
+              <a:t>Military</a:t>
+            </a:r>
+          </a:p>
+          <a:p>
+            <a:pPr lvl="1"/>
+            <a:r>
+              <a:rPr lang="en-US" dirty="0"/>
+              <a:t>Intelligence</a:t>
+            </a:r>
+          </a:p>
+          <a:p>
+            <a:pPr lvl="1"/>
+            <a:r>
+              <a:rPr lang="en-US" dirty="0"/>
+              <a:t>Diplomacy</a:t>
+            </a:r>
+          </a:p>
+          <a:p>
+            <a:r>
+              <a:rPr lang="en-US" dirty="0"/>
+              <a:t>Estimated 1 million eunuchs over 250 years of Ming Dynasty</a:t>
+            </a:r>
+          </a:p>
+          <a:p>
+            <a:pPr lvl="1"/>
+            <a:r>
+              <a:rPr lang="en-US" dirty="0"/>
+              <a:t>Between 20,000 – 80,000 at any one time</a:t>
+            </a:r>
+          </a:p>
+          <a:p>
+            <a:r>
+              <a:rPr lang="en-US" dirty="0"/>
+              <a:t>Traditional Confucian Accounts vs. Modern Interpretation</a:t>
+            </a:r>
+          </a:p>
+          <a:p>
+            <a:pPr lvl="1"/>
+            <a:r>
+              <a:rPr lang="en-US" dirty="0"/>
+              <a:t>Wei </a:t>
+            </a:r>
+            <a:r>
+              <a:rPr lang="en-US" dirty="0" err="1"/>
+              <a:t>Zhongxian</a:t>
+            </a:r>
+            <a:endParaRPr lang="en-US" dirty="0"/>
+          </a:p>
+        </p:txBody>
+      </p:sp>
+    </p:spTree>
+    <p:extLst>
+      <p:ext uri="{BB962C8B-B14F-4D97-AF65-F5344CB8AC3E}">
+        <p14:creationId xmlns:p14="http://schemas.microsoft.com/office/powerpoint/2010/main" val="3736608000"/>
+      </p:ext>
+    </p:extLst>
+  </p:cSld>
+  <p:clrMapOvr>
+    <a:masterClrMapping/>
+  </p:clrMapOvr>
+</p:sld>
+</file>
+
+<file path=ppt/slides/slide42.xml><?xml version="1.0" encoding="utf-8"?>
+<p:sld xmlns:a="http://schemas.openxmlformats.org/drawingml/2006/main" xmlns:r="http://schemas.openxmlformats.org/officeDocument/2006/relationships" xmlns:p="http://schemas.openxmlformats.org/presentationml/2006/main">
+  <p:cSld>
+    <p:spTree>
+      <p:nvGrpSpPr>
+        <p:cNvPr id="1" name=""/>
+        <p:cNvGrpSpPr/>
+        <p:nvPr/>
+      </p:nvGrpSpPr>
+      <p:grpSpPr>
+        <a:xfrm>
+          <a:off x="0" y="0"/>
+          <a:ext cx="0" cy="0"/>
+          <a:chOff x="0" y="0"/>
+          <a:chExt cx="0" cy="0"/>
+        </a:xfrm>
+      </p:grpSpPr>
+      <p:sp>
+        <p:nvSpPr>
+          <p:cNvPr id="61442" name="Rectangle 2"/>
           <p:cNvSpPr>
             <a:spLocks noGrp="1" noChangeArrowheads="1"/>
           </p:cNvSpPr>
@@ -13383,14 +13296,14 @@
           <a:p>
             <a:r>
               <a:rPr lang="en-US"/>
-              <a:t>Collapse of the Ming</a:t>
-            </a:r>
-          </a:p>
-        </p:txBody>
-      </p:sp>
-      <p:sp>
-        <p:nvSpPr>
-          <p:cNvPr id="63491" name="Rectangle 3"/>
+              <a:t>Eunuch Influence and Power</a:t>
+            </a:r>
+          </a:p>
+        </p:txBody>
+      </p:sp>
+      <p:sp>
+        <p:nvSpPr>
+          <p:cNvPr id="61443" name="Rectangle 3"/>
           <p:cNvSpPr>
             <a:spLocks noGrp="1" noChangeArrowheads="1"/>
           </p:cNvSpPr>
@@ -13405,41 +13318,41 @@
           <a:p>
             <a:r>
               <a:rPr lang="en-US"/>
-              <a:t>Immiseration cycle</a:t>
+              <a:t>Wei Zhongxian (1568-1627)</a:t>
             </a:r>
           </a:p>
           <a:p>
             <a:pPr lvl="1"/>
             <a:r>
               <a:rPr lang="en-US"/>
-              <a:t>Increasingly land taken off tax rolls</a:t>
+              <a:t>Purged all opponents; including Donglin Acadamy</a:t>
             </a:r>
           </a:p>
           <a:p>
             <a:pPr lvl="1"/>
             <a:r>
               <a:rPr lang="en-US"/>
-              <a:t>Fewer and fewer tax payers</a:t>
+              <a:t>Granted himself honors and title</a:t>
             </a:r>
           </a:p>
           <a:p>
             <a:pPr lvl="1"/>
             <a:r>
               <a:rPr lang="en-US"/>
-              <a:t>Grain storages sold; postal system shut down</a:t>
+              <a:t>Had nephew performs rites limited to emperor</a:t>
             </a:r>
           </a:p>
           <a:p>
             <a:pPr lvl="1"/>
             <a:r>
               <a:rPr lang="en-US"/>
-              <a:t>Dynasty unable to pay troops</a:t>
-            </a:r>
-          </a:p>
-          <a:p>
-            <a:r>
-              <a:rPr lang="en-US"/>
-              <a:t>Military deserters and dismissed postal works form outlaw gangs</a:t>
+              <a:t>Temples housing his image</a:t>
+            </a:r>
+          </a:p>
+          <a:p>
+            <a:r>
+              <a:rPr lang="en-US"/>
+              <a:t>Did not survive death of Xizong Emperor</a:t>
             </a:r>
           </a:p>
         </p:txBody>
@@ -13452,7 +13365,404 @@
 </p:sld>
 </file>
 
-<file path=ppt/slides/slide41.xml><?xml version="1.0" encoding="utf-8"?>
+<file path=ppt/slides/slide43.xml><?xml version="1.0" encoding="utf-8"?>
+<p:sld xmlns:a="http://schemas.openxmlformats.org/drawingml/2006/main" xmlns:r="http://schemas.openxmlformats.org/officeDocument/2006/relationships" xmlns:p="http://schemas.openxmlformats.org/presentationml/2006/main">
+  <p:cSld>
+    <p:spTree>
+      <p:nvGrpSpPr>
+        <p:cNvPr id="1" name=""/>
+        <p:cNvGrpSpPr/>
+        <p:nvPr/>
+      </p:nvGrpSpPr>
+      <p:grpSpPr>
+        <a:xfrm>
+          <a:off x="0" y="0"/>
+          <a:ext cx="0" cy="0"/>
+          <a:chOff x="0" y="0"/>
+          <a:chExt cx="0" cy="0"/>
+        </a:xfrm>
+      </p:grpSpPr>
+      <p:sp>
+        <p:nvSpPr>
+          <p:cNvPr id="57346" name="Rectangle 2"/>
+          <p:cNvSpPr>
+            <a:spLocks noGrp="1" noChangeArrowheads="1"/>
+          </p:cNvSpPr>
+          <p:nvPr>
+            <p:ph type="title"/>
+          </p:nvPr>
+        </p:nvSpPr>
+        <p:spPr/>
+        <p:txBody>
+          <a:bodyPr/>
+          <a:lstStyle/>
+          <a:p>
+            <a:r>
+              <a:rPr lang="en-US"/>
+              <a:t>Hideyoshi Invasions of Korea</a:t>
+            </a:r>
+          </a:p>
+        </p:txBody>
+      </p:sp>
+      <p:sp>
+        <p:nvSpPr>
+          <p:cNvPr id="57347" name="Rectangle 3"/>
+          <p:cNvSpPr>
+            <a:spLocks noGrp="1" noChangeArrowheads="1"/>
+          </p:cNvSpPr>
+          <p:nvPr>
+            <p:ph type="body" sz="half" idx="1"/>
+          </p:nvPr>
+        </p:nvSpPr>
+        <p:spPr>
+          <a:xfrm>
+            <a:off x="1524000" y="1657350"/>
+            <a:ext cx="4495800" cy="4743450"/>
+          </a:xfrm>
+        </p:spPr>
+        <p:txBody>
+          <a:bodyPr>
+            <a:normAutofit fontScale="92500"/>
+          </a:bodyPr>
+          <a:lstStyle/>
+          <a:p>
+            <a:pPr>
+              <a:lnSpc>
+                <a:spcPct val="90000"/>
+              </a:lnSpc>
+            </a:pPr>
+            <a:r>
+              <a:rPr lang="en-US" sz="2400"/>
+              <a:t>1592 – Hideyoshi demands passage to China; attacks Korea armed with Portuguese muskets</a:t>
+            </a:r>
+          </a:p>
+          <a:p>
+            <a:pPr>
+              <a:lnSpc>
+                <a:spcPct val="90000"/>
+              </a:lnSpc>
+            </a:pPr>
+            <a:r>
+              <a:rPr lang="en-US" sz="2400"/>
+              <a:t>Land forces suffer defeats; but navy scores victory under Admiral Yi Sunshin and his turtle boats</a:t>
+            </a:r>
+          </a:p>
+          <a:p>
+            <a:pPr>
+              <a:lnSpc>
+                <a:spcPct val="90000"/>
+              </a:lnSpc>
+            </a:pPr>
+            <a:r>
+              <a:rPr lang="en-US" sz="2400"/>
+              <a:t>Ming sends troops to defend its vassal</a:t>
+            </a:r>
+          </a:p>
+          <a:p>
+            <a:pPr>
+              <a:lnSpc>
+                <a:spcPct val="90000"/>
+              </a:lnSpc>
+            </a:pPr>
+            <a:r>
+              <a:rPr lang="en-US" sz="2400"/>
+              <a:t>1597 – 2</a:t>
+            </a:r>
+            <a:r>
+              <a:rPr lang="en-US" sz="2400" baseline="30000"/>
+              <a:t>nd</a:t>
+            </a:r>
+            <a:r>
+              <a:rPr lang="en-US" sz="2400"/>
+              <a:t> wave of invasion</a:t>
+            </a:r>
+          </a:p>
+          <a:p>
+            <a:pPr>
+              <a:lnSpc>
+                <a:spcPct val="90000"/>
+              </a:lnSpc>
+            </a:pPr>
+            <a:r>
+              <a:rPr lang="en-US" sz="2400"/>
+              <a:t>1598 – Hideyoshi dies; troops withdraw from Korea</a:t>
+            </a:r>
+          </a:p>
+          <a:p>
+            <a:pPr>
+              <a:lnSpc>
+                <a:spcPct val="90000"/>
+              </a:lnSpc>
+            </a:pPr>
+            <a:endParaRPr lang="en-US" sz="2400"/>
+          </a:p>
+        </p:txBody>
+      </p:sp>
+      <p:pic>
+        <p:nvPicPr>
+          <p:cNvPr id="57349" name="Picture 5" descr="turtle boat"/>
+          <p:cNvPicPr>
+            <a:picLocks noGrp="1" noChangeAspect="1" noChangeArrowheads="1"/>
+          </p:cNvPicPr>
+          <p:nvPr>
+            <p:ph sz="half" idx="2"/>
+          </p:nvPr>
+        </p:nvPicPr>
+        <p:blipFill>
+          <a:blip r:embed="rId2" cstate="print"/>
+          <a:stretch>
+            <a:fillRect/>
+          </a:stretch>
+        </p:blipFill>
+        <p:spPr>
+          <a:xfrm>
+            <a:off x="6172200" y="2541721"/>
+            <a:ext cx="3810000" cy="2346059"/>
+          </a:xfrm>
+          <a:noFill/>
+          <a:ln/>
+        </p:spPr>
+      </p:pic>
+    </p:spTree>
+  </p:cSld>
+  <p:clrMapOvr>
+    <a:masterClrMapping/>
+  </p:clrMapOvr>
+</p:sld>
+</file>
+
+<file path=ppt/slides/slide44.xml><?xml version="1.0" encoding="utf-8"?>
+<p:sld xmlns:a="http://schemas.openxmlformats.org/drawingml/2006/main" xmlns:r="http://schemas.openxmlformats.org/officeDocument/2006/relationships" xmlns:p="http://schemas.openxmlformats.org/presentationml/2006/main">
+  <p:cSld>
+    <p:spTree>
+      <p:nvGrpSpPr>
+        <p:cNvPr id="1" name=""/>
+        <p:cNvGrpSpPr/>
+        <p:nvPr/>
+      </p:nvGrpSpPr>
+      <p:grpSpPr>
+        <a:xfrm>
+          <a:off x="0" y="0"/>
+          <a:ext cx="0" cy="0"/>
+          <a:chOff x="0" y="0"/>
+          <a:chExt cx="0" cy="0"/>
+        </a:xfrm>
+      </p:grpSpPr>
+      <p:sp>
+        <p:nvSpPr>
+          <p:cNvPr id="59394" name="Rectangle 2"/>
+          <p:cNvSpPr>
+            <a:spLocks noGrp="1" noChangeArrowheads="1"/>
+          </p:cNvSpPr>
+          <p:nvPr>
+            <p:ph type="title"/>
+          </p:nvPr>
+        </p:nvSpPr>
+        <p:spPr/>
+        <p:txBody>
+          <a:bodyPr/>
+          <a:lstStyle/>
+          <a:p>
+            <a:r>
+              <a:rPr lang="en-US"/>
+              <a:t>Rise of Manchus</a:t>
+            </a:r>
+          </a:p>
+        </p:txBody>
+      </p:sp>
+      <p:pic>
+        <p:nvPicPr>
+          <p:cNvPr id="59397" name="Picture 5" descr="Nurhaci"/>
+          <p:cNvPicPr>
+            <a:picLocks noGrp="1" noChangeAspect="1" noChangeArrowheads="1"/>
+          </p:cNvPicPr>
+          <p:nvPr>
+            <p:ph sz="half" idx="1"/>
+          </p:nvPr>
+        </p:nvPicPr>
+        <p:blipFill>
+          <a:blip r:embed="rId2" cstate="print"/>
+          <a:stretch>
+            <a:fillRect/>
+          </a:stretch>
+        </p:blipFill>
+        <p:spPr>
+          <a:xfrm>
+            <a:off x="2213102" y="1840230"/>
+            <a:ext cx="2482596" cy="3749040"/>
+          </a:xfrm>
+          <a:noFill/>
+          <a:ln/>
+        </p:spPr>
+      </p:pic>
+      <p:sp>
+        <p:nvSpPr>
+          <p:cNvPr id="59395" name="Rectangle 3"/>
+          <p:cNvSpPr>
+            <a:spLocks noGrp="1" noChangeArrowheads="1"/>
+          </p:cNvSpPr>
+          <p:nvPr>
+            <p:ph type="body" sz="half" idx="2"/>
+          </p:nvPr>
+        </p:nvSpPr>
+        <p:spPr>
+          <a:xfrm>
+            <a:off x="6172200" y="1657350"/>
+            <a:ext cx="3810000" cy="4591050"/>
+          </a:xfrm>
+        </p:spPr>
+        <p:txBody>
+          <a:bodyPr>
+            <a:normAutofit fontScale="92500" lnSpcReduction="10000"/>
+          </a:bodyPr>
+          <a:lstStyle/>
+          <a:p>
+            <a:pPr>
+              <a:lnSpc>
+                <a:spcPct val="90000"/>
+              </a:lnSpc>
+            </a:pPr>
+            <a:r>
+              <a:rPr lang="en-US" sz="2800"/>
+              <a:t>Nurgaci (also Nurhaci) – Chieftan of Jurchen tribe;</a:t>
+            </a:r>
+          </a:p>
+          <a:p>
+            <a:pPr>
+              <a:lnSpc>
+                <a:spcPct val="90000"/>
+              </a:lnSpc>
+            </a:pPr>
+            <a:r>
+              <a:rPr lang="en-US" sz="2800"/>
+              <a:t>Parallel to Genghis Khan, organized tribes to unified state and substantial fighting force</a:t>
+            </a:r>
+          </a:p>
+          <a:p>
+            <a:pPr>
+              <a:lnSpc>
+                <a:spcPct val="90000"/>
+              </a:lnSpc>
+            </a:pPr>
+            <a:r>
+              <a:rPr lang="en-US" sz="2800"/>
+              <a:t>1616 – founds the (Later) Jin – later renamed the Qing</a:t>
+            </a:r>
+          </a:p>
+        </p:txBody>
+      </p:sp>
+    </p:spTree>
+  </p:cSld>
+  <p:clrMapOvr>
+    <a:masterClrMapping/>
+  </p:clrMapOvr>
+</p:sld>
+</file>
+
+<file path=ppt/slides/slide45.xml><?xml version="1.0" encoding="utf-8"?>
+<p:sld xmlns:a="http://schemas.openxmlformats.org/drawingml/2006/main" xmlns:r="http://schemas.openxmlformats.org/officeDocument/2006/relationships" xmlns:p="http://schemas.openxmlformats.org/presentationml/2006/main">
+  <p:cSld>
+    <p:spTree>
+      <p:nvGrpSpPr>
+        <p:cNvPr id="1" name=""/>
+        <p:cNvGrpSpPr/>
+        <p:nvPr/>
+      </p:nvGrpSpPr>
+      <p:grpSpPr>
+        <a:xfrm>
+          <a:off x="0" y="0"/>
+          <a:ext cx="0" cy="0"/>
+          <a:chOff x="0" y="0"/>
+          <a:chExt cx="0" cy="0"/>
+        </a:xfrm>
+      </p:grpSpPr>
+      <p:sp>
+        <p:nvSpPr>
+          <p:cNvPr id="63490" name="Rectangle 2"/>
+          <p:cNvSpPr>
+            <a:spLocks noGrp="1" noChangeArrowheads="1"/>
+          </p:cNvSpPr>
+          <p:nvPr>
+            <p:ph type="title"/>
+          </p:nvPr>
+        </p:nvSpPr>
+        <p:spPr/>
+        <p:txBody>
+          <a:bodyPr/>
+          <a:lstStyle/>
+          <a:p>
+            <a:r>
+              <a:rPr lang="en-US"/>
+              <a:t>Collapse of the Ming</a:t>
+            </a:r>
+          </a:p>
+        </p:txBody>
+      </p:sp>
+      <p:sp>
+        <p:nvSpPr>
+          <p:cNvPr id="63491" name="Rectangle 3"/>
+          <p:cNvSpPr>
+            <a:spLocks noGrp="1" noChangeArrowheads="1"/>
+          </p:cNvSpPr>
+          <p:nvPr>
+            <p:ph idx="1"/>
+          </p:nvPr>
+        </p:nvSpPr>
+        <p:spPr/>
+        <p:txBody>
+          <a:bodyPr/>
+          <a:lstStyle/>
+          <a:p>
+            <a:r>
+              <a:rPr lang="en-US"/>
+              <a:t>Immiseration cycle</a:t>
+            </a:r>
+          </a:p>
+          <a:p>
+            <a:pPr lvl="1"/>
+            <a:r>
+              <a:rPr lang="en-US"/>
+              <a:t>Increasingly land taken off tax rolls</a:t>
+            </a:r>
+          </a:p>
+          <a:p>
+            <a:pPr lvl="1"/>
+            <a:r>
+              <a:rPr lang="en-US"/>
+              <a:t>Fewer and fewer tax payers</a:t>
+            </a:r>
+          </a:p>
+          <a:p>
+            <a:pPr lvl="1"/>
+            <a:r>
+              <a:rPr lang="en-US"/>
+              <a:t>Grain storages sold; postal system shut down</a:t>
+            </a:r>
+          </a:p>
+          <a:p>
+            <a:pPr lvl="1"/>
+            <a:r>
+              <a:rPr lang="en-US"/>
+              <a:t>Dynasty unable to pay troops</a:t>
+            </a:r>
+          </a:p>
+          <a:p>
+            <a:r>
+              <a:rPr lang="en-US"/>
+              <a:t>Military deserters and dismissed postal works form outlaw gangs</a:t>
+            </a:r>
+          </a:p>
+        </p:txBody>
+      </p:sp>
+    </p:spTree>
+  </p:cSld>
+  <p:clrMapOvr>
+    <a:masterClrMapping/>
+  </p:clrMapOvr>
+</p:sld>
+</file>
+
+<file path=ppt/slides/slide46.xml><?xml version="1.0" encoding="utf-8"?>
 <p:sld xmlns:a="http://schemas.openxmlformats.org/drawingml/2006/main" xmlns:r="http://schemas.openxmlformats.org/officeDocument/2006/relationships" xmlns:p="http://schemas.openxmlformats.org/presentationml/2006/main">
   <p:cSld>
     <p:spTree>
